--- a/dist/weeks-대학원/컨셉트와프로세스_07주차_확장과비판.pptx
+++ b/dist/weeks-대학원/컨셉트와프로세스_07주차_확장과비판.pptx
@@ -19,9 +19,12 @@
     <p:sldId id="267" r:id="rId13"/>
     <p:sldId id="268" r:id="rId14"/>
     <p:sldId id="269" r:id="rId15"/>
+    <p:sldId id="270" r:id="rId16"/>
+    <p:sldId id="271" r:id="rId17"/>
+    <p:sldId id="272" r:id="rId18"/>
   </p:sldIdLst>
   <p:notesMasterIdLst>
-    <p:notesMasterId r:id="rId16"/>
+    <p:notesMasterId r:id="rId19"/>
   </p:notesMasterIdLst>
   <p:sldSz cx="12192000" cy="6858000"/>
   <p:notesSz cx="6858000" cy="12192000"/>
@@ -523,6 +526,7 @@
 오늘 그걸 한번 의심해 보겠습니다. 쓰지 말라는 게 아닙니다. 그 도식이 무엇을 보여 주고 무엇을 가리는지 알고 쓰자는 겁니다.
 그리고 그 도식이 설명하지 못하는 자리에서 자란 것들을 보겠습니다. 참여디자인, 스페큘러티브 디자인, 그리고 생성 도구가 들어온 뒤의 상황까지.
 원래 두 번으로 잡았던 구간을 한 번으로 줄였습니다. 그래서 오늘 리딩이 가장 많습니다. 다 못 읽고 오신 분도 계실 텐데, 토론은 하실 수 있게 짜 놓았습니다.
+그리고 오늘 뒤쪽에 한 구간을 더 두었습니다. 2회차에 선행연구를 하셨지요. 그때 찾으신 다섯 편이 다음 회차 프로포절의 뼈대가 됩니다. 재료를 모은 일로만 두시면 아까워요. 거기까지 하고 마치겠습니다.
 [운영 메모]
 확장 구간을 한 회차로 압축한 자리다. 넓게 훑되 각 갈래마다 '내 연구와 무슨 상관인가'를 반드시 붙일 것. 리딩을 다 못 읽고 오는 학생이 나오므로 강의에서 핵심 주장을 요약해 주고 토론은 자기 연구 쪽으로 돌릴 것.</a:t>
             </a:r>
@@ -712,15 +716,12 @@
             <a:r>
               <a:rPr lang="en-US" dirty="0"/>
               <a:t>[말할 내용]
-마지막 워크숍입니다. 짧습니다.
-한 문단을 쓰실 겁니다. 다음 회차 프로포절에 그대로 들어갈 문단이에요.
-먼저 2분. 내 연구가 따르는 절차를 한 줄로 적으세요. 더블 다이아몬드든, 자기가 짠 것이든, 아직 없든. 없으면 없다고 적으시면 됩니다.
-다음 3분. 오늘 본 비판 네 줄 중에 내 연구에 걸리는 게 무엇인지 고르세요. 순서, 문제와 해결, 끝나는 지점, 누가 하는가. 하나나 둘이면 됩니다.
-그다음 3분. 그래서 내 연구는 그 자리를 어떻게 다루는지 적으세요. 그냥 '한계로 인정한다'도 답입니다. 다만 인정했다고 적어야 합니다.
-마지막 2분. 네 문장으로 이어 붙이세요. 내 절차는 무엇이고, 그 절차의 어디가 약하고, 나는 그걸 어떻게 다루고, 그래서 이 연구에서 그 선택이 왜 정당한가.
-이 네 문장이 프로포절의 연구 방법 절 앞에 들어갑니다. 심사에서 '왜 이 절차입니까'를 물으면 이 문단을 읽으시면 됩니다.
+네 번째입니다. 여기서 앞으로 돌아가겠습니다.
+2회차에 선행연구를 하셨지요. 다섯 편을 찾아서 정리표를 채우셨습니다.
+그때는 재료를 모으는 일로 보셨을 겁니다. 틀린 건 아닌데, 절반만 보신 거예요.
+다음 회차에 프로포절을 쓰셔야 하니까, 이제 나머지 절반을 말씀드릴 때가 됐습니다.
 [운영 메모]
-10분 안에 끝낸다. 완성이 목적이 아니라 뼈대를 잡는 것이다. 다 못 쓴 학생은 과제로 넘기되 네 문장 틀을 적어 가게 할 것.</a:t>
+교수님 지시로 들어간 구간이다(2026-10-06). 선행연구를 2회차의 작업으로만 두면 프로포절을 쓸 때 다시 쓰이지 않는다. 프로포절 직전인 이 회차에서 '그때 읽은 것이 지금 쓰는 글의 뼈대'로 연결해야 값을 한다.</a:t>
             </a:r>
             <a:endParaRPr lang="en-US" dirty="0"/>
           </a:p>
@@ -809,21 +810,17 @@
             <a:r>
               <a:rPr lang="en-US" dirty="0"/>
               <a:t>[말할 내용]
-마지막 안내입니다.
-다음이 마지막 회차고, 프로포절 발표입니다.
-왼쪽이 프로포절에 담을 여섯 절입니다.
-연구 배경과 문제. 연구 질문과 가설. 선행연구와 내 자리. 연구 방법과 절차. 예상 기여. 일정.
-세 번째와 네 번째를 보십시오. 2회차에 선행연구를 하면서 남의 연구 방법을 보라고 말씀드렸지요. 그게 이 두 절로 들어옵니다. 다섯 편 정리표의 방법 칸이 여기서 값을 합니다.
-그리고 오늘 쓴 한 문단이 네 번째 절 앞에 들어가고요.
-분량은 기획안에 8,000자로 되어 있었는데, 회차가 열다섯에서 여덟으로 줄었으니 조정하겠습니다. 학과와 정리되는 대로 알려 드리겠습니다. 지금은 여섯 절을 다 채우는 걸 목표로 하시면 됩니다.
-오른쪽이 진행 방식입니다.
-드래프트는 48시간 전까지 올려 주세요. 그래야 서로 읽고 옵니다.
-1인 발표와 질의. 그리고 상호 리뷰가 절반입니다. 각자 동료 한 사람당 질문 두 개를 준비해 오셔야 해요. 듣기만 하는 자리가 아닙니다.
-제가 보는 건 하나입니다. 연구 질문과 방법과 기여가 서로 맞물리는가. 질문은 큰데 방법이 작거나, 방법은 촘촘한데 그걸로 그 질문에 답할 수 없는 경우가 가장 흔합니다.
-마지막으로 학위 일정과 다음 단계를 함께 보겠습니다.
-한 학기 동안 쓰신 과제들을 꺼내 이어 붙이시면 뼈대가 나옵니다. 새로 쓰시는 게 아닙니다.
+많은 분들이 선행연구를 논문의 한 절로 생각하십니다. 2장이나 3장에 들어가는 그 절이요.
+그런데 제대로 하면 여섯 절 전부에 흔적이 남습니다. 왼쪽과 오른쪽을 비교해 보시죠.
+연구 배경. 왼쪽은 이 주제가 중요하다고 씁니다. 오른쪽은 다섯 편이 공통으로 전제하고 있는 것과, 아무도 건드리지 않은 자리를 씁니다. 같은 분량인데 설득력이 다릅니다.
+연구 질문. 왼쪽은 내 관심에서 나옵니다. 오른쪽은 남들이 한계 절에 적어 둔 데서 나와요.
+여기서 잠깐. 논문 끝에 '본 연구는 ~하지 못했다'고 적힌 부분 있지요. 거기가 다음 연구자의 출발점입니다. 본인이 못 했다고 공개적으로 적어 놓은 자리거든요. 그걸 내가 하면 기여가 성립합니다.
+연구 방법. 왼쪽은 인터뷰와 설문을 하겠다고 씁니다. 오른쪽은 누구의 절차를 왜 고쳐 쓰는지 밝힙니다. 2회차에 정리표의 방법 칸을 다섯 가지로 쪼개라고 말씀드린 게 여기서 쓰입니다.
+예상 기여. 왼쪽은 새로울 것이라고 주장합니다. 오른쪽은 지도 위의 빈 칸을 손가락으로 가리킵니다. 주장과 지시는 다릅니다.
+일정도 그래요. 왼쪽은 짐작으로 적고, 오른쪽은 비슷한 연구가 얼마나 걸렸는지 보고 적습니다. 인터뷰 스무 명을 석 달에 하겠다고 쓰셨는데 남들은 반년이 걸렸다면, 그 일정은 심사에서 바로 걸립니다.
+정리하면 이렇습니다. 선행연구를 한 절로 쓰면 그 절에서 끝나고, 뼈대로 쓰면 글 전체가 서 있습니다.
 [운영 메모]
-프로포절 분량은 학과 확인 후 확정해 공지할 것(기획안 8,000자 → 회차 축소분 반영). 상호 리뷰 질문 두 개는 반드시 받아야 8회차가 굴러간다.</a:t>
+'한계 절이 다음 연구자의 출발점'을 반드시 말할 것. 학생들이 선행연구를 읽을 때 가장 안 보는 자리이면서 연구 질문이 나오는 자리다. 2회차 정리표의 방법 칸과 연결해 줄 것.</a:t>
             </a:r>
             <a:endParaRPr lang="en-US" dirty="0"/>
           </a:p>
@@ -912,14 +909,23 @@
             <a:r>
               <a:rPr lang="en-US" dirty="0"/>
               <a:t>[말할 내용]
-확인하고 가실 것들입니다.
-앞 여섯 개가 프로포절이고, 뒤 넷이 발표 준비입니다.
-세 번째를 보세요. 선행연구 다섯 편이 본문에 실제로 인용되어 있는가. 목록만 뒤에 붙여 놓으면 안 됩니다. 2회차에 만드신 정리표의 다섯 번째 칸이 여기서 쓰여요.
-다섯 번째, 연구 방법 절에 절차뿐 아니라 자료와 판단 기준이 적혀 있는가. 2회차에 본 다섯 가지입니다. 남의 논문에서 보라고 한 걸 이제 본인 글에 쓰시는 겁니다.
-여덟 번째, 동료 질문 두 개씩 준비했는가. 이게 없으면 다음 회차의 절반이 비게 됩니다.
-열 번째는 매번 같습니다. 48시간 전 제출.
+두 번째입니다. 이제 내 논문의 꼴을 정하는 이야기예요.
+여러분이 읽으신 다섯 편에는 목차가 있습니다. 그 목차가 그냥 생긴 게 아니에요. 그 분야에서 논문을 이렇게 쓴다는 합의가 쌓인 겁니다.
+그러니까 다섯 편을 읽는 동안 두 가지가 같이 들어왔습니다. 이 분야가 무엇을 아는가, 그리고 이 분야에서 글을 어떻게 쓰는가.
+앞의 것은 내 논문의 내용이 되고 뒤의 것은 뼈대가 됩니다.
+왼쪽을 보시죠. 절마다 하는 일이 다릅니다.
+서론은 무엇이 왜 문제인지만 세웁니다. 대개 전체의 열에 하나예요. 여기가 길어지면 할 말이 아직 정리가 안 된 겁니다.
+연구 방법은 기준이 분명합니다. 남이 읽고 그대로 해 볼 수 있어야 해요.
+결과와 논의를 왜 나누는지 아십니까. 결과에는 나온 것만 적습니다. 해석은 논의에서 해요. 이걸 섞으면 읽는 사람이 사실과 저자의 생각을 구별할 수 없게 됩니다.
+결론은 질문에 답하고 멈춥니다. 결론에서 처음 나오는 개념이 있으면 그 논문은 아직 안 끝난 거예요.
+자, 그런데 남의 목차를 그대로 쓰시면 안 됩니다. 가져오되 내 것으로 바꾸셔야 해요.
+바꾸는 자리마다 이유가 있어야 합니다. 절 제목이 내용을 말하게 바꾸고, 내 연구에 없는 절은 빼고, 남의 논문에 없던 절이 필요하면 더하고, 순서를 바꿨으면 왜 바꿨는지 말할 수 있어야 하고요.
+오른쪽이 심사에서 나오는 질문입니다. 왜 이 순서입니까. 이 절은 왜 있습니까. 이 분야에서는 보통 어떻게 씁니까. 그 관습을 따랐습니까, 벗어났습니까.
+벗어나셔도 됩니다. 다만 벗어난 걸 알고 벗어나야 하고, 이유를 말할 수 있어야 합니다.
+아래 문장을 보십시오. 목차는 글을 쓰기 전에 내리는 판단의 목록입니다. 남의 것을 그대로 쓰면 판단을 남에게 맡긴 거예요.
+그러니까 다음 회차 프로포절을 쓰실 때, 여섯 절을 제가 드린 대로 채우지 마시고 왜 이 여섯 절인지를 한 번 생각하고 쓰십시오.
 [운영 메모]
-3 · 5 · 8 번을 먼저 확인할 것. 2주 간격이라 미루는 패턴이 굳으므로 '이번 주 안에 절반'을 말할 것.</a:t>
+다섯 편 중 가장 가까운 한 편의 목차를 띄워 놓고 함께 보면 전달이 빠르다. 결과와 논의를 섞는 문제는 두 학생 모두에게 나타날 가능성이 높다. '벗어나도 되지만 알고 벗어나야 한다'를 반드시 말할 것.</a:t>
             </a:r>
             <a:endParaRPr lang="en-US" dirty="0"/>
           </a:p>
@@ -1008,17 +1014,15 @@
             <a:r>
               <a:rPr lang="en-US" dirty="0"/>
               <a:t>[말할 내용]
-정리하겠습니다.
-과제 세 가지입니다.
-첫째, 프로포절 드래프트. 여섯 절입니다. 연구 배경과 문제, 연구 질문과 가설, 선행연구와 내 자리, 연구 방법과 절차, 예상 기여, 일정.
-세 번째 절과 네 번째 절을 특히 보십시오. 2회차에 선행연구 찾는 법을 했고, 거기서 남의 연구 방법을 보라고 말씀드렸지요. 그게 이 두 절로 들어옵니다.
-둘째, 내 연구의 입장 한 문단. 오늘 본 것 중에 내가 어디에 서는지요. 더블 다이아몬드를 쓰시겠다면 쓰셔도 됩니다. 다만 오늘 본 한계를 알고 쓴다는 걸 한 문단으로 밝히시면 됩니다.
-셋째, 동료 프로포절을 읽고 질문 두 개씩 준비해 오세요. 다음 회차는 상호 리뷰가 절반입니다. 듣기만 하는 자리가 아닙니다.
-드래프트는 48시간 전까지 올려 주셔야 합니다. 그래야 서로 읽고 질문을 만들 수 있어요.
-한 학기 동안 하신 걸 한 문서로 모으는 일입니다. 새로 쓰시는 게 아니라, 매 회차 과제로 쓰신 것들을 꺼내 이어 붙이시면 뼈대가 나옵니다.
-다음이 마지막입니다.
+마지막 워크숍입니다. 짧습니다.
+한 문단을 쓰실 겁니다. 다음 회차 프로포절에 그대로 들어갈 문단이에요.
+먼저 2분. 내 연구가 따르는 절차를 한 줄로 적으세요. 더블 다이아몬드든, 자기가 짠 것이든, 아직 없든. 없으면 없다고 적으시면 됩니다.
+다음 3분. 오늘 본 비판 네 줄 중에 내 연구에 걸리는 게 무엇인지 고르세요. 순서, 문제와 해결, 끝나는 지점, 누가 하는가. 하나나 둘이면 됩니다.
+그다음 3분. 그래서 내 연구는 그 자리를 어떻게 다루는지 적으세요. 그냥 '한계로 인정한다'도 답입니다. 다만 인정했다고 적어야 합니다.
+마지막 2분. 네 문장으로 이어 붙이세요. 내 절차는 무엇이고, 그 절차의 어디가 약하고, 나는 그걸 어떻게 다루고, 그래서 이 연구에서 그 선택이 왜 정당한가.
+이 네 문장이 프로포절의 연구 방법 절 앞에 들어갑니다. 심사에서 '왜 이 절차입니까'를 물으면 이 문단을 읽으시면 됩니다.
 [운영 메모]
-드래프트 분량은 기획안의 8,000자에서 조정이 필요하다 — 회차가 15주에서 8회로 줄었다. 학과와 정리된 뒤 숫자를 명시할 것. '매 회차 과제를 이어 붙이면 뼈대가 나온다'를 반드시 말해 부담을 줄일 것.</a:t>
+10분 안에 끝낸다. 완성이 목적이 아니라 뼈대를 잡는 것이다. 다 못 쓴 학생은 과제로 넘기되 네 문장 틀을 적어 가게 할 것.</a:t>
             </a:r>
             <a:endParaRPr lang="en-US" dirty="0"/>
           </a:p>
@@ -1042,6 +1046,307 @@
             <a:fld id="{F7021451-1387-4CA6-816F-3879F97B5CBC}" type="slidenum">
               <a:rPr lang="en-US"/>
               <a:t>14</a:t>
+            </a:fld>
+            <a:endParaRPr lang="en-US"/>
+          </a:p>
+        </p:txBody>
+      </p:sp>
+    </p:spTree>
+    <p:extLst>
+      <p:ext uri="{BB962C8B-B14F-4D97-AF65-F5344CB8AC3E}">
+        <p14:creationId xmlns:p14="http://schemas.microsoft.com/office/powerpoint/2010/main" val="1024086991"/>
+      </p:ext>
+    </p:extLst>
+  </p:cSld>
+  <p:clrMapOvr>
+    <a:masterClrMapping/>
+  </p:clrMapOvr>
+</p:notes>
+</file>
+
+<file path=ppt/notesSlides/notesSlide15.xml><?xml version="1.0" encoding="utf-8"?>
+<p:notes xmlns:a="http://schemas.openxmlformats.org/drawingml/2006/main" xmlns:r="http://schemas.openxmlformats.org/officeDocument/2006/relationships" xmlns:p="http://schemas.openxmlformats.org/presentationml/2006/main">
+  <p:cSld>
+    <p:spTree>
+      <p:nvGrpSpPr>
+        <p:cNvPr id="1" name=""/>
+        <p:cNvGrpSpPr/>
+        <p:nvPr/>
+      </p:nvGrpSpPr>
+      <p:grpSpPr>
+        <a:xfrm>
+          <a:off x="0" y="0"/>
+          <a:ext cx="0" cy="0"/>
+          <a:chOff x="0" y="0"/>
+          <a:chExt cx="0" cy="0"/>
+        </a:xfrm>
+      </p:grpSpPr>
+      <p:sp>
+        <p:nvSpPr>
+          <p:cNvPr id="2" name="Slide Image Placeholder 1"/>
+          <p:cNvSpPr>
+            <a:spLocks noGrp="1" noRot="1" noChangeAspect="1"/>
+          </p:cNvSpPr>
+          <p:nvPr>
+            <p:ph type="sldImg"/>
+          </p:nvPr>
+        </p:nvSpPr>
+        <p:spPr/>
+      </p:sp>
+      <p:sp>
+        <p:nvSpPr>
+          <p:cNvPr id="3" name="Notes Placeholder 2"/>
+          <p:cNvSpPr>
+            <a:spLocks noGrp="1"/>
+          </p:cNvSpPr>
+          <p:nvPr>
+            <p:ph type="body" idx="1"/>
+          </p:nvPr>
+        </p:nvSpPr>
+        <p:spPr/>
+        <p:txBody>
+          <a:bodyPr/>
+          <a:lstStyle/>
+          <a:p>
+            <a:r>
+              <a:rPr lang="en-US" dirty="0"/>
+              <a:t>[말할 내용]
+마지막 안내입니다.
+다음이 마지막 회차고, 프로포절 발표입니다.
+왼쪽이 프로포절에 담을 여섯 절입니다.
+연구 배경과 문제. 연구 질문과 가설. 선행연구와 내 자리. 연구 방법과 절차. 예상 기여. 일정.
+세 번째와 네 번째를 보십시오. 2회차에 선행연구를 하면서 남의 연구 방법을 보라고 말씀드렸지요. 그게 이 두 절로 들어옵니다. 다섯 편 정리표의 방법 칸이 여기서 값을 합니다.
+그리고 오늘 쓴 한 문단이 네 번째 절 앞에 들어가고요.
+분량은 기획안에 8,000자로 되어 있었는데, 회차가 열다섯에서 여덟으로 줄었으니 조정하겠습니다. 학과와 정리되는 대로 알려 드리겠습니다. 지금은 여섯 절을 다 채우는 걸 목표로 하시면 됩니다.
+오른쪽이 진행 방식입니다.
+드래프트는 48시간 전까지 올려 주세요. 그래야 서로 읽고 옵니다.
+1인 발표와 질의. 그리고 상호 리뷰가 절반입니다. 각자 동료 한 사람당 질문 두 개를 준비해 오셔야 해요. 듣기만 하는 자리가 아닙니다.
+제가 보는 건 하나입니다. 연구 질문과 방법과 기여가 서로 맞물리는가. 질문은 큰데 방법이 작거나, 방법은 촘촘한데 그걸로 그 질문에 답할 수 없는 경우가 가장 흔합니다.
+마지막으로 학위 일정과 다음 단계를 함께 보겠습니다.
+한 학기 동안 쓰신 과제들을 꺼내 이어 붙이시면 뼈대가 나옵니다. 새로 쓰시는 게 아닙니다.
+[운영 메모]
+프로포절 분량은 학과 확인 후 확정해 공지할 것(기획안 8,000자 → 회차 축소분 반영). 상호 리뷰 질문 두 개는 반드시 받아야 8회차가 굴러간다.</a:t>
+            </a:r>
+            <a:endParaRPr lang="en-US" dirty="0"/>
+          </a:p>
+        </p:txBody>
+      </p:sp>
+      <p:sp>
+        <p:nvSpPr>
+          <p:cNvPr id="4" name="Slide Number Placeholder 3"/>
+          <p:cNvSpPr>
+            <a:spLocks noGrp="1"/>
+          </p:cNvSpPr>
+          <p:nvPr>
+            <p:ph type="sldNum" sz="quarter" idx="10"/>
+          </p:nvPr>
+        </p:nvSpPr>
+        <p:spPr/>
+        <p:txBody>
+          <a:bodyPr/>
+          <a:lstStyle/>
+          <a:p>
+            <a:fld id="{F7021451-1387-4CA6-816F-3879F97B5CBC}" type="slidenum">
+              <a:rPr lang="en-US"/>
+              <a:t>15</a:t>
+            </a:fld>
+            <a:endParaRPr lang="en-US"/>
+          </a:p>
+        </p:txBody>
+      </p:sp>
+    </p:spTree>
+    <p:extLst>
+      <p:ext uri="{BB962C8B-B14F-4D97-AF65-F5344CB8AC3E}">
+        <p14:creationId xmlns:p14="http://schemas.microsoft.com/office/powerpoint/2010/main" val="1024086991"/>
+      </p:ext>
+    </p:extLst>
+  </p:cSld>
+  <p:clrMapOvr>
+    <a:masterClrMapping/>
+  </p:clrMapOvr>
+</p:notes>
+</file>
+
+<file path=ppt/notesSlides/notesSlide16.xml><?xml version="1.0" encoding="utf-8"?>
+<p:notes xmlns:a="http://schemas.openxmlformats.org/drawingml/2006/main" xmlns:r="http://schemas.openxmlformats.org/officeDocument/2006/relationships" xmlns:p="http://schemas.openxmlformats.org/presentationml/2006/main">
+  <p:cSld>
+    <p:spTree>
+      <p:nvGrpSpPr>
+        <p:cNvPr id="1" name=""/>
+        <p:cNvGrpSpPr/>
+        <p:nvPr/>
+      </p:nvGrpSpPr>
+      <p:grpSpPr>
+        <a:xfrm>
+          <a:off x="0" y="0"/>
+          <a:ext cx="0" cy="0"/>
+          <a:chOff x="0" y="0"/>
+          <a:chExt cx="0" cy="0"/>
+        </a:xfrm>
+      </p:grpSpPr>
+      <p:sp>
+        <p:nvSpPr>
+          <p:cNvPr id="2" name="Slide Image Placeholder 1"/>
+          <p:cNvSpPr>
+            <a:spLocks noGrp="1" noRot="1" noChangeAspect="1"/>
+          </p:cNvSpPr>
+          <p:nvPr>
+            <p:ph type="sldImg"/>
+          </p:nvPr>
+        </p:nvSpPr>
+        <p:spPr/>
+      </p:sp>
+      <p:sp>
+        <p:nvSpPr>
+          <p:cNvPr id="3" name="Notes Placeholder 2"/>
+          <p:cNvSpPr>
+            <a:spLocks noGrp="1"/>
+          </p:cNvSpPr>
+          <p:nvPr>
+            <p:ph type="body" idx="1"/>
+          </p:nvPr>
+        </p:nvSpPr>
+        <p:spPr/>
+        <p:txBody>
+          <a:bodyPr/>
+          <a:lstStyle/>
+          <a:p>
+            <a:r>
+              <a:rPr lang="en-US" dirty="0"/>
+              <a:t>[말할 내용]
+확인하고 가실 것들입니다.
+앞 여섯 개가 프로포절이고, 뒤 넷이 발표 준비입니다.
+세 번째를 보세요. 선행연구 다섯 편이 본문에 실제로 인용되어 있는가. 목록만 뒤에 붙여 놓으면 안 됩니다. 2회차에 만드신 정리표의 다섯 번째 칸이 여기서 쓰여요.
+다섯 번째, 연구 방법 절에 절차뿐 아니라 자료와 판단 기준이 적혀 있는가. 2회차에 본 다섯 가지입니다. 남의 논문에서 보라고 한 걸 이제 본인 글에 쓰시는 겁니다.
+여덟 번째, 동료 질문 두 개씩 준비했는가. 이게 없으면 다음 회차의 절반이 비게 됩니다.
+열 번째는 매번 같습니다. 48시간 전 제출.
+[운영 메모]
+3 · 5 · 8 번을 먼저 확인할 것. 2주 간격이라 미루는 패턴이 굳으므로 '이번 주 안에 절반'을 말할 것.</a:t>
+            </a:r>
+            <a:endParaRPr lang="en-US" dirty="0"/>
+          </a:p>
+        </p:txBody>
+      </p:sp>
+      <p:sp>
+        <p:nvSpPr>
+          <p:cNvPr id="4" name="Slide Number Placeholder 3"/>
+          <p:cNvSpPr>
+            <a:spLocks noGrp="1"/>
+          </p:cNvSpPr>
+          <p:nvPr>
+            <p:ph type="sldNum" sz="quarter" idx="10"/>
+          </p:nvPr>
+        </p:nvSpPr>
+        <p:spPr/>
+        <p:txBody>
+          <a:bodyPr/>
+          <a:lstStyle/>
+          <a:p>
+            <a:fld id="{F7021451-1387-4CA6-816F-3879F97B5CBC}" type="slidenum">
+              <a:rPr lang="en-US"/>
+              <a:t>16</a:t>
+            </a:fld>
+            <a:endParaRPr lang="en-US"/>
+          </a:p>
+        </p:txBody>
+      </p:sp>
+    </p:spTree>
+    <p:extLst>
+      <p:ext uri="{BB962C8B-B14F-4D97-AF65-F5344CB8AC3E}">
+        <p14:creationId xmlns:p14="http://schemas.microsoft.com/office/powerpoint/2010/main" val="1024086991"/>
+      </p:ext>
+    </p:extLst>
+  </p:cSld>
+  <p:clrMapOvr>
+    <a:masterClrMapping/>
+  </p:clrMapOvr>
+</p:notes>
+</file>
+
+<file path=ppt/notesSlides/notesSlide17.xml><?xml version="1.0" encoding="utf-8"?>
+<p:notes xmlns:a="http://schemas.openxmlformats.org/drawingml/2006/main" xmlns:r="http://schemas.openxmlformats.org/officeDocument/2006/relationships" xmlns:p="http://schemas.openxmlformats.org/presentationml/2006/main">
+  <p:cSld>
+    <p:spTree>
+      <p:nvGrpSpPr>
+        <p:cNvPr id="1" name=""/>
+        <p:cNvGrpSpPr/>
+        <p:nvPr/>
+      </p:nvGrpSpPr>
+      <p:grpSpPr>
+        <a:xfrm>
+          <a:off x="0" y="0"/>
+          <a:ext cx="0" cy="0"/>
+          <a:chOff x="0" y="0"/>
+          <a:chExt cx="0" cy="0"/>
+        </a:xfrm>
+      </p:grpSpPr>
+      <p:sp>
+        <p:nvSpPr>
+          <p:cNvPr id="2" name="Slide Image Placeholder 1"/>
+          <p:cNvSpPr>
+            <a:spLocks noGrp="1" noRot="1" noChangeAspect="1"/>
+          </p:cNvSpPr>
+          <p:nvPr>
+            <p:ph type="sldImg"/>
+          </p:nvPr>
+        </p:nvSpPr>
+        <p:spPr/>
+      </p:sp>
+      <p:sp>
+        <p:nvSpPr>
+          <p:cNvPr id="3" name="Notes Placeholder 2"/>
+          <p:cNvSpPr>
+            <a:spLocks noGrp="1"/>
+          </p:cNvSpPr>
+          <p:nvPr>
+            <p:ph type="body" idx="1"/>
+          </p:nvPr>
+        </p:nvSpPr>
+        <p:spPr/>
+        <p:txBody>
+          <a:bodyPr/>
+          <a:lstStyle/>
+          <a:p>
+            <a:r>
+              <a:rPr lang="en-US" dirty="0"/>
+              <a:t>[말할 내용]
+정리하겠습니다.
+과제 네 가지입니다.
+첫째, 프로포절 드래프트. 여섯 절입니다. 연구 배경과 문제, 연구 질문과 가설, 선행연구와 내 자리, 연구 방법과 절차, 예상 기여, 일정.
+세 번째 절과 네 번째 절을 특히 보십시오. 2회차에 선행연구 찾는 법을 했고, 거기서 남의 연구 방법을 보라고 말씀드렸지요. 그게 이 두 절로 들어옵니다.
+둘째, 내 연구의 입장 한 문단. 오늘 본 것 중에 내가 어디에 서는지요. 더블 다이아몬드를 쓰시겠다면 쓰셔도 됩니다. 다만 오늘 본 한계를 알고 쓴다는 걸 한 문단으로 밝히시면 됩니다.
+셋째, 내 프로포절의 목차입니다. 2회차에 찾으신 다섯 편 중에 가장 가까운 한 편을 고르세요. 그 논문의 목차를 절 제목과 쪽수까지 옮겨 적고, 그 옆에 내 목차를 세우시면 됩니다.
+뺀 절, 더한 절, 순서를 바꾼 자리마다 이유를 한 줄씩 다십시오. 그 한 줄들이 심사 답변입니다.
+한 시간이면 됩니다. 그런데 이게 몇 주를 아껴 줍니다. 목차 없이 쓰기 시작하면 서론만 세 번 고쳐 쓰게 돼요.
+넷째, 동료 프로포절을 읽고 질문 두 개씩 준비해 오세요. 다음 회차는 상호 리뷰가 절반입니다. 듣기만 하는 자리가 아닙니다.
+드래프트는 48시간 전까지 올려 주셔야 합니다. 그래야 서로 읽고 질문을 만들 수 있어요.
+한 학기 동안 하신 걸 한 문서로 모으는 일입니다. 새로 쓰시는 게 아니라, 매 회차 과제로 쓰신 것들을 꺼내 이어 붙이시면 뼈대가 나옵니다.
+다음이 마지막입니다.
+[운영 메모]
+드래프트 분량은 기획안의 8,000자에서 조정이 필요하다 — 회차가 15주에서 8회로 줄었다. 학과와 정리된 뒤 숫자를 명시할 것. '매 회차 과제를 이어 붙이면 뼈대가 나온다'를 반드시 말해 부담을 줄일 것.</a:t>
+            </a:r>
+            <a:endParaRPr lang="en-US" dirty="0"/>
+          </a:p>
+        </p:txBody>
+      </p:sp>
+      <p:sp>
+        <p:nvSpPr>
+          <p:cNvPr id="4" name="Slide Number Placeholder 3"/>
+          <p:cNvSpPr>
+            <a:spLocks noGrp="1"/>
+          </p:cNvSpPr>
+          <p:nvPr>
+            <p:ph type="sldNum" sz="quarter" idx="10"/>
+          </p:nvPr>
+        </p:nvSpPr>
+        <p:spPr/>
+        <p:txBody>
+          <a:bodyPr/>
+          <a:lstStyle/>
+          <a:p>
+            <a:fld id="{F7021451-1387-4CA6-816F-3879F97B5CBC}" type="slidenum">
+              <a:rPr lang="en-US"/>
+              <a:t>17</a:t>
             </a:fld>
             <a:endParaRPr lang="en-US"/>
           </a:p>
@@ -2529,7 +2834,7 @@
                 <a:ea typeface="Pretendard Light" pitchFamily="34" charset="-122"/>
                 <a:cs typeface="Pretendard Light" pitchFamily="34" charset="-120"/>
               </a:rPr>
-              <a:t>더블 다이아몬드가 설명하지 못하는 자리를 짚고,</a:t>
+              <a:t>도식이 설명하지 못하는 자리를 짚고,</a:t>
             </a:r>
             <a:endParaRPr lang="en-US" sz="1600" dirty="0"/>
           </a:p>
@@ -2549,7 +2854,7 @@
                 <a:ea typeface="Pretendard Light" pitchFamily="34" charset="-122"/>
                 <a:cs typeface="Pretendard Light" pitchFamily="34" charset="-120"/>
               </a:rPr>
-              <a:t>참여 · 스페큘러티브 · 인공지능이 그 자리를 어떻게 다시 쓰는지 봅니다.</a:t>
+              <a:t>2회차에 찾은 선행연구를 프로포절의 뼈대로 세웁니다.</a:t>
             </a:r>
             <a:endParaRPr lang="en-US" sz="1600" dirty="0"/>
           </a:p>
@@ -2730,7 +3035,7 @@
                 <a:ea typeface="Pretendard" pitchFamily="34" charset="-122"/>
                 <a:cs typeface="Pretendard" pitchFamily="34" charset="-120"/>
               </a:rPr>
-              <a:t>프로포절 드래프트 · 내 연구의 입장 한 문단</a:t>
+              <a:t>프로포절 드래프트 · 내 연구의 입장 한 문단 · 목차 대조표</a:t>
             </a:r>
             <a:endParaRPr lang="en-US" sz="1200" dirty="0"/>
           </a:p>
@@ -4099,7 +4404,7 @@
     <p:bg>
       <p:bgPr>
         <a:solidFill>
-          <a:srgbClr val="FFFFFF"/>
+          <a:srgbClr val="111111"/>
         </a:solidFill>
       </p:bgPr>
     </p:bg>
@@ -4144,7 +4449,7 @@
             <a:r>
               <a:rPr lang="en-US" sz="900" spc="120" kern="0" dirty="0">
                 <a:solidFill>
-                  <a:srgbClr val="8A8A8A"/>
+                  <a:srgbClr val="9A9A9A"/>
                 </a:solidFill>
                 <a:latin typeface="Pretendard" pitchFamily="34" charset="0"/>
                 <a:ea typeface="Pretendard" pitchFamily="34" charset="-122"/>
@@ -4183,7 +4488,7 @@
             <a:r>
               <a:rPr lang="en-US" sz="900" spc="120" kern="0" dirty="0">
                 <a:solidFill>
-                  <a:srgbClr val="8A8A8A"/>
+                  <a:srgbClr val="9A9A9A"/>
                 </a:solidFill>
                 <a:latin typeface="Pretendard" pitchFamily="34" charset="0"/>
                 <a:ea typeface="Pretendard" pitchFamily="34" charset="-122"/>
@@ -4222,7 +4527,7 @@
             <a:r>
               <a:rPr lang="en-US" sz="900" spc="200" kern="0" dirty="0">
                 <a:solidFill>
-                  <a:srgbClr val="8A8A8A"/>
+                  <a:srgbClr val="9A9A9A"/>
                 </a:solidFill>
                 <a:latin typeface="Pretendard" pitchFamily="34" charset="0"/>
                 <a:ea typeface="Pretendard" pitchFamily="34" charset="-122"/>
@@ -4249,11 +4554,11 @@
             <a:avLst/>
           </a:prstGeom>
           <a:solidFill>
-            <a:srgbClr val="DCDCDC"/>
+            <a:srgbClr val="333333"/>
           </a:solidFill>
           <a:ln w="12700">
             <a:solidFill>
-              <a:srgbClr val="DCDCDC"/>
+              <a:srgbClr val="333333"/>
             </a:solidFill>
             <a:prstDash val="solid"/>
           </a:ln>
@@ -4267,114 +4572,82 @@
         </p:nvSpPr>
         <p:spPr>
           <a:xfrm>
-            <a:off x="640080" y="640080"/>
-            <a:ext cx="10911535" cy="219456"/>
-          </a:xfrm>
-          <a:prstGeom prst="rect">
-            <a:avLst/>
-          </a:prstGeom>
-          <a:noFill/>
-          <a:ln/>
-        </p:spPr>
-        <p:txBody>
-          <a:bodyPr wrap="square" lIns="0" tIns="0" rIns="0" bIns="0" rtlCol="0" anchor="ctr"/>
-          <a:lstStyle/>
-          <a:p>
-            <a:pPr indent="0" marL="0">
-              <a:buNone/>
-            </a:pPr>
-            <a:r>
-              <a:rPr lang="en-US" sz="950" spc="260" kern="0" dirty="0">
-                <a:solidFill>
-                  <a:srgbClr val="8A8A8A"/>
-                </a:solidFill>
-                <a:latin typeface="Pretendard" pitchFamily="34" charset="0"/>
-                <a:ea typeface="Pretendard" pitchFamily="34" charset="-122"/>
-                <a:cs typeface="Pretendard" pitchFamily="34" charset="-120"/>
-              </a:rPr>
-              <a:t>WORKSHOP</a:t>
-            </a:r>
-            <a:endParaRPr lang="en-US" sz="950" dirty="0"/>
-          </a:p>
-        </p:txBody>
-      </p:sp>
-      <p:sp>
-        <p:nvSpPr>
-          <p:cNvPr id="7" name="Text 5"/>
-          <p:cNvSpPr/>
-          <p:nvPr/>
-        </p:nvSpPr>
-        <p:spPr>
-          <a:xfrm>
-            <a:off x="640080" y="859536"/>
-            <a:ext cx="10911535" cy="475488"/>
-          </a:xfrm>
-          <a:prstGeom prst="rect">
-            <a:avLst/>
-          </a:prstGeom>
-          <a:noFill/>
-          <a:ln/>
-        </p:spPr>
-        <p:txBody>
-          <a:bodyPr wrap="square" lIns="0" tIns="0" rIns="0" bIns="0" rtlCol="0" anchor="ctr"/>
-          <a:lstStyle/>
-          <a:p>
-            <a:pPr indent="0" marL="0">
-              <a:buNone/>
-            </a:pPr>
-            <a:r>
-              <a:rPr lang="en-US" sz="3000" dirty="0">
-                <a:solidFill>
-                  <a:srgbClr val="111111"/>
+            <a:off x="7345375" y="1737360"/>
+            <a:ext cx="4206240" cy="3291840"/>
+          </a:xfrm>
+          <a:prstGeom prst="rect">
+            <a:avLst/>
+          </a:prstGeom>
+          <a:noFill/>
+          <a:ln/>
+        </p:spPr>
+        <p:txBody>
+          <a:bodyPr wrap="square" lIns="0" tIns="0" rIns="0" bIns="0" rtlCol="0" anchor="ctr"/>
+          <a:lstStyle/>
+          <a:p>
+            <a:pPr algn="r" indent="0" marL="0">
+              <a:buNone/>
+            </a:pPr>
+            <a:r>
+              <a:rPr lang="en-US" sz="20000" dirty="0">
+                <a:solidFill>
+                  <a:srgbClr val="1B1B1B"/>
                 </a:solidFill>
                 <a:latin typeface="Pretendard SemiBold" pitchFamily="34" charset="0"/>
                 <a:ea typeface="Pretendard SemiBold" pitchFamily="34" charset="-122"/>
                 <a:cs typeface="Pretendard SemiBold" pitchFamily="34" charset="-120"/>
               </a:rPr>
-              <a:t>워크숍 · 내 연구가 서는 자리</a:t>
-            </a:r>
-            <a:endParaRPr lang="en-US" sz="3000" dirty="0"/>
-          </a:p>
-        </p:txBody>
-      </p:sp>
-      <p:sp>
-        <p:nvSpPr>
-          <p:cNvPr id="8" name="Text 6"/>
-          <p:cNvSpPr/>
-          <p:nvPr/>
-        </p:nvSpPr>
-        <p:spPr>
-          <a:xfrm>
-            <a:off x="640080" y="1371600"/>
-            <a:ext cx="10911535" cy="219456"/>
-          </a:xfrm>
-          <a:prstGeom prst="rect">
-            <a:avLst/>
-          </a:prstGeom>
-          <a:noFill/>
-          <a:ln/>
-        </p:spPr>
-        <p:txBody>
-          <a:bodyPr wrap="square" lIns="0" tIns="0" rIns="0" bIns="0" rtlCol="0" anchor="ctr"/>
-          <a:lstStyle/>
-          <a:p>
-            <a:pPr indent="0" marL="0">
-              <a:buNone/>
-            </a:pPr>
-            <a:r>
-              <a:rPr lang="en-US" sz="1150" dirty="0">
-                <a:solidFill>
-                  <a:srgbClr val="6E6E6E"/>
-                </a:solidFill>
-                <a:latin typeface="Pretendard" pitchFamily="34" charset="0"/>
-                <a:ea typeface="Pretendard" pitchFamily="34" charset="-122"/>
-                <a:cs typeface="Pretendard" pitchFamily="34" charset="-120"/>
-              </a:rPr>
-              <a:t>다음 회차 프로포절에 그대로 들어갈 한 문단입니다.</a:t>
-            </a:r>
-            <a:endParaRPr lang="en-US" sz="1150" dirty="0"/>
-          </a:p>
-        </p:txBody>
+              <a:t>04</a:t>
+            </a:r>
+            <a:endParaRPr lang="en-US" sz="20000" dirty="0"/>
+          </a:p>
+        </p:txBody>
+      </p:sp>
+      <p:sp>
+        <p:nvSpPr>
+          <p:cNvPr id="7" name="Shape 5"/>
+          <p:cNvSpPr/>
+          <p:nvPr/>
+        </p:nvSpPr>
+        <p:spPr>
+          <a:xfrm>
+            <a:off x="941832" y="1371600"/>
+            <a:ext cx="0" cy="603504"/>
+          </a:xfrm>
+          <a:prstGeom prst="line">
+            <a:avLst/>
+          </a:prstGeom>
+          <a:noFill/>
+          <a:ln w="15875">
+            <a:solidFill>
+              <a:srgbClr val="FFFFFF"/>
+            </a:solidFill>
+            <a:prstDash val="solid"/>
+          </a:ln>
+        </p:spPr>
+      </p:sp>
+      <p:sp>
+        <p:nvSpPr>
+          <p:cNvPr id="8" name="Shape 6"/>
+          <p:cNvSpPr/>
+          <p:nvPr/>
+        </p:nvSpPr>
+        <p:spPr>
+          <a:xfrm>
+            <a:off x="640080" y="1733702"/>
+            <a:ext cx="301752" cy="241402"/>
+          </a:xfrm>
+          <a:prstGeom prst="line">
+            <a:avLst/>
+          </a:prstGeom>
+          <a:noFill/>
+          <a:ln w="15875">
+            <a:solidFill>
+              <a:srgbClr val="FFFFFF"/>
+            </a:solidFill>
+            <a:prstDash val="solid"/>
+          </a:ln>
+        </p:spPr>
       </p:sp>
       <p:sp>
         <p:nvSpPr>
@@ -4383,9 +4656,110 @@
           <p:nvPr/>
         </p:nvSpPr>
         <p:spPr>
-          <a:xfrm>
-            <a:off x="640080" y="1719072"/>
-            <a:ext cx="10911535" cy="822960"/>
+          <a:xfrm flipV="1">
+            <a:off x="941832" y="1733702"/>
+            <a:ext cx="301752" cy="241402"/>
+          </a:xfrm>
+          <a:prstGeom prst="line">
+            <a:avLst/>
+          </a:prstGeom>
+          <a:noFill/>
+          <a:ln w="15875">
+            <a:solidFill>
+              <a:srgbClr val="FFFFFF"/>
+            </a:solidFill>
+            <a:prstDash val="solid"/>
+          </a:ln>
+        </p:spPr>
+      </p:sp>
+      <p:sp>
+        <p:nvSpPr>
+          <p:cNvPr id="10" name="Text 8"/>
+          <p:cNvSpPr/>
+          <p:nvPr/>
+        </p:nvSpPr>
+        <p:spPr>
+          <a:xfrm>
+            <a:off x="640080" y="2615184"/>
+            <a:ext cx="7863840" cy="256032"/>
+          </a:xfrm>
+          <a:prstGeom prst="rect">
+            <a:avLst/>
+          </a:prstGeom>
+          <a:noFill/>
+          <a:ln/>
+        </p:spPr>
+        <p:txBody>
+          <a:bodyPr wrap="square" lIns="0" tIns="0" rIns="0" bIns="0" rtlCol="0" anchor="ctr"/>
+          <a:lstStyle/>
+          <a:p>
+            <a:pPr indent="0" marL="0">
+              <a:buNone/>
+            </a:pPr>
+            <a:r>
+              <a:rPr lang="en-US" sz="950" spc="280" kern="0" dirty="0">
+                <a:solidFill>
+                  <a:srgbClr val="9A9A9A"/>
+                </a:solidFill>
+                <a:latin typeface="Pretendard" pitchFamily="34" charset="0"/>
+                <a:ea typeface="Pretendard" pitchFamily="34" charset="-122"/>
+                <a:cs typeface="Pretendard" pitchFamily="34" charset="-120"/>
+              </a:rPr>
+              <a:t>PART 04</a:t>
+            </a:r>
+            <a:endParaRPr lang="en-US" sz="950" dirty="0"/>
+          </a:p>
+        </p:txBody>
+      </p:sp>
+      <p:sp>
+        <p:nvSpPr>
+          <p:cNvPr id="11" name="Text 9"/>
+          <p:cNvSpPr/>
+          <p:nvPr/>
+        </p:nvSpPr>
+        <p:spPr>
+          <a:xfrm>
+            <a:off x="640080" y="2889504"/>
+            <a:ext cx="7863840" cy="786384"/>
+          </a:xfrm>
+          <a:prstGeom prst="rect">
+            <a:avLst/>
+          </a:prstGeom>
+          <a:noFill/>
+          <a:ln/>
+        </p:spPr>
+        <p:txBody>
+          <a:bodyPr wrap="square" lIns="0" tIns="0" rIns="0" bIns="0" rtlCol="0" anchor="ctr"/>
+          <a:lstStyle/>
+          <a:p>
+            <a:pPr indent="0" marL="0">
+              <a:buNone/>
+            </a:pPr>
+            <a:r>
+              <a:rPr lang="en-US" sz="4600" dirty="0">
+                <a:solidFill>
+                  <a:srgbClr val="FFFFFF"/>
+                </a:solidFill>
+                <a:latin typeface="Pretendard SemiBold" pitchFamily="34" charset="0"/>
+                <a:ea typeface="Pretendard SemiBold" pitchFamily="34" charset="-122"/>
+                <a:cs typeface="Pretendard SemiBold" pitchFamily="34" charset="-120"/>
+              </a:rPr>
+              <a:t>내 논문의 꼴을 정한다</a:t>
+            </a:r>
+            <a:endParaRPr lang="en-US" sz="4600" dirty="0"/>
+          </a:p>
+        </p:txBody>
+      </p:sp>
+      <p:sp>
+        <p:nvSpPr>
+          <p:cNvPr id="12" name="Shape 10"/>
+          <p:cNvSpPr/>
+          <p:nvPr/>
+        </p:nvSpPr>
+        <p:spPr>
+          <a:xfrm>
+            <a:off x="640080" y="3803904"/>
+            <a:ext cx="2194560" cy="7315"/>
           </a:xfrm>
           <a:prstGeom prst="rect">
             <a:avLst/>
@@ -4395,7 +4769,7 @@
           </a:solidFill>
           <a:ln w="12700">
             <a:solidFill>
-              <a:srgbClr val="DCDCDC"/>
+              <a:srgbClr val="FFFFFF"/>
             </a:solidFill>
             <a:prstDash val="solid"/>
           </a:ln>
@@ -4403,146 +4777,43 @@
       </p:sp>
       <p:sp>
         <p:nvSpPr>
-          <p:cNvPr id="10" name="Text 8"/>
-          <p:cNvSpPr/>
-          <p:nvPr/>
-        </p:nvSpPr>
-        <p:spPr>
-          <a:xfrm>
-            <a:off x="1097280" y="1810512"/>
-            <a:ext cx="3291840" cy="640080"/>
-          </a:xfrm>
-          <a:prstGeom prst="rect">
-            <a:avLst/>
-          </a:prstGeom>
-          <a:noFill/>
-          <a:ln/>
-        </p:spPr>
-        <p:txBody>
-          <a:bodyPr wrap="square" lIns="0" tIns="0" rIns="0" bIns="0" rtlCol="0" anchor="ctr"/>
-          <a:lstStyle/>
-          <a:p>
-            <a:pPr indent="0" marL="0">
-              <a:buNone/>
-            </a:pPr>
-            <a:r>
-              <a:rPr lang="en-US" sz="1450" dirty="0">
-                <a:solidFill>
-                  <a:srgbClr val="111111"/>
-                </a:solidFill>
-                <a:latin typeface="Pretendard SemiBold" pitchFamily="34" charset="0"/>
-                <a:ea typeface="Pretendard SemiBold" pitchFamily="34" charset="-122"/>
-                <a:cs typeface="Pretendard SemiBold" pitchFamily="34" charset="-120"/>
-              </a:rPr>
-              <a:t>내 연구가 따르는 절차를 한 줄로</a:t>
-            </a:r>
-            <a:endParaRPr lang="en-US" sz="1450" dirty="0"/>
-          </a:p>
-        </p:txBody>
-      </p:sp>
-      <p:sp>
-        <p:nvSpPr>
-          <p:cNvPr id="11" name="Text 9"/>
-          <p:cNvSpPr/>
-          <p:nvPr/>
-        </p:nvSpPr>
-        <p:spPr>
-          <a:xfrm>
-            <a:off x="4480560" y="1810512"/>
-            <a:ext cx="6705295" cy="640080"/>
-          </a:xfrm>
-          <a:prstGeom prst="rect">
-            <a:avLst/>
-          </a:prstGeom>
-          <a:noFill/>
-          <a:ln/>
-        </p:spPr>
-        <p:txBody>
-          <a:bodyPr wrap="square" lIns="0" tIns="0" rIns="0" bIns="0" rtlCol="0" anchor="ctr"/>
+          <p:cNvPr id="13" name="Text 11"/>
+          <p:cNvSpPr/>
+          <p:nvPr/>
+        </p:nvSpPr>
+        <p:spPr>
+          <a:xfrm>
+            <a:off x="640080" y="4005072"/>
+            <a:ext cx="6949440" cy="731520"/>
+          </a:xfrm>
+          <a:prstGeom prst="rect">
+            <a:avLst/>
+          </a:prstGeom>
+          <a:noFill/>
+          <a:ln/>
+        </p:spPr>
+        <p:txBody>
+          <a:bodyPr wrap="square" lIns="0" tIns="0" rIns="0" bIns="0" rtlCol="0" anchor="t"/>
           <a:lstStyle/>
           <a:p>
             <a:pPr indent="0" marL="0">
               <a:lnSpc>
-                <a:spcPct val="124000"/>
+                <a:spcPct val="134000"/>
               </a:lnSpc>
               <a:buNone/>
             </a:pPr>
             <a:r>
-              <a:rPr lang="en-US" sz="1150" dirty="0">
-                <a:solidFill>
-                  <a:srgbClr val="6E6E6E"/>
-                </a:solidFill>
-                <a:latin typeface="Pretendard" pitchFamily="34" charset="0"/>
-                <a:ea typeface="Pretendard" pitchFamily="34" charset="-122"/>
-                <a:cs typeface="Pretendard" pitchFamily="34" charset="-120"/>
-              </a:rPr>
-              <a:t>더블 다이아몬드든 자기가 짠 것이든. 아직 없으면 없다고 적습니다.</a:t>
-            </a:r>
-            <a:endParaRPr lang="en-US" sz="1150" dirty="0"/>
-          </a:p>
-        </p:txBody>
-      </p:sp>
-      <p:sp>
-        <p:nvSpPr>
-          <p:cNvPr id="12" name="Shape 10"/>
-          <p:cNvSpPr/>
-          <p:nvPr/>
-        </p:nvSpPr>
-        <p:spPr>
-          <a:xfrm>
-            <a:off x="640080" y="2688336"/>
-            <a:ext cx="10911535" cy="822960"/>
-          </a:xfrm>
-          <a:prstGeom prst="rect">
-            <a:avLst/>
-          </a:prstGeom>
-          <a:solidFill>
-            <a:srgbClr val="FFFFFF"/>
-          </a:solidFill>
-          <a:ln w="12700">
-            <a:solidFill>
-              <a:srgbClr val="DCDCDC"/>
-            </a:solidFill>
-            <a:prstDash val="solid"/>
-          </a:ln>
-        </p:spPr>
-      </p:sp>
-      <p:sp>
-        <p:nvSpPr>
-          <p:cNvPr id="13" name="Text 11"/>
-          <p:cNvSpPr/>
-          <p:nvPr/>
-        </p:nvSpPr>
-        <p:spPr>
-          <a:xfrm>
-            <a:off x="1097280" y="2779776"/>
-            <a:ext cx="3291840" cy="640080"/>
-          </a:xfrm>
-          <a:prstGeom prst="rect">
-            <a:avLst/>
-          </a:prstGeom>
-          <a:noFill/>
-          <a:ln/>
-        </p:spPr>
-        <p:txBody>
-          <a:bodyPr wrap="square" lIns="0" tIns="0" rIns="0" bIns="0" rtlCol="0" anchor="ctr"/>
-          <a:lstStyle/>
-          <a:p>
-            <a:pPr indent="0" marL="0">
-              <a:buNone/>
-            </a:pPr>
-            <a:r>
-              <a:rPr lang="en-US" sz="1450" dirty="0">
-                <a:solidFill>
-                  <a:srgbClr val="111111"/>
-                </a:solidFill>
-                <a:latin typeface="Pretendard SemiBold" pitchFamily="34" charset="0"/>
-                <a:ea typeface="Pretendard SemiBold" pitchFamily="34" charset="-122"/>
-                <a:cs typeface="Pretendard SemiBold" pitchFamily="34" charset="-120"/>
-              </a:rPr>
-              <a:t>비판 네 줄 중 걸리는 것을 고른다</a:t>
-            </a:r>
-            <a:endParaRPr lang="en-US" sz="1450" dirty="0"/>
+              <a:rPr lang="en-US" sz="1350" dirty="0">
+                <a:solidFill>
+                  <a:srgbClr val="B8B8B8"/>
+                </a:solidFill>
+                <a:latin typeface="Pretendard Light" pitchFamily="34" charset="0"/>
+                <a:ea typeface="Pretendard Light" pitchFamily="34" charset="-122"/>
+                <a:cs typeface="Pretendard Light" pitchFamily="34" charset="-120"/>
+              </a:rPr>
+              <a:t>다음이 프로포절입니다. 그 글의 뼈대가 어디서 오는지 짚고 갑니다.</a:t>
+            </a:r>
+            <a:endParaRPr lang="en-US" sz="1350" dirty="0"/>
           </a:p>
         </p:txBody>
       </p:sp>
@@ -4553,351 +4824,33 @@
           <p:nvPr/>
         </p:nvSpPr>
         <p:spPr>
-          <a:xfrm>
-            <a:off x="4480560" y="2779776"/>
-            <a:ext cx="6705295" cy="640080"/>
-          </a:xfrm>
-          <a:prstGeom prst="rect">
-            <a:avLst/>
-          </a:prstGeom>
-          <a:noFill/>
-          <a:ln/>
-        </p:spPr>
-        <p:txBody>
-          <a:bodyPr wrap="square" lIns="0" tIns="0" rIns="0" bIns="0" rtlCol="0" anchor="ctr"/>
-          <a:lstStyle/>
-          <a:p>
-            <a:pPr indent="0" marL="0">
-              <a:lnSpc>
-                <a:spcPct val="124000"/>
-              </a:lnSpc>
-              <a:buNone/>
-            </a:pPr>
-            <a:r>
-              <a:rPr lang="en-US" sz="1150" dirty="0">
-                <a:solidFill>
-                  <a:srgbClr val="6E6E6E"/>
-                </a:solidFill>
-                <a:latin typeface="Pretendard" pitchFamily="34" charset="0"/>
-                <a:ea typeface="Pretendard" pitchFamily="34" charset="-122"/>
-                <a:cs typeface="Pretendard" pitchFamily="34" charset="-120"/>
-              </a:rPr>
-              <a:t>순서 · 문제와 해결 · 끝나는 지점 · 누가 하는가. 하나나 둘이면 충분합니다.</a:t>
-            </a:r>
-            <a:endParaRPr lang="en-US" sz="1150" dirty="0"/>
-          </a:p>
-        </p:txBody>
-      </p:sp>
-      <p:sp>
-        <p:nvSpPr>
-          <p:cNvPr id="15" name="Shape 13"/>
-          <p:cNvSpPr/>
-          <p:nvPr/>
-        </p:nvSpPr>
-        <p:spPr>
-          <a:xfrm>
-            <a:off x="640080" y="3657600"/>
-            <a:ext cx="10911535" cy="822960"/>
-          </a:xfrm>
-          <a:prstGeom prst="rect">
-            <a:avLst/>
-          </a:prstGeom>
-          <a:solidFill>
-            <a:srgbClr val="FFFFFF"/>
-          </a:solidFill>
-          <a:ln w="12700">
-            <a:solidFill>
-              <a:srgbClr val="DCDCDC"/>
-            </a:solidFill>
-            <a:prstDash val="solid"/>
-          </a:ln>
-        </p:spPr>
-      </p:sp>
-      <p:sp>
-        <p:nvSpPr>
-          <p:cNvPr id="16" name="Text 14"/>
-          <p:cNvSpPr/>
-          <p:nvPr/>
-        </p:nvSpPr>
-        <p:spPr>
-          <a:xfrm>
-            <a:off x="1097280" y="3749040"/>
-            <a:ext cx="3291840" cy="640080"/>
-          </a:xfrm>
-          <a:prstGeom prst="rect">
-            <a:avLst/>
-          </a:prstGeom>
-          <a:noFill/>
-          <a:ln/>
-        </p:spPr>
-        <p:txBody>
-          <a:bodyPr wrap="square" lIns="0" tIns="0" rIns="0" bIns="0" rtlCol="0" anchor="ctr"/>
-          <a:lstStyle/>
-          <a:p>
-            <a:pPr indent="0" marL="0">
-              <a:buNone/>
-            </a:pPr>
-            <a:r>
-              <a:rPr lang="en-US" sz="1450" dirty="0">
-                <a:solidFill>
-                  <a:srgbClr val="111111"/>
-                </a:solidFill>
-                <a:latin typeface="Pretendard SemiBold" pitchFamily="34" charset="0"/>
-                <a:ea typeface="Pretendard SemiBold" pitchFamily="34" charset="-122"/>
-                <a:cs typeface="Pretendard SemiBold" pitchFamily="34" charset="-120"/>
-              </a:rPr>
-              <a:t>그 자리를 어떻게 다루는지 적는다</a:t>
-            </a:r>
-            <a:endParaRPr lang="en-US" sz="1450" dirty="0"/>
-          </a:p>
-        </p:txBody>
-      </p:sp>
-      <p:sp>
-        <p:nvSpPr>
-          <p:cNvPr id="17" name="Text 15"/>
-          <p:cNvSpPr/>
-          <p:nvPr/>
-        </p:nvSpPr>
-        <p:spPr>
-          <a:xfrm>
-            <a:off x="4480560" y="3749040"/>
-            <a:ext cx="6705295" cy="640080"/>
-          </a:xfrm>
-          <a:prstGeom prst="rect">
-            <a:avLst/>
-          </a:prstGeom>
-          <a:noFill/>
-          <a:ln/>
-        </p:spPr>
-        <p:txBody>
-          <a:bodyPr wrap="square" lIns="0" tIns="0" rIns="0" bIns="0" rtlCol="0" anchor="ctr"/>
-          <a:lstStyle/>
-          <a:p>
-            <a:pPr indent="0" marL="0">
-              <a:lnSpc>
-                <a:spcPct val="124000"/>
-              </a:lnSpc>
-              <a:buNone/>
-            </a:pPr>
-            <a:r>
-              <a:rPr lang="en-US" sz="1150" dirty="0">
-                <a:solidFill>
-                  <a:srgbClr val="6E6E6E"/>
-                </a:solidFill>
-                <a:latin typeface="Pretendard" pitchFamily="34" charset="0"/>
-                <a:ea typeface="Pretendard" pitchFamily="34" charset="-122"/>
-                <a:cs typeface="Pretendard" pitchFamily="34" charset="-120"/>
-              </a:rPr>
-              <a:t>'한계로 인정한다'도 답입니다. 다만 인정했다고 적어야 합니다.</a:t>
-            </a:r>
-            <a:endParaRPr lang="en-US" sz="1150" dirty="0"/>
-          </a:p>
-        </p:txBody>
-      </p:sp>
-      <p:sp>
-        <p:nvSpPr>
-          <p:cNvPr id="18" name="Shape 16"/>
-          <p:cNvSpPr/>
-          <p:nvPr/>
-        </p:nvSpPr>
-        <p:spPr>
-          <a:xfrm>
-            <a:off x="640080" y="4626864"/>
-            <a:ext cx="10911535" cy="822960"/>
-          </a:xfrm>
-          <a:prstGeom prst="rect">
-            <a:avLst/>
-          </a:prstGeom>
-          <a:solidFill>
-            <a:srgbClr val="111111"/>
-          </a:solidFill>
-          <a:ln w="12700">
-            <a:solidFill>
-              <a:srgbClr val="111111"/>
-            </a:solidFill>
-            <a:prstDash val="solid"/>
-          </a:ln>
-        </p:spPr>
-      </p:sp>
-      <p:sp>
-        <p:nvSpPr>
-          <p:cNvPr id="19" name="Text 17"/>
-          <p:cNvSpPr/>
-          <p:nvPr/>
-        </p:nvSpPr>
-        <p:spPr>
-          <a:xfrm>
-            <a:off x="1097280" y="4718304"/>
-            <a:ext cx="3291840" cy="640080"/>
-          </a:xfrm>
-          <a:prstGeom prst="rect">
-            <a:avLst/>
-          </a:prstGeom>
-          <a:noFill/>
-          <a:ln/>
-        </p:spPr>
-        <p:txBody>
-          <a:bodyPr wrap="square" lIns="0" tIns="0" rIns="0" bIns="0" rtlCol="0" anchor="ctr"/>
-          <a:lstStyle/>
-          <a:p>
-            <a:pPr indent="0" marL="0">
-              <a:buNone/>
-            </a:pPr>
-            <a:r>
-              <a:rPr lang="en-US" sz="1450" dirty="0">
-                <a:solidFill>
-                  <a:srgbClr val="FFFFFF"/>
-                </a:solidFill>
-                <a:latin typeface="Pretendard SemiBold" pitchFamily="34" charset="0"/>
-                <a:ea typeface="Pretendard SemiBold" pitchFamily="34" charset="-122"/>
-                <a:cs typeface="Pretendard SemiBold" pitchFamily="34" charset="-120"/>
-              </a:rPr>
-              <a:t>네 문장으로 이어 붙인다</a:t>
-            </a:r>
-            <a:endParaRPr lang="en-US" sz="1450" dirty="0"/>
-          </a:p>
-        </p:txBody>
-      </p:sp>
-      <p:sp>
-        <p:nvSpPr>
-          <p:cNvPr id="20" name="Text 18"/>
-          <p:cNvSpPr/>
-          <p:nvPr/>
-        </p:nvSpPr>
-        <p:spPr>
-          <a:xfrm>
-            <a:off x="4480560" y="4718304"/>
-            <a:ext cx="6705295" cy="640080"/>
-          </a:xfrm>
-          <a:prstGeom prst="rect">
-            <a:avLst/>
-          </a:prstGeom>
-          <a:noFill/>
-          <a:ln/>
-        </p:spPr>
-        <p:txBody>
-          <a:bodyPr wrap="square" lIns="0" tIns="0" rIns="0" bIns="0" rtlCol="0" anchor="ctr"/>
-          <a:lstStyle/>
-          <a:p>
-            <a:pPr indent="0" marL="0">
-              <a:lnSpc>
-                <a:spcPct val="124000"/>
-              </a:lnSpc>
-              <a:buNone/>
-            </a:pPr>
-            <a:r>
-              <a:rPr lang="en-US" sz="1150" dirty="0">
-                <a:solidFill>
-                  <a:srgbClr val="B8B8B8"/>
-                </a:solidFill>
-                <a:latin typeface="Pretendard" pitchFamily="34" charset="0"/>
-                <a:ea typeface="Pretendard" pitchFamily="34" charset="-122"/>
-                <a:cs typeface="Pretendard" pitchFamily="34" charset="-120"/>
-              </a:rPr>
-              <a:t>내 절차 · 그 절차의 약한 곳 · 내가 다루는 방식 · 그 선택이 정당한 이유.</a:t>
-            </a:r>
-            <a:endParaRPr lang="en-US" sz="1150" dirty="0"/>
-          </a:p>
-        </p:txBody>
-      </p:sp>
-      <p:sp>
-        <p:nvSpPr>
-          <p:cNvPr id="21" name="Shape 19"/>
-          <p:cNvSpPr/>
-          <p:nvPr/>
-        </p:nvSpPr>
-        <p:spPr>
-          <a:xfrm>
-            <a:off x="640080" y="6291072"/>
-            <a:ext cx="10911535" cy="7315"/>
-          </a:xfrm>
-          <a:prstGeom prst="rect">
-            <a:avLst/>
-          </a:prstGeom>
-          <a:solidFill>
-            <a:srgbClr val="DCDCDC"/>
-          </a:solidFill>
-          <a:ln w="12700">
-            <a:solidFill>
-              <a:srgbClr val="DCDCDC"/>
-            </a:solidFill>
-            <a:prstDash val="solid"/>
-          </a:ln>
-        </p:spPr>
-      </p:sp>
-      <p:sp>
-        <p:nvSpPr>
-          <p:cNvPr id="22" name="Text 20"/>
-          <p:cNvSpPr/>
-          <p:nvPr/>
-        </p:nvSpPr>
-        <p:spPr>
-          <a:xfrm>
-            <a:off x="640080" y="6382512"/>
-            <a:ext cx="7772400" cy="237744"/>
-          </a:xfrm>
-          <a:prstGeom prst="rect">
-            <a:avLst/>
-          </a:prstGeom>
-          <a:noFill/>
-          <a:ln/>
-        </p:spPr>
-        <p:txBody>
-          <a:bodyPr wrap="square" lIns="0" tIns="0" rIns="0" bIns="0" rtlCol="0" anchor="ctr"/>
-          <a:lstStyle/>
-          <a:p>
-            <a:pPr indent="0" marL="0">
-              <a:buNone/>
-            </a:pPr>
-            <a:r>
-              <a:rPr lang="en-US" sz="850" spc="40" kern="0" dirty="0">
-                <a:solidFill>
-                  <a:srgbClr val="9B9B9B"/>
-                </a:solidFill>
-                <a:latin typeface="Pretendard" pitchFamily="34" charset="0"/>
-                <a:ea typeface="Pretendard" pitchFamily="34" charset="-122"/>
-                <a:cs typeface="Pretendard" pitchFamily="34" charset="-120"/>
-              </a:rPr>
-              <a:t>컨셉트와 프로세스 · 7주차 도식의 바깥 — 비판과 확장</a:t>
-            </a:r>
-            <a:endParaRPr lang="en-US" sz="850" dirty="0"/>
-          </a:p>
-        </p:txBody>
-      </p:sp>
-      <p:sp>
-        <p:nvSpPr>
-          <p:cNvPr id="23" name="Text 21"/>
-          <p:cNvSpPr/>
-          <p:nvPr/>
-        </p:nvSpPr>
-        <p:spPr>
-          <a:xfrm>
-            <a:off x="10271455" y="6382512"/>
-            <a:ext cx="1280160" cy="237744"/>
-          </a:xfrm>
-          <a:prstGeom prst="rect">
-            <a:avLst/>
-          </a:prstGeom>
-          <a:noFill/>
-          <a:ln/>
-        </p:spPr>
-        <p:txBody>
-          <a:bodyPr wrap="square" lIns="0" tIns="0" rIns="0" bIns="0" rtlCol="0" anchor="ctr"/>
-          <a:lstStyle/>
-          <a:p>
-            <a:pPr algn="r" indent="0" marL="0">
-              <a:buNone/>
-            </a:pPr>
-            <a:r>
-              <a:rPr lang="en-US" sz="850" spc="140" kern="0" dirty="0">
-                <a:solidFill>
-                  <a:srgbClr val="9B9B9B"/>
-                </a:solidFill>
-                <a:latin typeface="Pretendard" pitchFamily="34" charset="0"/>
-                <a:ea typeface="Pretendard" pitchFamily="34" charset="-122"/>
-                <a:cs typeface="Pretendard" pitchFamily="34" charset="-120"/>
-              </a:rPr>
-              <a:t>P.06</a:t>
+          <a:xfrm rot="16200000">
+            <a:off x="10436047" y="3291840"/>
+            <a:ext cx="2743200" cy="274320"/>
+          </a:xfrm>
+          <a:prstGeom prst="rect">
+            <a:avLst/>
+          </a:prstGeom>
+          <a:noFill/>
+          <a:ln/>
+        </p:spPr>
+        <p:txBody>
+          <a:bodyPr wrap="square" lIns="0" tIns="0" rIns="0" bIns="0" rtlCol="0" anchor="ctr"/>
+          <a:lstStyle/>
+          <a:p>
+            <a:pPr algn="ctr" indent="0" marL="0">
+              <a:buNone/>
+            </a:pPr>
+            <a:r>
+              <a:rPr lang="en-US" sz="850" spc="260" kern="0" dirty="0">
+                <a:solidFill>
+                  <a:srgbClr val="7A7A7A"/>
+                </a:solidFill>
+                <a:latin typeface="Pretendard" pitchFamily="34" charset="0"/>
+                <a:ea typeface="Pretendard" pitchFamily="34" charset="-122"/>
+                <a:cs typeface="Pretendard" pitchFamily="34" charset="-120"/>
+              </a:rPr>
+              <a:t>SECTION 04</a:t>
             </a:r>
             <a:endParaRPr lang="en-US" sz="850" dirty="0"/>
           </a:p>
@@ -5110,7 +5063,7 @@
                 <a:ea typeface="Pretendard" pitchFamily="34" charset="-122"/>
                 <a:cs typeface="Pretendard" pitchFamily="34" charset="-120"/>
               </a:rPr>
-              <a:t>FINAL</a:t>
+              <a:t>SKELETON</a:t>
             </a:r>
             <a:endParaRPr lang="en-US" sz="950" dirty="0"/>
           </a:p>
@@ -5149,7 +5102,7 @@
                 <a:ea typeface="Pretendard SemiBold" pitchFamily="34" charset="-122"/>
                 <a:cs typeface="Pretendard SemiBold" pitchFamily="34" charset="-120"/>
               </a:rPr>
-              <a:t>8회차 — 프로포절 발표와 상호 리뷰</a:t>
+              <a:t>선행연구를 한 절로 쓸 때와 뼈대로 쓸 때</a:t>
             </a:r>
             <a:endParaRPr lang="en-US" sz="3000" dirty="0"/>
           </a:p>
@@ -5188,7 +5141,7 @@
                 <a:ea typeface="Pretendard" pitchFamily="34" charset="-122"/>
                 <a:cs typeface="Pretendard" pitchFamily="34" charset="-120"/>
               </a:rPr>
-              <a:t>한 학기 동안 쓴 과제를 이어 붙이면 뼈대가 나옵니다.</a:t>
+              <a:t>제대로 하면 여섯 절 전부에 흔적이 남습니다.</a:t>
             </a:r>
             <a:endParaRPr lang="en-US" sz="1150" dirty="0"/>
           </a:p>
@@ -5202,8 +5155,72 @@
         </p:nvSpPr>
         <p:spPr>
           <a:xfrm>
-            <a:off x="640080" y="1664208"/>
-            <a:ext cx="5254600" cy="3749040"/>
+            <a:off x="640080" y="1627632"/>
+            <a:ext cx="5254600" cy="4078224"/>
+          </a:xfrm>
+          <a:prstGeom prst="rect">
+            <a:avLst/>
+          </a:prstGeom>
+          <a:solidFill>
+            <a:srgbClr val="F2F2F2"/>
+          </a:solidFill>
+          <a:ln w="12700">
+            <a:solidFill>
+              <a:srgbClr val="DCDCDC"/>
+            </a:solidFill>
+            <a:prstDash val="solid"/>
+          </a:ln>
+        </p:spPr>
+      </p:sp>
+      <p:sp>
+        <p:nvSpPr>
+          <p:cNvPr id="10" name="Text 8"/>
+          <p:cNvSpPr/>
+          <p:nvPr/>
+        </p:nvSpPr>
+        <p:spPr>
+          <a:xfrm>
+            <a:off x="1042416" y="1901952"/>
+            <a:ext cx="4449928" cy="365760"/>
+          </a:xfrm>
+          <a:prstGeom prst="rect">
+            <a:avLst/>
+          </a:prstGeom>
+          <a:noFill/>
+          <a:ln/>
+        </p:spPr>
+        <p:txBody>
+          <a:bodyPr wrap="square" lIns="0" tIns="0" rIns="0" bIns="0" rtlCol="0" anchor="ctr"/>
+          <a:lstStyle/>
+          <a:p>
+            <a:pPr indent="0" marL="0">
+              <a:buNone/>
+            </a:pPr>
+            <a:r>
+              <a:rPr lang="en-US" sz="1700" dirty="0">
+                <a:solidFill>
+                  <a:srgbClr val="111111"/>
+                </a:solidFill>
+                <a:latin typeface="Pretendard SemiBold" pitchFamily="34" charset="0"/>
+                <a:ea typeface="Pretendard SemiBold" pitchFamily="34" charset="-122"/>
+                <a:cs typeface="Pretendard SemiBold" pitchFamily="34" charset="-120"/>
+              </a:rPr>
+              <a:t>한 절로 쓸 때</a:t>
+            </a:r>
+            <a:endParaRPr lang="en-US" sz="1700" dirty="0"/>
+          </a:p>
+        </p:txBody>
+      </p:sp>
+      <p:sp>
+        <p:nvSpPr>
+          <p:cNvPr id="11" name="Shape 9"/>
+          <p:cNvSpPr/>
+          <p:nvPr/>
+        </p:nvSpPr>
+        <p:spPr>
+          <a:xfrm>
+            <a:off x="6297016" y="1627632"/>
+            <a:ext cx="5254600" cy="4078224"/>
           </a:xfrm>
           <a:prstGeom prst="rect">
             <a:avLst/>
@@ -5221,14 +5238,14 @@
       </p:sp>
       <p:sp>
         <p:nvSpPr>
-          <p:cNvPr id="10" name="Text 8"/>
-          <p:cNvSpPr/>
-          <p:nvPr/>
-        </p:nvSpPr>
-        <p:spPr>
-          <a:xfrm>
-            <a:off x="1060704" y="1993392"/>
-            <a:ext cx="4413352" cy="365760"/>
+          <p:cNvPr id="12" name="Text 10"/>
+          <p:cNvSpPr/>
+          <p:nvPr/>
+        </p:nvSpPr>
+        <p:spPr>
+          <a:xfrm>
+            <a:off x="6699352" y="1901952"/>
+            <a:ext cx="4449928" cy="365760"/>
           </a:xfrm>
           <a:prstGeom prst="rect">
             <a:avLst/>
@@ -5246,13 +5263,13 @@
             <a:r>
               <a:rPr lang="en-US" sz="1700" dirty="0">
                 <a:solidFill>
-                  <a:srgbClr val="111111"/>
+                  <a:srgbClr val="9B9B9B"/>
                 </a:solidFill>
                 <a:latin typeface="Pretendard SemiBold" pitchFamily="34" charset="0"/>
                 <a:ea typeface="Pretendard SemiBold" pitchFamily="34" charset="-122"/>
                 <a:cs typeface="Pretendard SemiBold" pitchFamily="34" charset="-120"/>
               </a:rPr>
-              <a:t>프로포절 여섯 절</a:t>
+              <a:t>뼈대로 쓸 때</a:t>
             </a:r>
             <a:endParaRPr lang="en-US" sz="1700" dirty="0"/>
           </a:p>
@@ -5260,24 +5277,186 @@
       </p:sp>
       <p:sp>
         <p:nvSpPr>
-          <p:cNvPr id="11" name="Shape 9"/>
-          <p:cNvSpPr/>
-          <p:nvPr/>
-        </p:nvSpPr>
-        <p:spPr>
-          <a:xfrm>
-            <a:off x="1060704" y="2414016"/>
-            <a:ext cx="4413352" cy="7315"/>
+          <p:cNvPr id="13" name="Text 11"/>
+          <p:cNvSpPr/>
+          <p:nvPr/>
+        </p:nvSpPr>
+        <p:spPr>
+          <a:xfrm>
+            <a:off x="1042416" y="2450592"/>
+            <a:ext cx="2011680" cy="274320"/>
+          </a:xfrm>
+          <a:prstGeom prst="rect">
+            <a:avLst/>
+          </a:prstGeom>
+          <a:noFill/>
+          <a:ln/>
+        </p:spPr>
+        <p:txBody>
+          <a:bodyPr wrap="square" lIns="0" tIns="0" rIns="0" bIns="0" rtlCol="0" anchor="ctr"/>
+          <a:lstStyle/>
+          <a:p>
+            <a:pPr indent="0" marL="0">
+              <a:buNone/>
+            </a:pPr>
+            <a:r>
+              <a:rPr lang="en-US" sz="900" b="1" spc="160" kern="0" dirty="0">
+                <a:solidFill>
+                  <a:srgbClr val="111111"/>
+                </a:solidFill>
+                <a:latin typeface="Pretendard" pitchFamily="34" charset="0"/>
+                <a:ea typeface="Pretendard" pitchFamily="34" charset="-122"/>
+                <a:cs typeface="Pretendard" pitchFamily="34" charset="-120"/>
+              </a:rPr>
+              <a:t>연구 배경</a:t>
+            </a:r>
+            <a:endParaRPr lang="en-US" sz="900" dirty="0"/>
+          </a:p>
+        </p:txBody>
+      </p:sp>
+      <p:sp>
+        <p:nvSpPr>
+          <p:cNvPr id="14" name="Text 12"/>
+          <p:cNvSpPr/>
+          <p:nvPr/>
+        </p:nvSpPr>
+        <p:spPr>
+          <a:xfrm>
+            <a:off x="1042416" y="2688336"/>
+            <a:ext cx="4449928" cy="384048"/>
+          </a:xfrm>
+          <a:prstGeom prst="rect">
+            <a:avLst/>
+          </a:prstGeom>
+          <a:noFill/>
+          <a:ln/>
+        </p:spPr>
+        <p:txBody>
+          <a:bodyPr wrap="square" lIns="0" tIns="0" rIns="0" bIns="0" rtlCol="0" anchor="t"/>
+          <a:lstStyle/>
+          <a:p>
+            <a:pPr indent="0" marL="0">
+              <a:lnSpc>
+                <a:spcPct val="120000"/>
+              </a:lnSpc>
+              <a:buNone/>
+            </a:pPr>
+            <a:r>
+              <a:rPr lang="en-US" sz="1150" dirty="0">
+                <a:solidFill>
+                  <a:srgbClr val="1F1F1F"/>
+                </a:solidFill>
+                <a:latin typeface="Pretendard" pitchFamily="34" charset="0"/>
+                <a:ea typeface="Pretendard" pitchFamily="34" charset="-122"/>
+                <a:cs typeface="Pretendard" pitchFamily="34" charset="-120"/>
+              </a:rPr>
+              <a:t>이 주제가 중요하다고 쓴다</a:t>
+            </a:r>
+            <a:endParaRPr lang="en-US" sz="1150" dirty="0"/>
+          </a:p>
+        </p:txBody>
+      </p:sp>
+      <p:sp>
+        <p:nvSpPr>
+          <p:cNvPr id="15" name="Text 13"/>
+          <p:cNvSpPr/>
+          <p:nvPr/>
+        </p:nvSpPr>
+        <p:spPr>
+          <a:xfrm>
+            <a:off x="6699352" y="2450592"/>
+            <a:ext cx="2011680" cy="274320"/>
+          </a:xfrm>
+          <a:prstGeom prst="rect">
+            <a:avLst/>
+          </a:prstGeom>
+          <a:noFill/>
+          <a:ln/>
+        </p:spPr>
+        <p:txBody>
+          <a:bodyPr wrap="square" lIns="0" tIns="0" rIns="0" bIns="0" rtlCol="0" anchor="ctr"/>
+          <a:lstStyle/>
+          <a:p>
+            <a:pPr indent="0" marL="0">
+              <a:buNone/>
+            </a:pPr>
+            <a:r>
+              <a:rPr lang="en-US" sz="900" b="1" spc="160" kern="0" dirty="0">
+                <a:solidFill>
+                  <a:srgbClr val="9B9B9B"/>
+                </a:solidFill>
+                <a:latin typeface="Pretendard" pitchFamily="34" charset="0"/>
+                <a:ea typeface="Pretendard" pitchFamily="34" charset="-122"/>
+                <a:cs typeface="Pretendard" pitchFamily="34" charset="-120"/>
+              </a:rPr>
+              <a:t>연구 배경</a:t>
+            </a:r>
+            <a:endParaRPr lang="en-US" sz="900" dirty="0"/>
+          </a:p>
+        </p:txBody>
+      </p:sp>
+      <p:sp>
+        <p:nvSpPr>
+          <p:cNvPr id="16" name="Text 14"/>
+          <p:cNvSpPr/>
+          <p:nvPr/>
+        </p:nvSpPr>
+        <p:spPr>
+          <a:xfrm>
+            <a:off x="6699352" y="2688336"/>
+            <a:ext cx="4449928" cy="384048"/>
+          </a:xfrm>
+          <a:prstGeom prst="rect">
+            <a:avLst/>
+          </a:prstGeom>
+          <a:noFill/>
+          <a:ln/>
+        </p:spPr>
+        <p:txBody>
+          <a:bodyPr wrap="square" lIns="0" tIns="0" rIns="0" bIns="0" rtlCol="0" anchor="t"/>
+          <a:lstStyle/>
+          <a:p>
+            <a:pPr indent="0" marL="0">
+              <a:lnSpc>
+                <a:spcPct val="120000"/>
+              </a:lnSpc>
+              <a:buNone/>
+            </a:pPr>
+            <a:r>
+              <a:rPr lang="en-US" sz="1150" dirty="0">
+                <a:solidFill>
+                  <a:srgbClr val="6E6E6E"/>
+                </a:solidFill>
+                <a:latin typeface="Pretendard" pitchFamily="34" charset="0"/>
+                <a:ea typeface="Pretendard" pitchFamily="34" charset="-122"/>
+                <a:cs typeface="Pretendard" pitchFamily="34" charset="-120"/>
+              </a:rPr>
+              <a:t>다섯 편이 공통으로 전제하는 것과 아무도 건드리지 않은 자리를 쓴다</a:t>
+            </a:r>
+            <a:endParaRPr lang="en-US" sz="1150" dirty="0"/>
+          </a:p>
+        </p:txBody>
+      </p:sp>
+      <p:sp>
+        <p:nvSpPr>
+          <p:cNvPr id="17" name="Shape 15"/>
+          <p:cNvSpPr/>
+          <p:nvPr/>
+        </p:nvSpPr>
+        <p:spPr>
+          <a:xfrm>
+            <a:off x="1042416" y="3054096"/>
+            <a:ext cx="4449928" cy="7315"/>
           </a:xfrm>
           <a:prstGeom prst="rect">
             <a:avLst/>
           </a:prstGeom>
           <a:solidFill>
-            <a:srgbClr val="111111"/>
+            <a:srgbClr val="D2D2D2"/>
           </a:solidFill>
           <a:ln w="12700">
             <a:solidFill>
-              <a:srgbClr val="111111"/>
+              <a:srgbClr val="D2D2D2"/>
             </a:solidFill>
             <a:prstDash val="solid"/>
           </a:ln>
@@ -5285,450 +5464,14 @@
       </p:sp>
       <p:sp>
         <p:nvSpPr>
-          <p:cNvPr id="12" name="Text 10"/>
-          <p:cNvSpPr/>
-          <p:nvPr/>
-        </p:nvSpPr>
-        <p:spPr>
-          <a:xfrm>
-            <a:off x="1060704" y="2523744"/>
-            <a:ext cx="4413352" cy="2706624"/>
-          </a:xfrm>
-          <a:prstGeom prst="rect">
-            <a:avLst/>
-          </a:prstGeom>
-          <a:noFill/>
-          <a:ln/>
-        </p:spPr>
-        <p:txBody>
-          <a:bodyPr wrap="square" lIns="0" tIns="0" rIns="0" bIns="0" rtlCol="0" anchor="t"/>
-          <a:lstStyle/>
-          <a:p>
-            <a:pPr marL="177800" indent="-177800">
-              <a:lnSpc>
-                <a:spcPct val="120000"/>
-              </a:lnSpc>
-              <a:spcAft>
-                <a:spcPts val="1100"/>
-              </a:spcAft>
-              <a:buSzPct val="100000"/>
-              <a:buChar char="•"/>
-            </a:pPr>
-            <a:r>
-              <a:rPr lang="en-US" sz="1200" dirty="0">
-                <a:solidFill>
-                  <a:srgbClr val="1F1F1F"/>
-                </a:solidFill>
-                <a:latin typeface="Pretendard" pitchFamily="34" charset="0"/>
-                <a:ea typeface="Pretendard" pitchFamily="34" charset="-122"/>
-                <a:cs typeface="Pretendard" pitchFamily="34" charset="-120"/>
-              </a:rPr>
-              <a:t>연구 배경과 문제 — 무엇이 왜 문제인가</a:t>
-            </a:r>
-            <a:endParaRPr lang="en-US" sz="1200" dirty="0"/>
-          </a:p>
-          <a:p>
-            <a:pPr marL="177800" indent="-177800">
-              <a:lnSpc>
-                <a:spcPct val="120000"/>
-              </a:lnSpc>
-              <a:spcAft>
-                <a:spcPts val="1100"/>
-              </a:spcAft>
-              <a:buSzPct val="100000"/>
-              <a:buChar char="•"/>
-            </a:pPr>
-            <a:r>
-              <a:rPr lang="en-US" sz="1200" dirty="0">
-                <a:solidFill>
-                  <a:srgbClr val="1F1F1F"/>
-                </a:solidFill>
-                <a:latin typeface="Pretendard" pitchFamily="34" charset="0"/>
-                <a:ea typeface="Pretendard" pitchFamily="34" charset="-122"/>
-                <a:cs typeface="Pretendard" pitchFamily="34" charset="-120"/>
-              </a:rPr>
-              <a:t>연구 질문과 가설 — 무엇을 묻고 무엇을 예상하는가</a:t>
-            </a:r>
-            <a:endParaRPr lang="en-US" sz="1200" dirty="0"/>
-          </a:p>
-          <a:p>
-            <a:pPr marL="177800" indent="-177800">
-              <a:lnSpc>
-                <a:spcPct val="120000"/>
-              </a:lnSpc>
-              <a:spcAft>
-                <a:spcPts val="1100"/>
-              </a:spcAft>
-              <a:buSzPct val="100000"/>
-              <a:buChar char="•"/>
-            </a:pPr>
-            <a:r>
-              <a:rPr lang="en-US" sz="1200" dirty="0">
-                <a:solidFill>
-                  <a:srgbClr val="1F1F1F"/>
-                </a:solidFill>
-                <a:latin typeface="Pretendard" pitchFamily="34" charset="0"/>
-                <a:ea typeface="Pretendard" pitchFamily="34" charset="-122"/>
-                <a:cs typeface="Pretendard" pitchFamily="34" charset="-120"/>
-              </a:rPr>
-              <a:t>선행연구와 내 자리 — 2회차 다섯 편 정리표가 여기로 들어옵니다</a:t>
-            </a:r>
-            <a:endParaRPr lang="en-US" sz="1200" dirty="0"/>
-          </a:p>
-          <a:p>
-            <a:pPr marL="177800" indent="-177800">
-              <a:lnSpc>
-                <a:spcPct val="120000"/>
-              </a:lnSpc>
-              <a:spcAft>
-                <a:spcPts val="1100"/>
-              </a:spcAft>
-              <a:buSzPct val="100000"/>
-              <a:buChar char="•"/>
-            </a:pPr>
-            <a:r>
-              <a:rPr lang="en-US" sz="1200" dirty="0">
-                <a:solidFill>
-                  <a:srgbClr val="1F1F1F"/>
-                </a:solidFill>
-                <a:latin typeface="Pretendard" pitchFamily="34" charset="0"/>
-                <a:ea typeface="Pretendard" pitchFamily="34" charset="-122"/>
-                <a:cs typeface="Pretendard" pitchFamily="34" charset="-120"/>
-              </a:rPr>
-              <a:t>연구 방법과 절차 — 오늘 쓴 한 문단이 이 절 앞에 들어갑니다</a:t>
-            </a:r>
-            <a:endParaRPr lang="en-US" sz="1200" dirty="0"/>
-          </a:p>
-          <a:p>
-            <a:pPr marL="177800" indent="-177800">
-              <a:lnSpc>
-                <a:spcPct val="120000"/>
-              </a:lnSpc>
-              <a:spcAft>
-                <a:spcPts val="1100"/>
-              </a:spcAft>
-              <a:buSzPct val="100000"/>
-              <a:buChar char="•"/>
-            </a:pPr>
-            <a:r>
-              <a:rPr lang="en-US" sz="1200" dirty="0">
-                <a:solidFill>
-                  <a:srgbClr val="1F1F1F"/>
-                </a:solidFill>
-                <a:latin typeface="Pretendard" pitchFamily="34" charset="0"/>
-                <a:ea typeface="Pretendard" pitchFamily="34" charset="-122"/>
-                <a:cs typeface="Pretendard" pitchFamily="34" charset="-120"/>
-              </a:rPr>
-              <a:t>예상 기여 — 무엇이 새로운가, 어디에 보태는가</a:t>
-            </a:r>
-            <a:endParaRPr lang="en-US" sz="1200" dirty="0"/>
-          </a:p>
-          <a:p>
-            <a:pPr marL="177800" indent="-177800">
-              <a:lnSpc>
-                <a:spcPct val="120000"/>
-              </a:lnSpc>
-              <a:spcAft>
-                <a:spcPts val="1100"/>
-              </a:spcAft>
-              <a:buSzPct val="100000"/>
-              <a:buChar char="•"/>
-            </a:pPr>
-            <a:r>
-              <a:rPr lang="en-US" sz="1200" dirty="0">
-                <a:solidFill>
-                  <a:srgbClr val="1F1F1F"/>
-                </a:solidFill>
-                <a:latin typeface="Pretendard" pitchFamily="34" charset="0"/>
-                <a:ea typeface="Pretendard" pitchFamily="34" charset="-122"/>
-                <a:cs typeface="Pretendard" pitchFamily="34" charset="-120"/>
-              </a:rPr>
-              <a:t>일정 — 언제 무엇을 하는가</a:t>
-            </a:r>
-            <a:endParaRPr lang="en-US" sz="1200" dirty="0"/>
-          </a:p>
-        </p:txBody>
-      </p:sp>
-      <p:sp>
-        <p:nvSpPr>
-          <p:cNvPr id="13" name="Shape 11"/>
-          <p:cNvSpPr/>
-          <p:nvPr/>
-        </p:nvSpPr>
-        <p:spPr>
-          <a:xfrm>
-            <a:off x="6297016" y="1664208"/>
-            <a:ext cx="5254600" cy="3749040"/>
-          </a:xfrm>
-          <a:prstGeom prst="rect">
-            <a:avLst/>
-          </a:prstGeom>
-          <a:solidFill>
-            <a:srgbClr val="F2F2F2"/>
-          </a:solidFill>
-          <a:ln w="12700">
-            <a:solidFill>
-              <a:srgbClr val="DCDCDC"/>
-            </a:solidFill>
-            <a:prstDash val="solid"/>
-          </a:ln>
-        </p:spPr>
-      </p:sp>
-      <p:sp>
-        <p:nvSpPr>
-          <p:cNvPr id="14" name="Text 12"/>
-          <p:cNvSpPr/>
-          <p:nvPr/>
-        </p:nvSpPr>
-        <p:spPr>
-          <a:xfrm>
-            <a:off x="6717640" y="1993392"/>
-            <a:ext cx="4413352" cy="365760"/>
-          </a:xfrm>
-          <a:prstGeom prst="rect">
-            <a:avLst/>
-          </a:prstGeom>
-          <a:noFill/>
-          <a:ln/>
-        </p:spPr>
-        <p:txBody>
-          <a:bodyPr wrap="square" lIns="0" tIns="0" rIns="0" bIns="0" rtlCol="0" anchor="ctr"/>
-          <a:lstStyle/>
-          <a:p>
-            <a:pPr indent="0" marL="0">
-              <a:buNone/>
-            </a:pPr>
-            <a:r>
-              <a:rPr lang="en-US" sz="1700" dirty="0">
-                <a:solidFill>
-                  <a:srgbClr val="111111"/>
-                </a:solidFill>
-                <a:latin typeface="Pretendard SemiBold" pitchFamily="34" charset="0"/>
-                <a:ea typeface="Pretendard SemiBold" pitchFamily="34" charset="-122"/>
-                <a:cs typeface="Pretendard SemiBold" pitchFamily="34" charset="-120"/>
-              </a:rPr>
-              <a:t>진행 방식</a:t>
-            </a:r>
-            <a:endParaRPr lang="en-US" sz="1700" dirty="0"/>
-          </a:p>
-        </p:txBody>
-      </p:sp>
-      <p:sp>
-        <p:nvSpPr>
-          <p:cNvPr id="15" name="Shape 13"/>
-          <p:cNvSpPr/>
-          <p:nvPr/>
-        </p:nvSpPr>
-        <p:spPr>
-          <a:xfrm>
-            <a:off x="6717640" y="2414016"/>
-            <a:ext cx="4413352" cy="7315"/>
-          </a:xfrm>
-          <a:prstGeom prst="rect">
-            <a:avLst/>
-          </a:prstGeom>
-          <a:solidFill>
-            <a:srgbClr val="111111"/>
-          </a:solidFill>
-          <a:ln w="12700">
-            <a:solidFill>
-              <a:srgbClr val="111111"/>
-            </a:solidFill>
-            <a:prstDash val="solid"/>
-          </a:ln>
-        </p:spPr>
-      </p:sp>
-      <p:sp>
-        <p:nvSpPr>
-          <p:cNvPr id="16" name="Text 14"/>
-          <p:cNvSpPr/>
-          <p:nvPr/>
-        </p:nvSpPr>
-        <p:spPr>
-          <a:xfrm>
-            <a:off x="6717640" y="2523744"/>
-            <a:ext cx="4413352" cy="2706624"/>
-          </a:xfrm>
-          <a:prstGeom prst="rect">
-            <a:avLst/>
-          </a:prstGeom>
-          <a:noFill/>
-          <a:ln/>
-        </p:spPr>
-        <p:txBody>
-          <a:bodyPr wrap="square" lIns="0" tIns="0" rIns="0" bIns="0" rtlCol="0" anchor="t"/>
-          <a:lstStyle/>
-          <a:p>
-            <a:pPr marL="177800" indent="-177800">
-              <a:lnSpc>
-                <a:spcPct val="120000"/>
-              </a:lnSpc>
-              <a:spcAft>
-                <a:spcPts val="1100"/>
-              </a:spcAft>
-              <a:buSzPct val="100000"/>
-              <a:buChar char="•"/>
-            </a:pPr>
-            <a:r>
-              <a:rPr lang="en-US" sz="1200" dirty="0">
-                <a:solidFill>
-                  <a:srgbClr val="1F1F1F"/>
-                </a:solidFill>
-                <a:latin typeface="Pretendard" pitchFamily="34" charset="0"/>
-                <a:ea typeface="Pretendard" pitchFamily="34" charset="-122"/>
-                <a:cs typeface="Pretendard" pitchFamily="34" charset="-120"/>
-              </a:rPr>
-              <a:t>드래프트는 세션 48시간 전까지 공유 폴더에</a:t>
-            </a:r>
-            <a:endParaRPr lang="en-US" sz="1200" dirty="0"/>
-          </a:p>
-          <a:p>
-            <a:pPr marL="177800" indent="-177800">
-              <a:lnSpc>
-                <a:spcPct val="120000"/>
-              </a:lnSpc>
-              <a:spcAft>
-                <a:spcPts val="1100"/>
-              </a:spcAft>
-              <a:buSzPct val="100000"/>
-              <a:buChar char="•"/>
-            </a:pPr>
-            <a:r>
-              <a:rPr lang="en-US" sz="1200" dirty="0">
-                <a:solidFill>
-                  <a:srgbClr val="1F1F1F"/>
-                </a:solidFill>
-                <a:latin typeface="Pretendard" pitchFamily="34" charset="0"/>
-                <a:ea typeface="Pretendard" pitchFamily="34" charset="-122"/>
-                <a:cs typeface="Pretendard" pitchFamily="34" charset="-120"/>
-              </a:rPr>
-              <a:t>1인 발표와 질의 — 상호 리뷰가 절반입니다</a:t>
-            </a:r>
-            <a:endParaRPr lang="en-US" sz="1200" dirty="0"/>
-          </a:p>
-          <a:p>
-            <a:pPr marL="177800" indent="-177800">
-              <a:lnSpc>
-                <a:spcPct val="120000"/>
-              </a:lnSpc>
-              <a:spcAft>
-                <a:spcPts val="1100"/>
-              </a:spcAft>
-              <a:buSzPct val="100000"/>
-              <a:buChar char="•"/>
-            </a:pPr>
-            <a:r>
-              <a:rPr lang="en-US" sz="1200" dirty="0">
-                <a:solidFill>
-                  <a:srgbClr val="1F1F1F"/>
-                </a:solidFill>
-                <a:latin typeface="Pretendard" pitchFamily="34" charset="0"/>
-                <a:ea typeface="Pretendard" pitchFamily="34" charset="-122"/>
-                <a:cs typeface="Pretendard" pitchFamily="34" charset="-120"/>
-              </a:rPr>
-              <a:t>동료 한 사람당 질문 두 개를 준비해 옵니다</a:t>
-            </a:r>
-            <a:endParaRPr lang="en-US" sz="1200" dirty="0"/>
-          </a:p>
-          <a:p>
-            <a:pPr marL="177800" indent="-177800">
-              <a:lnSpc>
-                <a:spcPct val="120000"/>
-              </a:lnSpc>
-              <a:spcAft>
-                <a:spcPts val="1100"/>
-              </a:spcAft>
-              <a:buSzPct val="100000"/>
-              <a:buChar char="•"/>
-            </a:pPr>
-            <a:r>
-              <a:rPr lang="en-US" sz="1200" dirty="0">
-                <a:solidFill>
-                  <a:srgbClr val="1F1F1F"/>
-                </a:solidFill>
-                <a:latin typeface="Pretendard" pitchFamily="34" charset="0"/>
-                <a:ea typeface="Pretendard" pitchFamily="34" charset="-122"/>
-                <a:cs typeface="Pretendard" pitchFamily="34" charset="-120"/>
-              </a:rPr>
-              <a:t>보는 것은 하나 — 질문과 방법과 기여가 맞물리는가</a:t>
-            </a:r>
-            <a:endParaRPr lang="en-US" sz="1200" dirty="0"/>
-          </a:p>
-          <a:p>
-            <a:pPr marL="177800" indent="-177800">
-              <a:lnSpc>
-                <a:spcPct val="120000"/>
-              </a:lnSpc>
-              <a:spcAft>
-                <a:spcPts val="1100"/>
-              </a:spcAft>
-              <a:buSzPct val="100000"/>
-              <a:buChar char="•"/>
-            </a:pPr>
-            <a:r>
-              <a:rPr lang="en-US" sz="1200" dirty="0">
-                <a:solidFill>
-                  <a:srgbClr val="1F1F1F"/>
-                </a:solidFill>
-                <a:latin typeface="Pretendard" pitchFamily="34" charset="0"/>
-                <a:ea typeface="Pretendard" pitchFamily="34" charset="-122"/>
-                <a:cs typeface="Pretendard" pitchFamily="34" charset="-120"/>
-              </a:rPr>
-              <a:t>마지막에 학위 일정과 다음 단계를 함께 봅니다</a:t>
-            </a:r>
-            <a:endParaRPr lang="en-US" sz="1200" dirty="0"/>
-          </a:p>
-        </p:txBody>
-      </p:sp>
-      <p:sp>
-        <p:nvSpPr>
-          <p:cNvPr id="17" name="Text 15"/>
-          <p:cNvSpPr/>
-          <p:nvPr/>
-        </p:nvSpPr>
-        <p:spPr>
-          <a:xfrm>
-            <a:off x="640080" y="5541264"/>
-            <a:ext cx="10911535" cy="402336"/>
-          </a:xfrm>
-          <a:prstGeom prst="rect">
-            <a:avLst/>
-          </a:prstGeom>
-          <a:noFill/>
-          <a:ln/>
-        </p:spPr>
-        <p:txBody>
-          <a:bodyPr wrap="square" lIns="0" tIns="0" rIns="0" bIns="0" rtlCol="0" anchor="ctr"/>
-          <a:lstStyle/>
-          <a:p>
-            <a:pPr indent="0" marL="0">
-              <a:buNone/>
-            </a:pPr>
-            <a:r>
-              <a:rPr lang="en-US" sz="1200" dirty="0">
-                <a:solidFill>
-                  <a:srgbClr val="6E6E6E"/>
-                </a:solidFill>
-                <a:latin typeface="Pretendard" pitchFamily="34" charset="0"/>
-                <a:ea typeface="Pretendard" pitchFamily="34" charset="-122"/>
-                <a:cs typeface="Pretendard" pitchFamily="34" charset="-120"/>
-              </a:rPr>
-              <a:t>가장 흔한 문제는 질문은 큰데 방법이 작거나, 방법은 촘촘한데 그것으로 그 질문에 답할 수 없는 경우입니다.</a:t>
-            </a:r>
-            <a:endParaRPr lang="en-US" sz="1200" dirty="0"/>
-          </a:p>
-        </p:txBody>
-      </p:sp>
-      <p:sp>
-        <p:nvSpPr>
           <p:cNvPr id="18" name="Shape 16"/>
           <p:cNvSpPr/>
           <p:nvPr/>
         </p:nvSpPr>
         <p:spPr>
           <a:xfrm>
-            <a:off x="640080" y="6291072"/>
-            <a:ext cx="10911535" cy="7315"/>
+            <a:off x="6699352" y="3054096"/>
+            <a:ext cx="4449928" cy="7315"/>
           </a:xfrm>
           <a:prstGeom prst="rect">
             <a:avLst/>
@@ -5752,6 +5495,829 @@
         </p:nvSpPr>
         <p:spPr>
           <a:xfrm>
+            <a:off x="1042416" y="3108960"/>
+            <a:ext cx="2011680" cy="274320"/>
+          </a:xfrm>
+          <a:prstGeom prst="rect">
+            <a:avLst/>
+          </a:prstGeom>
+          <a:noFill/>
+          <a:ln/>
+        </p:spPr>
+        <p:txBody>
+          <a:bodyPr wrap="square" lIns="0" tIns="0" rIns="0" bIns="0" rtlCol="0" anchor="ctr"/>
+          <a:lstStyle/>
+          <a:p>
+            <a:pPr indent="0" marL="0">
+              <a:buNone/>
+            </a:pPr>
+            <a:r>
+              <a:rPr lang="en-US" sz="900" b="1" spc="160" kern="0" dirty="0">
+                <a:solidFill>
+                  <a:srgbClr val="111111"/>
+                </a:solidFill>
+                <a:latin typeface="Pretendard" pitchFamily="34" charset="0"/>
+                <a:ea typeface="Pretendard" pitchFamily="34" charset="-122"/>
+                <a:cs typeface="Pretendard" pitchFamily="34" charset="-120"/>
+              </a:rPr>
+              <a:t>연구 질문</a:t>
+            </a:r>
+            <a:endParaRPr lang="en-US" sz="900" dirty="0"/>
+          </a:p>
+        </p:txBody>
+      </p:sp>
+      <p:sp>
+        <p:nvSpPr>
+          <p:cNvPr id="20" name="Text 18"/>
+          <p:cNvSpPr/>
+          <p:nvPr/>
+        </p:nvSpPr>
+        <p:spPr>
+          <a:xfrm>
+            <a:off x="1042416" y="3346704"/>
+            <a:ext cx="4449928" cy="384048"/>
+          </a:xfrm>
+          <a:prstGeom prst="rect">
+            <a:avLst/>
+          </a:prstGeom>
+          <a:noFill/>
+          <a:ln/>
+        </p:spPr>
+        <p:txBody>
+          <a:bodyPr wrap="square" lIns="0" tIns="0" rIns="0" bIns="0" rtlCol="0" anchor="t"/>
+          <a:lstStyle/>
+          <a:p>
+            <a:pPr indent="0" marL="0">
+              <a:lnSpc>
+                <a:spcPct val="120000"/>
+              </a:lnSpc>
+              <a:buNone/>
+            </a:pPr>
+            <a:r>
+              <a:rPr lang="en-US" sz="1150" dirty="0">
+                <a:solidFill>
+                  <a:srgbClr val="1F1F1F"/>
+                </a:solidFill>
+                <a:latin typeface="Pretendard" pitchFamily="34" charset="0"/>
+                <a:ea typeface="Pretendard" pitchFamily="34" charset="-122"/>
+                <a:cs typeface="Pretendard" pitchFamily="34" charset="-120"/>
+              </a:rPr>
+              <a:t>내 관심에서 나온다</a:t>
+            </a:r>
+            <a:endParaRPr lang="en-US" sz="1150" dirty="0"/>
+          </a:p>
+        </p:txBody>
+      </p:sp>
+      <p:sp>
+        <p:nvSpPr>
+          <p:cNvPr id="21" name="Text 19"/>
+          <p:cNvSpPr/>
+          <p:nvPr/>
+        </p:nvSpPr>
+        <p:spPr>
+          <a:xfrm>
+            <a:off x="6699352" y="3108960"/>
+            <a:ext cx="2011680" cy="274320"/>
+          </a:xfrm>
+          <a:prstGeom prst="rect">
+            <a:avLst/>
+          </a:prstGeom>
+          <a:noFill/>
+          <a:ln/>
+        </p:spPr>
+        <p:txBody>
+          <a:bodyPr wrap="square" lIns="0" tIns="0" rIns="0" bIns="0" rtlCol="0" anchor="ctr"/>
+          <a:lstStyle/>
+          <a:p>
+            <a:pPr indent="0" marL="0">
+              <a:buNone/>
+            </a:pPr>
+            <a:r>
+              <a:rPr lang="en-US" sz="900" b="1" spc="160" kern="0" dirty="0">
+                <a:solidFill>
+                  <a:srgbClr val="9B9B9B"/>
+                </a:solidFill>
+                <a:latin typeface="Pretendard" pitchFamily="34" charset="0"/>
+                <a:ea typeface="Pretendard" pitchFamily="34" charset="-122"/>
+                <a:cs typeface="Pretendard" pitchFamily="34" charset="-120"/>
+              </a:rPr>
+              <a:t>연구 질문</a:t>
+            </a:r>
+            <a:endParaRPr lang="en-US" sz="900" dirty="0"/>
+          </a:p>
+        </p:txBody>
+      </p:sp>
+      <p:sp>
+        <p:nvSpPr>
+          <p:cNvPr id="22" name="Text 20"/>
+          <p:cNvSpPr/>
+          <p:nvPr/>
+        </p:nvSpPr>
+        <p:spPr>
+          <a:xfrm>
+            <a:off x="6699352" y="3346704"/>
+            <a:ext cx="4449928" cy="384048"/>
+          </a:xfrm>
+          <a:prstGeom prst="rect">
+            <a:avLst/>
+          </a:prstGeom>
+          <a:noFill/>
+          <a:ln/>
+        </p:spPr>
+        <p:txBody>
+          <a:bodyPr wrap="square" lIns="0" tIns="0" rIns="0" bIns="0" rtlCol="0" anchor="t"/>
+          <a:lstStyle/>
+          <a:p>
+            <a:pPr indent="0" marL="0">
+              <a:lnSpc>
+                <a:spcPct val="120000"/>
+              </a:lnSpc>
+              <a:buNone/>
+            </a:pPr>
+            <a:r>
+              <a:rPr lang="en-US" sz="1150" dirty="0">
+                <a:solidFill>
+                  <a:srgbClr val="6E6E6E"/>
+                </a:solidFill>
+                <a:latin typeface="Pretendard" pitchFamily="34" charset="0"/>
+                <a:ea typeface="Pretendard" pitchFamily="34" charset="-122"/>
+                <a:cs typeface="Pretendard" pitchFamily="34" charset="-120"/>
+              </a:rPr>
+              <a:t>남들이 한계 절에 적어 둔 자리에서 나온다</a:t>
+            </a:r>
+            <a:endParaRPr lang="en-US" sz="1150" dirty="0"/>
+          </a:p>
+        </p:txBody>
+      </p:sp>
+      <p:sp>
+        <p:nvSpPr>
+          <p:cNvPr id="23" name="Shape 21"/>
+          <p:cNvSpPr/>
+          <p:nvPr/>
+        </p:nvSpPr>
+        <p:spPr>
+          <a:xfrm>
+            <a:off x="1042416" y="3712464"/>
+            <a:ext cx="4449928" cy="7315"/>
+          </a:xfrm>
+          <a:prstGeom prst="rect">
+            <a:avLst/>
+          </a:prstGeom>
+          <a:solidFill>
+            <a:srgbClr val="D2D2D2"/>
+          </a:solidFill>
+          <a:ln w="12700">
+            <a:solidFill>
+              <a:srgbClr val="D2D2D2"/>
+            </a:solidFill>
+            <a:prstDash val="solid"/>
+          </a:ln>
+        </p:spPr>
+      </p:sp>
+      <p:sp>
+        <p:nvSpPr>
+          <p:cNvPr id="24" name="Shape 22"/>
+          <p:cNvSpPr/>
+          <p:nvPr/>
+        </p:nvSpPr>
+        <p:spPr>
+          <a:xfrm>
+            <a:off x="6699352" y="3712464"/>
+            <a:ext cx="4449928" cy="7315"/>
+          </a:xfrm>
+          <a:prstGeom prst="rect">
+            <a:avLst/>
+          </a:prstGeom>
+          <a:solidFill>
+            <a:srgbClr val="DCDCDC"/>
+          </a:solidFill>
+          <a:ln w="12700">
+            <a:solidFill>
+              <a:srgbClr val="DCDCDC"/>
+            </a:solidFill>
+            <a:prstDash val="solid"/>
+          </a:ln>
+        </p:spPr>
+      </p:sp>
+      <p:sp>
+        <p:nvSpPr>
+          <p:cNvPr id="25" name="Text 23"/>
+          <p:cNvSpPr/>
+          <p:nvPr/>
+        </p:nvSpPr>
+        <p:spPr>
+          <a:xfrm>
+            <a:off x="1042416" y="3767328"/>
+            <a:ext cx="2011680" cy="274320"/>
+          </a:xfrm>
+          <a:prstGeom prst="rect">
+            <a:avLst/>
+          </a:prstGeom>
+          <a:noFill/>
+          <a:ln/>
+        </p:spPr>
+        <p:txBody>
+          <a:bodyPr wrap="square" lIns="0" tIns="0" rIns="0" bIns="0" rtlCol="0" anchor="ctr"/>
+          <a:lstStyle/>
+          <a:p>
+            <a:pPr indent="0" marL="0">
+              <a:buNone/>
+            </a:pPr>
+            <a:r>
+              <a:rPr lang="en-US" sz="900" b="1" spc="160" kern="0" dirty="0">
+                <a:solidFill>
+                  <a:srgbClr val="111111"/>
+                </a:solidFill>
+                <a:latin typeface="Pretendard" pitchFamily="34" charset="0"/>
+                <a:ea typeface="Pretendard" pitchFamily="34" charset="-122"/>
+                <a:cs typeface="Pretendard" pitchFamily="34" charset="-120"/>
+              </a:rPr>
+              <a:t>연구 방법</a:t>
+            </a:r>
+            <a:endParaRPr lang="en-US" sz="900" dirty="0"/>
+          </a:p>
+        </p:txBody>
+      </p:sp>
+      <p:sp>
+        <p:nvSpPr>
+          <p:cNvPr id="26" name="Text 24"/>
+          <p:cNvSpPr/>
+          <p:nvPr/>
+        </p:nvSpPr>
+        <p:spPr>
+          <a:xfrm>
+            <a:off x="1042416" y="4005072"/>
+            <a:ext cx="4449928" cy="384048"/>
+          </a:xfrm>
+          <a:prstGeom prst="rect">
+            <a:avLst/>
+          </a:prstGeom>
+          <a:noFill/>
+          <a:ln/>
+        </p:spPr>
+        <p:txBody>
+          <a:bodyPr wrap="square" lIns="0" tIns="0" rIns="0" bIns="0" rtlCol="0" anchor="t"/>
+          <a:lstStyle/>
+          <a:p>
+            <a:pPr indent="0" marL="0">
+              <a:lnSpc>
+                <a:spcPct val="120000"/>
+              </a:lnSpc>
+              <a:buNone/>
+            </a:pPr>
+            <a:r>
+              <a:rPr lang="en-US" sz="1150" dirty="0">
+                <a:solidFill>
+                  <a:srgbClr val="1F1F1F"/>
+                </a:solidFill>
+                <a:latin typeface="Pretendard" pitchFamily="34" charset="0"/>
+                <a:ea typeface="Pretendard" pitchFamily="34" charset="-122"/>
+                <a:cs typeface="Pretendard" pitchFamily="34" charset="-120"/>
+              </a:rPr>
+              <a:t>인터뷰와 설문을 하겠다고 쓴다</a:t>
+            </a:r>
+            <a:endParaRPr lang="en-US" sz="1150" dirty="0"/>
+          </a:p>
+        </p:txBody>
+      </p:sp>
+      <p:sp>
+        <p:nvSpPr>
+          <p:cNvPr id="27" name="Text 25"/>
+          <p:cNvSpPr/>
+          <p:nvPr/>
+        </p:nvSpPr>
+        <p:spPr>
+          <a:xfrm>
+            <a:off x="6699352" y="3767328"/>
+            <a:ext cx="2011680" cy="274320"/>
+          </a:xfrm>
+          <a:prstGeom prst="rect">
+            <a:avLst/>
+          </a:prstGeom>
+          <a:noFill/>
+          <a:ln/>
+        </p:spPr>
+        <p:txBody>
+          <a:bodyPr wrap="square" lIns="0" tIns="0" rIns="0" bIns="0" rtlCol="0" anchor="ctr"/>
+          <a:lstStyle/>
+          <a:p>
+            <a:pPr indent="0" marL="0">
+              <a:buNone/>
+            </a:pPr>
+            <a:r>
+              <a:rPr lang="en-US" sz="900" b="1" spc="160" kern="0" dirty="0">
+                <a:solidFill>
+                  <a:srgbClr val="9B9B9B"/>
+                </a:solidFill>
+                <a:latin typeface="Pretendard" pitchFamily="34" charset="0"/>
+                <a:ea typeface="Pretendard" pitchFamily="34" charset="-122"/>
+                <a:cs typeface="Pretendard" pitchFamily="34" charset="-120"/>
+              </a:rPr>
+              <a:t>연구 방법</a:t>
+            </a:r>
+            <a:endParaRPr lang="en-US" sz="900" dirty="0"/>
+          </a:p>
+        </p:txBody>
+      </p:sp>
+      <p:sp>
+        <p:nvSpPr>
+          <p:cNvPr id="28" name="Text 26"/>
+          <p:cNvSpPr/>
+          <p:nvPr/>
+        </p:nvSpPr>
+        <p:spPr>
+          <a:xfrm>
+            <a:off x="6699352" y="4005072"/>
+            <a:ext cx="4449928" cy="384048"/>
+          </a:xfrm>
+          <a:prstGeom prst="rect">
+            <a:avLst/>
+          </a:prstGeom>
+          <a:noFill/>
+          <a:ln/>
+        </p:spPr>
+        <p:txBody>
+          <a:bodyPr wrap="square" lIns="0" tIns="0" rIns="0" bIns="0" rtlCol="0" anchor="t"/>
+          <a:lstStyle/>
+          <a:p>
+            <a:pPr indent="0" marL="0">
+              <a:lnSpc>
+                <a:spcPct val="120000"/>
+              </a:lnSpc>
+              <a:buNone/>
+            </a:pPr>
+            <a:r>
+              <a:rPr lang="en-US" sz="1150" dirty="0">
+                <a:solidFill>
+                  <a:srgbClr val="6E6E6E"/>
+                </a:solidFill>
+                <a:latin typeface="Pretendard" pitchFamily="34" charset="0"/>
+                <a:ea typeface="Pretendard" pitchFamily="34" charset="-122"/>
+                <a:cs typeface="Pretendard" pitchFamily="34" charset="-120"/>
+              </a:rPr>
+              <a:t>누구의 절차를 왜 고쳐 쓰는지 밝힌다</a:t>
+            </a:r>
+            <a:endParaRPr lang="en-US" sz="1150" dirty="0"/>
+          </a:p>
+        </p:txBody>
+      </p:sp>
+      <p:sp>
+        <p:nvSpPr>
+          <p:cNvPr id="29" name="Shape 27"/>
+          <p:cNvSpPr/>
+          <p:nvPr/>
+        </p:nvSpPr>
+        <p:spPr>
+          <a:xfrm>
+            <a:off x="1042416" y="4370832"/>
+            <a:ext cx="4449928" cy="7315"/>
+          </a:xfrm>
+          <a:prstGeom prst="rect">
+            <a:avLst/>
+          </a:prstGeom>
+          <a:solidFill>
+            <a:srgbClr val="D2D2D2"/>
+          </a:solidFill>
+          <a:ln w="12700">
+            <a:solidFill>
+              <a:srgbClr val="D2D2D2"/>
+            </a:solidFill>
+            <a:prstDash val="solid"/>
+          </a:ln>
+        </p:spPr>
+      </p:sp>
+      <p:sp>
+        <p:nvSpPr>
+          <p:cNvPr id="30" name="Shape 28"/>
+          <p:cNvSpPr/>
+          <p:nvPr/>
+        </p:nvSpPr>
+        <p:spPr>
+          <a:xfrm>
+            <a:off x="6699352" y="4370832"/>
+            <a:ext cx="4449928" cy="7315"/>
+          </a:xfrm>
+          <a:prstGeom prst="rect">
+            <a:avLst/>
+          </a:prstGeom>
+          <a:solidFill>
+            <a:srgbClr val="DCDCDC"/>
+          </a:solidFill>
+          <a:ln w="12700">
+            <a:solidFill>
+              <a:srgbClr val="DCDCDC"/>
+            </a:solidFill>
+            <a:prstDash val="solid"/>
+          </a:ln>
+        </p:spPr>
+      </p:sp>
+      <p:sp>
+        <p:nvSpPr>
+          <p:cNvPr id="31" name="Text 29"/>
+          <p:cNvSpPr/>
+          <p:nvPr/>
+        </p:nvSpPr>
+        <p:spPr>
+          <a:xfrm>
+            <a:off x="1042416" y="4425696"/>
+            <a:ext cx="2011680" cy="274320"/>
+          </a:xfrm>
+          <a:prstGeom prst="rect">
+            <a:avLst/>
+          </a:prstGeom>
+          <a:noFill/>
+          <a:ln/>
+        </p:spPr>
+        <p:txBody>
+          <a:bodyPr wrap="square" lIns="0" tIns="0" rIns="0" bIns="0" rtlCol="0" anchor="ctr"/>
+          <a:lstStyle/>
+          <a:p>
+            <a:pPr indent="0" marL="0">
+              <a:buNone/>
+            </a:pPr>
+            <a:r>
+              <a:rPr lang="en-US" sz="900" b="1" spc="160" kern="0" dirty="0">
+                <a:solidFill>
+                  <a:srgbClr val="111111"/>
+                </a:solidFill>
+                <a:latin typeface="Pretendard" pitchFamily="34" charset="0"/>
+                <a:ea typeface="Pretendard" pitchFamily="34" charset="-122"/>
+                <a:cs typeface="Pretendard" pitchFamily="34" charset="-120"/>
+              </a:rPr>
+              <a:t>예상 기여</a:t>
+            </a:r>
+            <a:endParaRPr lang="en-US" sz="900" dirty="0"/>
+          </a:p>
+        </p:txBody>
+      </p:sp>
+      <p:sp>
+        <p:nvSpPr>
+          <p:cNvPr id="32" name="Text 30"/>
+          <p:cNvSpPr/>
+          <p:nvPr/>
+        </p:nvSpPr>
+        <p:spPr>
+          <a:xfrm>
+            <a:off x="1042416" y="4663440"/>
+            <a:ext cx="4449928" cy="384048"/>
+          </a:xfrm>
+          <a:prstGeom prst="rect">
+            <a:avLst/>
+          </a:prstGeom>
+          <a:noFill/>
+          <a:ln/>
+        </p:spPr>
+        <p:txBody>
+          <a:bodyPr wrap="square" lIns="0" tIns="0" rIns="0" bIns="0" rtlCol="0" anchor="t"/>
+          <a:lstStyle/>
+          <a:p>
+            <a:pPr indent="0" marL="0">
+              <a:lnSpc>
+                <a:spcPct val="120000"/>
+              </a:lnSpc>
+              <a:buNone/>
+            </a:pPr>
+            <a:r>
+              <a:rPr lang="en-US" sz="1150" dirty="0">
+                <a:solidFill>
+                  <a:srgbClr val="1F1F1F"/>
+                </a:solidFill>
+                <a:latin typeface="Pretendard" pitchFamily="34" charset="0"/>
+                <a:ea typeface="Pretendard" pitchFamily="34" charset="-122"/>
+                <a:cs typeface="Pretendard" pitchFamily="34" charset="-120"/>
+              </a:rPr>
+              <a:t>새로울 것이라고 주장한다</a:t>
+            </a:r>
+            <a:endParaRPr lang="en-US" sz="1150" dirty="0"/>
+          </a:p>
+        </p:txBody>
+      </p:sp>
+      <p:sp>
+        <p:nvSpPr>
+          <p:cNvPr id="33" name="Text 31"/>
+          <p:cNvSpPr/>
+          <p:nvPr/>
+        </p:nvSpPr>
+        <p:spPr>
+          <a:xfrm>
+            <a:off x="6699352" y="4425696"/>
+            <a:ext cx="2011680" cy="274320"/>
+          </a:xfrm>
+          <a:prstGeom prst="rect">
+            <a:avLst/>
+          </a:prstGeom>
+          <a:noFill/>
+          <a:ln/>
+        </p:spPr>
+        <p:txBody>
+          <a:bodyPr wrap="square" lIns="0" tIns="0" rIns="0" bIns="0" rtlCol="0" anchor="ctr"/>
+          <a:lstStyle/>
+          <a:p>
+            <a:pPr indent="0" marL="0">
+              <a:buNone/>
+            </a:pPr>
+            <a:r>
+              <a:rPr lang="en-US" sz="900" b="1" spc="160" kern="0" dirty="0">
+                <a:solidFill>
+                  <a:srgbClr val="9B9B9B"/>
+                </a:solidFill>
+                <a:latin typeface="Pretendard" pitchFamily="34" charset="0"/>
+                <a:ea typeface="Pretendard" pitchFamily="34" charset="-122"/>
+                <a:cs typeface="Pretendard" pitchFamily="34" charset="-120"/>
+              </a:rPr>
+              <a:t>예상 기여</a:t>
+            </a:r>
+            <a:endParaRPr lang="en-US" sz="900" dirty="0"/>
+          </a:p>
+        </p:txBody>
+      </p:sp>
+      <p:sp>
+        <p:nvSpPr>
+          <p:cNvPr id="34" name="Text 32"/>
+          <p:cNvSpPr/>
+          <p:nvPr/>
+        </p:nvSpPr>
+        <p:spPr>
+          <a:xfrm>
+            <a:off x="6699352" y="4663440"/>
+            <a:ext cx="4449928" cy="384048"/>
+          </a:xfrm>
+          <a:prstGeom prst="rect">
+            <a:avLst/>
+          </a:prstGeom>
+          <a:noFill/>
+          <a:ln/>
+        </p:spPr>
+        <p:txBody>
+          <a:bodyPr wrap="square" lIns="0" tIns="0" rIns="0" bIns="0" rtlCol="0" anchor="t"/>
+          <a:lstStyle/>
+          <a:p>
+            <a:pPr indent="0" marL="0">
+              <a:lnSpc>
+                <a:spcPct val="120000"/>
+              </a:lnSpc>
+              <a:buNone/>
+            </a:pPr>
+            <a:r>
+              <a:rPr lang="en-US" sz="1150" dirty="0">
+                <a:solidFill>
+                  <a:srgbClr val="6E6E6E"/>
+                </a:solidFill>
+                <a:latin typeface="Pretendard" pitchFamily="34" charset="0"/>
+                <a:ea typeface="Pretendard" pitchFamily="34" charset="-122"/>
+                <a:cs typeface="Pretendard" pitchFamily="34" charset="-120"/>
+              </a:rPr>
+              <a:t>지도 위의 빈 칸을 가리킨다</a:t>
+            </a:r>
+            <a:endParaRPr lang="en-US" sz="1150" dirty="0"/>
+          </a:p>
+        </p:txBody>
+      </p:sp>
+      <p:sp>
+        <p:nvSpPr>
+          <p:cNvPr id="35" name="Shape 33"/>
+          <p:cNvSpPr/>
+          <p:nvPr/>
+        </p:nvSpPr>
+        <p:spPr>
+          <a:xfrm>
+            <a:off x="1042416" y="5029200"/>
+            <a:ext cx="4449928" cy="7315"/>
+          </a:xfrm>
+          <a:prstGeom prst="rect">
+            <a:avLst/>
+          </a:prstGeom>
+          <a:solidFill>
+            <a:srgbClr val="D2D2D2"/>
+          </a:solidFill>
+          <a:ln w="12700">
+            <a:solidFill>
+              <a:srgbClr val="D2D2D2"/>
+            </a:solidFill>
+            <a:prstDash val="solid"/>
+          </a:ln>
+        </p:spPr>
+      </p:sp>
+      <p:sp>
+        <p:nvSpPr>
+          <p:cNvPr id="36" name="Shape 34"/>
+          <p:cNvSpPr/>
+          <p:nvPr/>
+        </p:nvSpPr>
+        <p:spPr>
+          <a:xfrm>
+            <a:off x="6699352" y="5029200"/>
+            <a:ext cx="4449928" cy="7315"/>
+          </a:xfrm>
+          <a:prstGeom prst="rect">
+            <a:avLst/>
+          </a:prstGeom>
+          <a:solidFill>
+            <a:srgbClr val="DCDCDC"/>
+          </a:solidFill>
+          <a:ln w="12700">
+            <a:solidFill>
+              <a:srgbClr val="DCDCDC"/>
+            </a:solidFill>
+            <a:prstDash val="solid"/>
+          </a:ln>
+        </p:spPr>
+      </p:sp>
+      <p:sp>
+        <p:nvSpPr>
+          <p:cNvPr id="37" name="Text 35"/>
+          <p:cNvSpPr/>
+          <p:nvPr/>
+        </p:nvSpPr>
+        <p:spPr>
+          <a:xfrm>
+            <a:off x="1042416" y="5084064"/>
+            <a:ext cx="2011680" cy="274320"/>
+          </a:xfrm>
+          <a:prstGeom prst="rect">
+            <a:avLst/>
+          </a:prstGeom>
+          <a:noFill/>
+          <a:ln/>
+        </p:spPr>
+        <p:txBody>
+          <a:bodyPr wrap="square" lIns="0" tIns="0" rIns="0" bIns="0" rtlCol="0" anchor="ctr"/>
+          <a:lstStyle/>
+          <a:p>
+            <a:pPr indent="0" marL="0">
+              <a:buNone/>
+            </a:pPr>
+            <a:r>
+              <a:rPr lang="en-US" sz="900" b="1" spc="160" kern="0" dirty="0">
+                <a:solidFill>
+                  <a:srgbClr val="111111"/>
+                </a:solidFill>
+                <a:latin typeface="Pretendard" pitchFamily="34" charset="0"/>
+                <a:ea typeface="Pretendard" pitchFamily="34" charset="-122"/>
+                <a:cs typeface="Pretendard" pitchFamily="34" charset="-120"/>
+              </a:rPr>
+              <a:t>일정</a:t>
+            </a:r>
+            <a:endParaRPr lang="en-US" sz="900" dirty="0"/>
+          </a:p>
+        </p:txBody>
+      </p:sp>
+      <p:sp>
+        <p:nvSpPr>
+          <p:cNvPr id="38" name="Text 36"/>
+          <p:cNvSpPr/>
+          <p:nvPr/>
+        </p:nvSpPr>
+        <p:spPr>
+          <a:xfrm>
+            <a:off x="1042416" y="5321808"/>
+            <a:ext cx="4449928" cy="384048"/>
+          </a:xfrm>
+          <a:prstGeom prst="rect">
+            <a:avLst/>
+          </a:prstGeom>
+          <a:noFill/>
+          <a:ln/>
+        </p:spPr>
+        <p:txBody>
+          <a:bodyPr wrap="square" lIns="0" tIns="0" rIns="0" bIns="0" rtlCol="0" anchor="t"/>
+          <a:lstStyle/>
+          <a:p>
+            <a:pPr indent="0" marL="0">
+              <a:lnSpc>
+                <a:spcPct val="120000"/>
+              </a:lnSpc>
+              <a:buNone/>
+            </a:pPr>
+            <a:r>
+              <a:rPr lang="en-US" sz="1150" dirty="0">
+                <a:solidFill>
+                  <a:srgbClr val="1F1F1F"/>
+                </a:solidFill>
+                <a:latin typeface="Pretendard" pitchFamily="34" charset="0"/>
+                <a:ea typeface="Pretendard" pitchFamily="34" charset="-122"/>
+                <a:cs typeface="Pretendard" pitchFamily="34" charset="-120"/>
+              </a:rPr>
+              <a:t>짐작으로 적는다</a:t>
+            </a:r>
+            <a:endParaRPr lang="en-US" sz="1150" dirty="0"/>
+          </a:p>
+        </p:txBody>
+      </p:sp>
+      <p:sp>
+        <p:nvSpPr>
+          <p:cNvPr id="39" name="Text 37"/>
+          <p:cNvSpPr/>
+          <p:nvPr/>
+        </p:nvSpPr>
+        <p:spPr>
+          <a:xfrm>
+            <a:off x="6699352" y="5084064"/>
+            <a:ext cx="2011680" cy="274320"/>
+          </a:xfrm>
+          <a:prstGeom prst="rect">
+            <a:avLst/>
+          </a:prstGeom>
+          <a:noFill/>
+          <a:ln/>
+        </p:spPr>
+        <p:txBody>
+          <a:bodyPr wrap="square" lIns="0" tIns="0" rIns="0" bIns="0" rtlCol="0" anchor="ctr"/>
+          <a:lstStyle/>
+          <a:p>
+            <a:pPr indent="0" marL="0">
+              <a:buNone/>
+            </a:pPr>
+            <a:r>
+              <a:rPr lang="en-US" sz="900" b="1" spc="160" kern="0" dirty="0">
+                <a:solidFill>
+                  <a:srgbClr val="9B9B9B"/>
+                </a:solidFill>
+                <a:latin typeface="Pretendard" pitchFamily="34" charset="0"/>
+                <a:ea typeface="Pretendard" pitchFamily="34" charset="-122"/>
+                <a:cs typeface="Pretendard" pitchFamily="34" charset="-120"/>
+              </a:rPr>
+              <a:t>일정</a:t>
+            </a:r>
+            <a:endParaRPr lang="en-US" sz="900" dirty="0"/>
+          </a:p>
+        </p:txBody>
+      </p:sp>
+      <p:sp>
+        <p:nvSpPr>
+          <p:cNvPr id="40" name="Text 38"/>
+          <p:cNvSpPr/>
+          <p:nvPr/>
+        </p:nvSpPr>
+        <p:spPr>
+          <a:xfrm>
+            <a:off x="6699352" y="5321808"/>
+            <a:ext cx="4449928" cy="384048"/>
+          </a:xfrm>
+          <a:prstGeom prst="rect">
+            <a:avLst/>
+          </a:prstGeom>
+          <a:noFill/>
+          <a:ln/>
+        </p:spPr>
+        <p:txBody>
+          <a:bodyPr wrap="square" lIns="0" tIns="0" rIns="0" bIns="0" rtlCol="0" anchor="t"/>
+          <a:lstStyle/>
+          <a:p>
+            <a:pPr indent="0" marL="0">
+              <a:lnSpc>
+                <a:spcPct val="120000"/>
+              </a:lnSpc>
+              <a:buNone/>
+            </a:pPr>
+            <a:r>
+              <a:rPr lang="en-US" sz="1150" dirty="0">
+                <a:solidFill>
+                  <a:srgbClr val="6E6E6E"/>
+                </a:solidFill>
+                <a:latin typeface="Pretendard" pitchFamily="34" charset="0"/>
+                <a:ea typeface="Pretendard" pitchFamily="34" charset="-122"/>
+                <a:cs typeface="Pretendard" pitchFamily="34" charset="-120"/>
+              </a:rPr>
+              <a:t>비슷한 연구가 얼마나 걸렸는지 보고 적는다</a:t>
+            </a:r>
+            <a:endParaRPr lang="en-US" sz="1150" dirty="0"/>
+          </a:p>
+        </p:txBody>
+      </p:sp>
+      <p:sp>
+        <p:nvSpPr>
+          <p:cNvPr id="41" name="Shape 39"/>
+          <p:cNvSpPr/>
+          <p:nvPr/>
+        </p:nvSpPr>
+        <p:spPr>
+          <a:xfrm>
+            <a:off x="640080" y="6291072"/>
+            <a:ext cx="10911535" cy="7315"/>
+          </a:xfrm>
+          <a:prstGeom prst="rect">
+            <a:avLst/>
+          </a:prstGeom>
+          <a:solidFill>
+            <a:srgbClr val="DCDCDC"/>
+          </a:solidFill>
+          <a:ln w="12700">
+            <a:solidFill>
+              <a:srgbClr val="DCDCDC"/>
+            </a:solidFill>
+            <a:prstDash val="solid"/>
+          </a:ln>
+        </p:spPr>
+      </p:sp>
+      <p:sp>
+        <p:nvSpPr>
+          <p:cNvPr id="42" name="Text 40"/>
+          <p:cNvSpPr/>
+          <p:nvPr/>
+        </p:nvSpPr>
+        <p:spPr>
+          <a:xfrm>
             <a:off x="640080" y="6382512"/>
             <a:ext cx="7772400" cy="237744"/>
           </a:xfrm>
@@ -5785,7 +6351,7 @@
       </p:sp>
       <p:sp>
         <p:nvSpPr>
-          <p:cNvPr id="20" name="Text 18"/>
+          <p:cNvPr id="43" name="Text 41"/>
           <p:cNvSpPr/>
           <p:nvPr/>
         </p:nvSpPr>
@@ -5816,7 +6382,7 @@
                 <a:ea typeface="Pretendard" pitchFamily="34" charset="-122"/>
                 <a:cs typeface="Pretendard" pitchFamily="34" charset="-120"/>
               </a:rPr>
-              <a:t>P.07</a:t>
+              <a:t>P.06</a:t>
             </a:r>
             <a:endParaRPr lang="en-US" sz="850" dirty="0"/>
           </a:p>
@@ -6029,7 +6595,7 @@
                 <a:ea typeface="Pretendard" pitchFamily="34" charset="-122"/>
                 <a:cs typeface="Pretendard" pitchFamily="34" charset="-120"/>
               </a:rPr>
-              <a:t>SUBMIT</a:t>
+              <a:t>FORM</a:t>
             </a:r>
             <a:endParaRPr lang="en-US" sz="950" dirty="0"/>
           </a:p>
@@ -6068,7 +6634,7 @@
                 <a:ea typeface="Pretendard SemiBold" pitchFamily="34" charset="-122"/>
                 <a:cs typeface="Pretendard SemiBold" pitchFamily="34" charset="-120"/>
               </a:rPr>
-              <a:t>다음 회차까지 확인할 것</a:t>
+              <a:t>목차는 글을 쓰기 전에 내리는 판단</a:t>
             </a:r>
             <a:endParaRPr lang="en-US" sz="3000" dirty="0"/>
           </a:p>
@@ -6107,7 +6673,7 @@
                 <a:ea typeface="Pretendard" pitchFamily="34" charset="-122"/>
                 <a:cs typeface="Pretendard" pitchFamily="34" charset="-120"/>
               </a:rPr>
-              <a:t>마지막 회차입니다. 2주가 있습니다.</a:t>
+              <a:t>다섯 편의 목차는 그 분야에서 글을 어떻게 쓰는지에 대한 합의입니다.</a:t>
             </a:r>
             <a:endParaRPr lang="en-US" sz="1150" dirty="0"/>
           </a:p>
@@ -6121,18 +6687,18 @@
         </p:nvSpPr>
         <p:spPr>
           <a:xfrm>
-            <a:off x="640080" y="1755648"/>
-            <a:ext cx="5254600" cy="585216"/>
+            <a:off x="640080" y="1664208"/>
+            <a:ext cx="5254600" cy="3749040"/>
           </a:xfrm>
           <a:prstGeom prst="rect">
             <a:avLst/>
           </a:prstGeom>
           <a:solidFill>
-            <a:srgbClr val="F2F2F2"/>
+            <a:srgbClr val="FFFFFF"/>
           </a:solidFill>
           <a:ln w="12700">
             <a:solidFill>
-              <a:srgbClr val="F2F2F2"/>
+              <a:srgbClr val="DCDCDC"/>
             </a:solidFill>
             <a:prstDash val="solid"/>
           </a:ln>
@@ -6140,1269 +6706,53 @@
       </p:sp>
       <p:sp>
         <p:nvSpPr>
-          <p:cNvPr id="10" name="Shape 8"/>
-          <p:cNvSpPr/>
-          <p:nvPr/>
-        </p:nvSpPr>
-        <p:spPr>
-          <a:xfrm>
-            <a:off x="914400" y="1892808"/>
-            <a:ext cx="310896" cy="310896"/>
-          </a:xfrm>
-          <a:prstGeom prst="ellipse">
-            <a:avLst/>
-          </a:prstGeom>
-          <a:solidFill>
-            <a:srgbClr val="F2F2F2"/>
-          </a:solidFill>
-          <a:ln w="12700">
-            <a:solidFill>
-              <a:srgbClr val="111111"/>
-            </a:solidFill>
-            <a:prstDash val="solid"/>
-          </a:ln>
-        </p:spPr>
-      </p:sp>
-      <p:sp>
-        <p:nvSpPr>
-          <p:cNvPr id="11" name="Text 9"/>
-          <p:cNvSpPr/>
-          <p:nvPr/>
-        </p:nvSpPr>
-        <p:spPr>
-          <a:xfrm>
-            <a:off x="914400" y="1892808"/>
-            <a:ext cx="310896" cy="310896"/>
-          </a:xfrm>
-          <a:prstGeom prst="rect">
-            <a:avLst/>
-          </a:prstGeom>
-          <a:noFill/>
-          <a:ln/>
-        </p:spPr>
-        <p:txBody>
-          <a:bodyPr wrap="square" lIns="0" tIns="0" rIns="0" bIns="0" rtlCol="0" anchor="ctr"/>
-          <a:lstStyle/>
-          <a:p>
-            <a:pPr algn="ctr" indent="0" marL="0">
-              <a:buNone/>
-            </a:pPr>
-            <a:r>
-              <a:rPr lang="en-US" sz="900" b="1" dirty="0">
+          <p:cNvPr id="10" name="Text 8"/>
+          <p:cNvSpPr/>
+          <p:nvPr/>
+        </p:nvSpPr>
+        <p:spPr>
+          <a:xfrm>
+            <a:off x="1060704" y="1993392"/>
+            <a:ext cx="4413352" cy="365760"/>
+          </a:xfrm>
+          <a:prstGeom prst="rect">
+            <a:avLst/>
+          </a:prstGeom>
+          <a:noFill/>
+          <a:ln/>
+        </p:spPr>
+        <p:txBody>
+          <a:bodyPr wrap="square" lIns="0" tIns="0" rIns="0" bIns="0" rtlCol="0" anchor="ctr"/>
+          <a:lstStyle/>
+          <a:p>
+            <a:pPr indent="0" marL="0">
+              <a:buNone/>
+            </a:pPr>
+            <a:r>
+              <a:rPr lang="en-US" sz="1700" dirty="0">
                 <a:solidFill>
                   <a:srgbClr val="111111"/>
                 </a:solidFill>
-                <a:latin typeface="Pretendard" pitchFamily="34" charset="0"/>
-                <a:ea typeface="Pretendard" pitchFamily="34" charset="-122"/>
-                <a:cs typeface="Pretendard" pitchFamily="34" charset="-120"/>
-              </a:rPr>
-              <a:t>01</a:t>
-            </a:r>
-            <a:endParaRPr lang="en-US" sz="900" dirty="0"/>
-          </a:p>
-        </p:txBody>
-      </p:sp>
-      <p:sp>
-        <p:nvSpPr>
-          <p:cNvPr id="12" name="Text 10"/>
-          <p:cNvSpPr/>
-          <p:nvPr/>
-        </p:nvSpPr>
-        <p:spPr>
-          <a:xfrm>
-            <a:off x="1353312" y="1755648"/>
-            <a:ext cx="4267048" cy="585216"/>
-          </a:xfrm>
-          <a:prstGeom prst="rect">
-            <a:avLst/>
-          </a:prstGeom>
-          <a:noFill/>
-          <a:ln/>
-        </p:spPr>
-        <p:txBody>
-          <a:bodyPr wrap="square" lIns="0" tIns="0" rIns="0" bIns="0" rtlCol="0" anchor="ctr"/>
-          <a:lstStyle/>
-          <a:p>
-            <a:pPr indent="0" marL="0">
-              <a:buNone/>
-            </a:pPr>
-            <a:r>
-              <a:rPr lang="en-US" sz="1200" dirty="0">
-                <a:solidFill>
-                  <a:srgbClr val="111111"/>
-                </a:solidFill>
-                <a:latin typeface="Pretendard" pitchFamily="34" charset="0"/>
-                <a:ea typeface="Pretendard" pitchFamily="34" charset="-122"/>
-                <a:cs typeface="Pretendard" pitchFamily="34" charset="-120"/>
-              </a:rPr>
-              <a:t>프로포절이 여섯 절로 되어 있다</a:t>
-            </a:r>
-            <a:endParaRPr lang="en-US" sz="1200" dirty="0"/>
-          </a:p>
-        </p:txBody>
-      </p:sp>
-      <p:sp>
-        <p:nvSpPr>
-          <p:cNvPr id="13" name="Shape 11"/>
-          <p:cNvSpPr/>
-          <p:nvPr/>
-        </p:nvSpPr>
-        <p:spPr>
-          <a:xfrm>
-            <a:off x="640080" y="2487168"/>
-            <a:ext cx="5254600" cy="585216"/>
-          </a:xfrm>
-          <a:prstGeom prst="rect">
-            <a:avLst/>
-          </a:prstGeom>
-          <a:solidFill>
-            <a:srgbClr val="F2F2F2"/>
-          </a:solidFill>
-          <a:ln w="12700">
-            <a:solidFill>
-              <a:srgbClr val="F2F2F2"/>
-            </a:solidFill>
-            <a:prstDash val="solid"/>
-          </a:ln>
-        </p:spPr>
-      </p:sp>
-      <p:sp>
-        <p:nvSpPr>
-          <p:cNvPr id="14" name="Shape 12"/>
-          <p:cNvSpPr/>
-          <p:nvPr/>
-        </p:nvSpPr>
-        <p:spPr>
-          <a:xfrm>
-            <a:off x="914400" y="2624328"/>
-            <a:ext cx="310896" cy="310896"/>
-          </a:xfrm>
-          <a:prstGeom prst="ellipse">
-            <a:avLst/>
-          </a:prstGeom>
-          <a:solidFill>
-            <a:srgbClr val="F2F2F2"/>
-          </a:solidFill>
-          <a:ln w="12700">
-            <a:solidFill>
-              <a:srgbClr val="111111"/>
-            </a:solidFill>
-            <a:prstDash val="solid"/>
-          </a:ln>
-        </p:spPr>
-      </p:sp>
-      <p:sp>
-        <p:nvSpPr>
-          <p:cNvPr id="15" name="Text 13"/>
-          <p:cNvSpPr/>
-          <p:nvPr/>
-        </p:nvSpPr>
-        <p:spPr>
-          <a:xfrm>
-            <a:off x="914400" y="2624328"/>
-            <a:ext cx="310896" cy="310896"/>
-          </a:xfrm>
-          <a:prstGeom prst="rect">
-            <a:avLst/>
-          </a:prstGeom>
-          <a:noFill/>
-          <a:ln/>
-        </p:spPr>
-        <p:txBody>
-          <a:bodyPr wrap="square" lIns="0" tIns="0" rIns="0" bIns="0" rtlCol="0" anchor="ctr"/>
-          <a:lstStyle/>
-          <a:p>
-            <a:pPr algn="ctr" indent="0" marL="0">
-              <a:buNone/>
-            </a:pPr>
-            <a:r>
-              <a:rPr lang="en-US" sz="900" b="1" dirty="0">
-                <a:solidFill>
-                  <a:srgbClr val="111111"/>
-                </a:solidFill>
-                <a:latin typeface="Pretendard" pitchFamily="34" charset="0"/>
-                <a:ea typeface="Pretendard" pitchFamily="34" charset="-122"/>
-                <a:cs typeface="Pretendard" pitchFamily="34" charset="-120"/>
-              </a:rPr>
-              <a:t>02</a:t>
-            </a:r>
-            <a:endParaRPr lang="en-US" sz="900" dirty="0"/>
-          </a:p>
-        </p:txBody>
-      </p:sp>
-      <p:sp>
-        <p:nvSpPr>
-          <p:cNvPr id="16" name="Text 14"/>
-          <p:cNvSpPr/>
-          <p:nvPr/>
-        </p:nvSpPr>
-        <p:spPr>
-          <a:xfrm>
-            <a:off x="1353312" y="2487168"/>
-            <a:ext cx="4267048" cy="585216"/>
-          </a:xfrm>
-          <a:prstGeom prst="rect">
-            <a:avLst/>
-          </a:prstGeom>
-          <a:noFill/>
-          <a:ln/>
-        </p:spPr>
-        <p:txBody>
-          <a:bodyPr wrap="square" lIns="0" tIns="0" rIns="0" bIns="0" rtlCol="0" anchor="ctr"/>
-          <a:lstStyle/>
-          <a:p>
-            <a:pPr indent="0" marL="0">
-              <a:buNone/>
-            </a:pPr>
-            <a:r>
-              <a:rPr lang="en-US" sz="1200" dirty="0">
-                <a:solidFill>
-                  <a:srgbClr val="111111"/>
-                </a:solidFill>
-                <a:latin typeface="Pretendard" pitchFamily="34" charset="0"/>
-                <a:ea typeface="Pretendard" pitchFamily="34" charset="-122"/>
-                <a:cs typeface="Pretendard" pitchFamily="34" charset="-120"/>
-              </a:rPr>
-              <a:t>연구 질문이 한 문장으로 적혀 있다</a:t>
-            </a:r>
-            <a:endParaRPr lang="en-US" sz="1200" dirty="0"/>
-          </a:p>
-        </p:txBody>
-      </p:sp>
-      <p:sp>
-        <p:nvSpPr>
-          <p:cNvPr id="17" name="Shape 15"/>
-          <p:cNvSpPr/>
-          <p:nvPr/>
-        </p:nvSpPr>
-        <p:spPr>
-          <a:xfrm>
-            <a:off x="640080" y="3218688"/>
-            <a:ext cx="5254600" cy="585216"/>
-          </a:xfrm>
-          <a:prstGeom prst="rect">
-            <a:avLst/>
-          </a:prstGeom>
-          <a:solidFill>
-            <a:srgbClr val="F2F2F2"/>
-          </a:solidFill>
-          <a:ln w="12700">
-            <a:solidFill>
-              <a:srgbClr val="F2F2F2"/>
-            </a:solidFill>
-            <a:prstDash val="solid"/>
-          </a:ln>
-        </p:spPr>
-      </p:sp>
-      <p:sp>
-        <p:nvSpPr>
-          <p:cNvPr id="18" name="Shape 16"/>
-          <p:cNvSpPr/>
-          <p:nvPr/>
-        </p:nvSpPr>
-        <p:spPr>
-          <a:xfrm>
-            <a:off x="914400" y="3355848"/>
-            <a:ext cx="310896" cy="310896"/>
-          </a:xfrm>
-          <a:prstGeom prst="ellipse">
-            <a:avLst/>
-          </a:prstGeom>
-          <a:solidFill>
-            <a:srgbClr val="F2F2F2"/>
-          </a:solidFill>
-          <a:ln w="12700">
-            <a:solidFill>
-              <a:srgbClr val="111111"/>
-            </a:solidFill>
-            <a:prstDash val="solid"/>
-          </a:ln>
-        </p:spPr>
-      </p:sp>
-      <p:sp>
-        <p:nvSpPr>
-          <p:cNvPr id="19" name="Text 17"/>
-          <p:cNvSpPr/>
-          <p:nvPr/>
-        </p:nvSpPr>
-        <p:spPr>
-          <a:xfrm>
-            <a:off x="914400" y="3355848"/>
-            <a:ext cx="310896" cy="310896"/>
-          </a:xfrm>
-          <a:prstGeom prst="rect">
-            <a:avLst/>
-          </a:prstGeom>
-          <a:noFill/>
-          <a:ln/>
-        </p:spPr>
-        <p:txBody>
-          <a:bodyPr wrap="square" lIns="0" tIns="0" rIns="0" bIns="0" rtlCol="0" anchor="ctr"/>
-          <a:lstStyle/>
-          <a:p>
-            <a:pPr algn="ctr" indent="0" marL="0">
-              <a:buNone/>
-            </a:pPr>
-            <a:r>
-              <a:rPr lang="en-US" sz="900" b="1" dirty="0">
-                <a:solidFill>
-                  <a:srgbClr val="111111"/>
-                </a:solidFill>
-                <a:latin typeface="Pretendard" pitchFamily="34" charset="0"/>
-                <a:ea typeface="Pretendard" pitchFamily="34" charset="-122"/>
-                <a:cs typeface="Pretendard" pitchFamily="34" charset="-120"/>
-              </a:rPr>
-              <a:t>03</a:t>
-            </a:r>
-            <a:endParaRPr lang="en-US" sz="900" dirty="0"/>
-          </a:p>
-        </p:txBody>
-      </p:sp>
-      <p:sp>
-        <p:nvSpPr>
-          <p:cNvPr id="20" name="Text 18"/>
-          <p:cNvSpPr/>
-          <p:nvPr/>
-        </p:nvSpPr>
-        <p:spPr>
-          <a:xfrm>
-            <a:off x="1353312" y="3218688"/>
-            <a:ext cx="4267048" cy="585216"/>
-          </a:xfrm>
-          <a:prstGeom prst="rect">
-            <a:avLst/>
-          </a:prstGeom>
-          <a:noFill/>
-          <a:ln/>
-        </p:spPr>
-        <p:txBody>
-          <a:bodyPr wrap="square" lIns="0" tIns="0" rIns="0" bIns="0" rtlCol="0" anchor="ctr"/>
-          <a:lstStyle/>
-          <a:p>
-            <a:pPr indent="0" marL="0">
-              <a:buNone/>
-            </a:pPr>
-            <a:r>
-              <a:rPr lang="en-US" sz="1200" dirty="0">
-                <a:solidFill>
-                  <a:srgbClr val="111111"/>
-                </a:solidFill>
-                <a:latin typeface="Pretendard" pitchFamily="34" charset="0"/>
-                <a:ea typeface="Pretendard" pitchFamily="34" charset="-122"/>
-                <a:cs typeface="Pretendard" pitchFamily="34" charset="-120"/>
-              </a:rPr>
-              <a:t>선행연구 다섯 편이 목록이 아니라 본문에 인용되어 있다</a:t>
-            </a:r>
-            <a:endParaRPr lang="en-US" sz="1200" dirty="0"/>
-          </a:p>
-        </p:txBody>
-      </p:sp>
-      <p:sp>
-        <p:nvSpPr>
-          <p:cNvPr id="21" name="Shape 19"/>
-          <p:cNvSpPr/>
-          <p:nvPr/>
-        </p:nvSpPr>
-        <p:spPr>
-          <a:xfrm>
-            <a:off x="640080" y="3950208"/>
-            <a:ext cx="5254600" cy="585216"/>
-          </a:xfrm>
-          <a:prstGeom prst="rect">
-            <a:avLst/>
-          </a:prstGeom>
-          <a:solidFill>
-            <a:srgbClr val="F2F2F2"/>
-          </a:solidFill>
-          <a:ln w="12700">
-            <a:solidFill>
-              <a:srgbClr val="F2F2F2"/>
-            </a:solidFill>
-            <a:prstDash val="solid"/>
-          </a:ln>
-        </p:spPr>
-      </p:sp>
-      <p:sp>
-        <p:nvSpPr>
-          <p:cNvPr id="22" name="Shape 20"/>
-          <p:cNvSpPr/>
-          <p:nvPr/>
-        </p:nvSpPr>
-        <p:spPr>
-          <a:xfrm>
-            <a:off x="914400" y="4087368"/>
-            <a:ext cx="310896" cy="310896"/>
-          </a:xfrm>
-          <a:prstGeom prst="ellipse">
-            <a:avLst/>
-          </a:prstGeom>
-          <a:solidFill>
-            <a:srgbClr val="F2F2F2"/>
-          </a:solidFill>
-          <a:ln w="12700">
-            <a:solidFill>
-              <a:srgbClr val="111111"/>
-            </a:solidFill>
-            <a:prstDash val="solid"/>
-          </a:ln>
-        </p:spPr>
-      </p:sp>
-      <p:sp>
-        <p:nvSpPr>
-          <p:cNvPr id="23" name="Text 21"/>
-          <p:cNvSpPr/>
-          <p:nvPr/>
-        </p:nvSpPr>
-        <p:spPr>
-          <a:xfrm>
-            <a:off x="914400" y="4087368"/>
-            <a:ext cx="310896" cy="310896"/>
-          </a:xfrm>
-          <a:prstGeom prst="rect">
-            <a:avLst/>
-          </a:prstGeom>
-          <a:noFill/>
-          <a:ln/>
-        </p:spPr>
-        <p:txBody>
-          <a:bodyPr wrap="square" lIns="0" tIns="0" rIns="0" bIns="0" rtlCol="0" anchor="ctr"/>
-          <a:lstStyle/>
-          <a:p>
-            <a:pPr algn="ctr" indent="0" marL="0">
-              <a:buNone/>
-            </a:pPr>
-            <a:r>
-              <a:rPr lang="en-US" sz="900" b="1" dirty="0">
-                <a:solidFill>
-                  <a:srgbClr val="111111"/>
-                </a:solidFill>
-                <a:latin typeface="Pretendard" pitchFamily="34" charset="0"/>
-                <a:ea typeface="Pretendard" pitchFamily="34" charset="-122"/>
-                <a:cs typeface="Pretendard" pitchFamily="34" charset="-120"/>
-              </a:rPr>
-              <a:t>04</a:t>
-            </a:r>
-            <a:endParaRPr lang="en-US" sz="900" dirty="0"/>
-          </a:p>
-        </p:txBody>
-      </p:sp>
-      <p:sp>
-        <p:nvSpPr>
-          <p:cNvPr id="24" name="Text 22"/>
-          <p:cNvSpPr/>
-          <p:nvPr/>
-        </p:nvSpPr>
-        <p:spPr>
-          <a:xfrm>
-            <a:off x="1353312" y="3950208"/>
-            <a:ext cx="4267048" cy="585216"/>
-          </a:xfrm>
-          <a:prstGeom prst="rect">
-            <a:avLst/>
-          </a:prstGeom>
-          <a:noFill/>
-          <a:ln/>
-        </p:spPr>
-        <p:txBody>
-          <a:bodyPr wrap="square" lIns="0" tIns="0" rIns="0" bIns="0" rtlCol="0" anchor="ctr"/>
-          <a:lstStyle/>
-          <a:p>
-            <a:pPr indent="0" marL="0">
-              <a:buNone/>
-            </a:pPr>
-            <a:r>
-              <a:rPr lang="en-US" sz="1200" dirty="0">
-                <a:solidFill>
-                  <a:srgbClr val="111111"/>
-                </a:solidFill>
-                <a:latin typeface="Pretendard" pitchFamily="34" charset="0"/>
-                <a:ea typeface="Pretendard" pitchFamily="34" charset="-122"/>
-                <a:cs typeface="Pretendard" pitchFamily="34" charset="-120"/>
-              </a:rPr>
-              <a:t>내 연구의 자리가 선행연구와의 관계로 설명되어 있다</a:t>
-            </a:r>
-            <a:endParaRPr lang="en-US" sz="1200" dirty="0"/>
-          </a:p>
-        </p:txBody>
-      </p:sp>
-      <p:sp>
-        <p:nvSpPr>
-          <p:cNvPr id="25" name="Shape 23"/>
-          <p:cNvSpPr/>
-          <p:nvPr/>
-        </p:nvSpPr>
-        <p:spPr>
-          <a:xfrm>
-            <a:off x="640080" y="4681728"/>
-            <a:ext cx="5254600" cy="585216"/>
-          </a:xfrm>
-          <a:prstGeom prst="rect">
-            <a:avLst/>
-          </a:prstGeom>
-          <a:solidFill>
-            <a:srgbClr val="F2F2F2"/>
-          </a:solidFill>
-          <a:ln w="12700">
-            <a:solidFill>
-              <a:srgbClr val="F2F2F2"/>
-            </a:solidFill>
-            <a:prstDash val="solid"/>
-          </a:ln>
-        </p:spPr>
-      </p:sp>
-      <p:sp>
-        <p:nvSpPr>
-          <p:cNvPr id="26" name="Shape 24"/>
-          <p:cNvSpPr/>
-          <p:nvPr/>
-        </p:nvSpPr>
-        <p:spPr>
-          <a:xfrm>
-            <a:off x="914400" y="4818888"/>
-            <a:ext cx="310896" cy="310896"/>
-          </a:xfrm>
-          <a:prstGeom prst="ellipse">
-            <a:avLst/>
-          </a:prstGeom>
-          <a:solidFill>
-            <a:srgbClr val="F2F2F2"/>
-          </a:solidFill>
-          <a:ln w="12700">
-            <a:solidFill>
-              <a:srgbClr val="111111"/>
-            </a:solidFill>
-            <a:prstDash val="solid"/>
-          </a:ln>
-        </p:spPr>
-      </p:sp>
-      <p:sp>
-        <p:nvSpPr>
-          <p:cNvPr id="27" name="Text 25"/>
-          <p:cNvSpPr/>
-          <p:nvPr/>
-        </p:nvSpPr>
-        <p:spPr>
-          <a:xfrm>
-            <a:off x="914400" y="4818888"/>
-            <a:ext cx="310896" cy="310896"/>
-          </a:xfrm>
-          <a:prstGeom prst="rect">
-            <a:avLst/>
-          </a:prstGeom>
-          <a:noFill/>
-          <a:ln/>
-        </p:spPr>
-        <p:txBody>
-          <a:bodyPr wrap="square" lIns="0" tIns="0" rIns="0" bIns="0" rtlCol="0" anchor="ctr"/>
-          <a:lstStyle/>
-          <a:p>
-            <a:pPr algn="ctr" indent="0" marL="0">
-              <a:buNone/>
-            </a:pPr>
-            <a:r>
-              <a:rPr lang="en-US" sz="900" b="1" dirty="0">
-                <a:solidFill>
-                  <a:srgbClr val="111111"/>
-                </a:solidFill>
-                <a:latin typeface="Pretendard" pitchFamily="34" charset="0"/>
-                <a:ea typeface="Pretendard" pitchFamily="34" charset="-122"/>
-                <a:cs typeface="Pretendard" pitchFamily="34" charset="-120"/>
-              </a:rPr>
-              <a:t>05</a:t>
-            </a:r>
-            <a:endParaRPr lang="en-US" sz="900" dirty="0"/>
-          </a:p>
-        </p:txBody>
-      </p:sp>
-      <p:sp>
-        <p:nvSpPr>
-          <p:cNvPr id="28" name="Text 26"/>
-          <p:cNvSpPr/>
-          <p:nvPr/>
-        </p:nvSpPr>
-        <p:spPr>
-          <a:xfrm>
-            <a:off x="1353312" y="4681728"/>
-            <a:ext cx="4267048" cy="585216"/>
-          </a:xfrm>
-          <a:prstGeom prst="rect">
-            <a:avLst/>
-          </a:prstGeom>
-          <a:noFill/>
-          <a:ln/>
-        </p:spPr>
-        <p:txBody>
-          <a:bodyPr wrap="square" lIns="0" tIns="0" rIns="0" bIns="0" rtlCol="0" anchor="ctr"/>
-          <a:lstStyle/>
-          <a:p>
-            <a:pPr indent="0" marL="0">
-              <a:buNone/>
-            </a:pPr>
-            <a:r>
-              <a:rPr lang="en-US" sz="1200" dirty="0">
-                <a:solidFill>
-                  <a:srgbClr val="111111"/>
-                </a:solidFill>
-                <a:latin typeface="Pretendard" pitchFamily="34" charset="0"/>
-                <a:ea typeface="Pretendard" pitchFamily="34" charset="-122"/>
-                <a:cs typeface="Pretendard" pitchFamily="34" charset="-120"/>
-              </a:rPr>
-              <a:t>연구 방법 절에 자료 · 절차 · 판단 기준이 적혀 있다</a:t>
-            </a:r>
-            <a:endParaRPr lang="en-US" sz="1200" dirty="0"/>
-          </a:p>
-        </p:txBody>
-      </p:sp>
-      <p:sp>
-        <p:nvSpPr>
-          <p:cNvPr id="29" name="Shape 27"/>
-          <p:cNvSpPr/>
-          <p:nvPr/>
-        </p:nvSpPr>
-        <p:spPr>
-          <a:xfrm>
-            <a:off x="6297016" y="1755648"/>
-            <a:ext cx="5254600" cy="585216"/>
-          </a:xfrm>
-          <a:prstGeom prst="rect">
-            <a:avLst/>
-          </a:prstGeom>
-          <a:solidFill>
-            <a:srgbClr val="F2F2F2"/>
-          </a:solidFill>
-          <a:ln w="12700">
-            <a:solidFill>
-              <a:srgbClr val="F2F2F2"/>
-            </a:solidFill>
-            <a:prstDash val="solid"/>
-          </a:ln>
-        </p:spPr>
-      </p:sp>
-      <p:sp>
-        <p:nvSpPr>
-          <p:cNvPr id="30" name="Shape 28"/>
-          <p:cNvSpPr/>
-          <p:nvPr/>
-        </p:nvSpPr>
-        <p:spPr>
-          <a:xfrm>
-            <a:off x="6571336" y="1892808"/>
-            <a:ext cx="310896" cy="310896"/>
-          </a:xfrm>
-          <a:prstGeom prst="ellipse">
-            <a:avLst/>
-          </a:prstGeom>
-          <a:solidFill>
-            <a:srgbClr val="F2F2F2"/>
-          </a:solidFill>
-          <a:ln w="12700">
-            <a:solidFill>
-              <a:srgbClr val="111111"/>
-            </a:solidFill>
-            <a:prstDash val="solid"/>
-          </a:ln>
-        </p:spPr>
-      </p:sp>
-      <p:sp>
-        <p:nvSpPr>
-          <p:cNvPr id="31" name="Text 29"/>
-          <p:cNvSpPr/>
-          <p:nvPr/>
-        </p:nvSpPr>
-        <p:spPr>
-          <a:xfrm>
-            <a:off x="6571336" y="1892808"/>
-            <a:ext cx="310896" cy="310896"/>
-          </a:xfrm>
-          <a:prstGeom prst="rect">
-            <a:avLst/>
-          </a:prstGeom>
-          <a:noFill/>
-          <a:ln/>
-        </p:spPr>
-        <p:txBody>
-          <a:bodyPr wrap="square" lIns="0" tIns="0" rIns="0" bIns="0" rtlCol="0" anchor="ctr"/>
-          <a:lstStyle/>
-          <a:p>
-            <a:pPr algn="ctr" indent="0" marL="0">
-              <a:buNone/>
-            </a:pPr>
-            <a:r>
-              <a:rPr lang="en-US" sz="900" b="1" dirty="0">
-                <a:solidFill>
-                  <a:srgbClr val="111111"/>
-                </a:solidFill>
-                <a:latin typeface="Pretendard" pitchFamily="34" charset="0"/>
-                <a:ea typeface="Pretendard" pitchFamily="34" charset="-122"/>
-                <a:cs typeface="Pretendard" pitchFamily="34" charset="-120"/>
-              </a:rPr>
-              <a:t>06</a:t>
-            </a:r>
-            <a:endParaRPr lang="en-US" sz="900" dirty="0"/>
-          </a:p>
-        </p:txBody>
-      </p:sp>
-      <p:sp>
-        <p:nvSpPr>
-          <p:cNvPr id="32" name="Text 30"/>
-          <p:cNvSpPr/>
-          <p:nvPr/>
-        </p:nvSpPr>
-        <p:spPr>
-          <a:xfrm>
-            <a:off x="7010248" y="1755648"/>
-            <a:ext cx="4267048" cy="585216"/>
-          </a:xfrm>
-          <a:prstGeom prst="rect">
-            <a:avLst/>
-          </a:prstGeom>
-          <a:noFill/>
-          <a:ln/>
-        </p:spPr>
-        <p:txBody>
-          <a:bodyPr wrap="square" lIns="0" tIns="0" rIns="0" bIns="0" rtlCol="0" anchor="ctr"/>
-          <a:lstStyle/>
-          <a:p>
-            <a:pPr indent="0" marL="0">
-              <a:buNone/>
-            </a:pPr>
-            <a:r>
-              <a:rPr lang="en-US" sz="1200" dirty="0">
-                <a:solidFill>
-                  <a:srgbClr val="111111"/>
-                </a:solidFill>
-                <a:latin typeface="Pretendard" pitchFamily="34" charset="0"/>
-                <a:ea typeface="Pretendard" pitchFamily="34" charset="-122"/>
-                <a:cs typeface="Pretendard" pitchFamily="34" charset="-120"/>
-              </a:rPr>
-              <a:t>오늘 쓴 입장 한 문단이 연구 방법 절 앞에 들어 있다</a:t>
-            </a:r>
-            <a:endParaRPr lang="en-US" sz="1200" dirty="0"/>
-          </a:p>
-        </p:txBody>
-      </p:sp>
-      <p:sp>
-        <p:nvSpPr>
-          <p:cNvPr id="33" name="Shape 31"/>
-          <p:cNvSpPr/>
-          <p:nvPr/>
-        </p:nvSpPr>
-        <p:spPr>
-          <a:xfrm>
-            <a:off x="6297016" y="2487168"/>
-            <a:ext cx="5254600" cy="585216"/>
-          </a:xfrm>
-          <a:prstGeom prst="rect">
-            <a:avLst/>
-          </a:prstGeom>
-          <a:solidFill>
-            <a:srgbClr val="F2F2F2"/>
-          </a:solidFill>
-          <a:ln w="12700">
-            <a:solidFill>
-              <a:srgbClr val="F2F2F2"/>
-            </a:solidFill>
-            <a:prstDash val="solid"/>
-          </a:ln>
-        </p:spPr>
-      </p:sp>
-      <p:sp>
-        <p:nvSpPr>
-          <p:cNvPr id="34" name="Shape 32"/>
-          <p:cNvSpPr/>
-          <p:nvPr/>
-        </p:nvSpPr>
-        <p:spPr>
-          <a:xfrm>
-            <a:off x="6571336" y="2624328"/>
-            <a:ext cx="310896" cy="310896"/>
-          </a:xfrm>
-          <a:prstGeom prst="ellipse">
-            <a:avLst/>
-          </a:prstGeom>
-          <a:solidFill>
-            <a:srgbClr val="F2F2F2"/>
-          </a:solidFill>
-          <a:ln w="12700">
-            <a:solidFill>
-              <a:srgbClr val="111111"/>
-            </a:solidFill>
-            <a:prstDash val="solid"/>
-          </a:ln>
-        </p:spPr>
-      </p:sp>
-      <p:sp>
-        <p:nvSpPr>
-          <p:cNvPr id="35" name="Text 33"/>
-          <p:cNvSpPr/>
-          <p:nvPr/>
-        </p:nvSpPr>
-        <p:spPr>
-          <a:xfrm>
-            <a:off x="6571336" y="2624328"/>
-            <a:ext cx="310896" cy="310896"/>
-          </a:xfrm>
-          <a:prstGeom prst="rect">
-            <a:avLst/>
-          </a:prstGeom>
-          <a:noFill/>
-          <a:ln/>
-        </p:spPr>
-        <p:txBody>
-          <a:bodyPr wrap="square" lIns="0" tIns="0" rIns="0" bIns="0" rtlCol="0" anchor="ctr"/>
-          <a:lstStyle/>
-          <a:p>
-            <a:pPr algn="ctr" indent="0" marL="0">
-              <a:buNone/>
-            </a:pPr>
-            <a:r>
-              <a:rPr lang="en-US" sz="900" b="1" dirty="0">
-                <a:solidFill>
-                  <a:srgbClr val="111111"/>
-                </a:solidFill>
-                <a:latin typeface="Pretendard" pitchFamily="34" charset="0"/>
-                <a:ea typeface="Pretendard" pitchFamily="34" charset="-122"/>
-                <a:cs typeface="Pretendard" pitchFamily="34" charset="-120"/>
-              </a:rPr>
-              <a:t>07</a:t>
-            </a:r>
-            <a:endParaRPr lang="en-US" sz="900" dirty="0"/>
-          </a:p>
-        </p:txBody>
-      </p:sp>
-      <p:sp>
-        <p:nvSpPr>
-          <p:cNvPr id="36" name="Text 34"/>
-          <p:cNvSpPr/>
-          <p:nvPr/>
-        </p:nvSpPr>
-        <p:spPr>
-          <a:xfrm>
-            <a:off x="7010248" y="2487168"/>
-            <a:ext cx="4267048" cy="585216"/>
-          </a:xfrm>
-          <a:prstGeom prst="rect">
-            <a:avLst/>
-          </a:prstGeom>
-          <a:noFill/>
-          <a:ln/>
-        </p:spPr>
-        <p:txBody>
-          <a:bodyPr wrap="square" lIns="0" tIns="0" rIns="0" bIns="0" rtlCol="0" anchor="ctr"/>
-          <a:lstStyle/>
-          <a:p>
-            <a:pPr indent="0" marL="0">
-              <a:buNone/>
-            </a:pPr>
-            <a:r>
-              <a:rPr lang="en-US" sz="1200" dirty="0">
-                <a:solidFill>
-                  <a:srgbClr val="111111"/>
-                </a:solidFill>
-                <a:latin typeface="Pretendard" pitchFamily="34" charset="0"/>
-                <a:ea typeface="Pretendard" pitchFamily="34" charset="-122"/>
-                <a:cs typeface="Pretendard" pitchFamily="34" charset="-120"/>
-              </a:rPr>
-              <a:t>생성 도구를 썼다면 판단 과정을 기술하는 방식이 적혀 있다</a:t>
-            </a:r>
-            <a:endParaRPr lang="en-US" sz="1200" dirty="0"/>
-          </a:p>
-        </p:txBody>
-      </p:sp>
-      <p:sp>
-        <p:nvSpPr>
-          <p:cNvPr id="37" name="Shape 35"/>
-          <p:cNvSpPr/>
-          <p:nvPr/>
-        </p:nvSpPr>
-        <p:spPr>
-          <a:xfrm>
-            <a:off x="6297016" y="3218688"/>
-            <a:ext cx="5254600" cy="585216"/>
-          </a:xfrm>
-          <a:prstGeom prst="rect">
-            <a:avLst/>
-          </a:prstGeom>
-          <a:solidFill>
-            <a:srgbClr val="F2F2F2"/>
-          </a:solidFill>
-          <a:ln w="12700">
-            <a:solidFill>
-              <a:srgbClr val="F2F2F2"/>
-            </a:solidFill>
-            <a:prstDash val="solid"/>
-          </a:ln>
-        </p:spPr>
-      </p:sp>
-      <p:sp>
-        <p:nvSpPr>
-          <p:cNvPr id="38" name="Shape 36"/>
-          <p:cNvSpPr/>
-          <p:nvPr/>
-        </p:nvSpPr>
-        <p:spPr>
-          <a:xfrm>
-            <a:off x="6571336" y="3355848"/>
-            <a:ext cx="310896" cy="310896"/>
-          </a:xfrm>
-          <a:prstGeom prst="ellipse">
-            <a:avLst/>
-          </a:prstGeom>
-          <a:solidFill>
-            <a:srgbClr val="F2F2F2"/>
-          </a:solidFill>
-          <a:ln w="12700">
-            <a:solidFill>
-              <a:srgbClr val="111111"/>
-            </a:solidFill>
-            <a:prstDash val="solid"/>
-          </a:ln>
-        </p:spPr>
-      </p:sp>
-      <p:sp>
-        <p:nvSpPr>
-          <p:cNvPr id="39" name="Text 37"/>
-          <p:cNvSpPr/>
-          <p:nvPr/>
-        </p:nvSpPr>
-        <p:spPr>
-          <a:xfrm>
-            <a:off x="6571336" y="3355848"/>
-            <a:ext cx="310896" cy="310896"/>
-          </a:xfrm>
-          <a:prstGeom prst="rect">
-            <a:avLst/>
-          </a:prstGeom>
-          <a:noFill/>
-          <a:ln/>
-        </p:spPr>
-        <p:txBody>
-          <a:bodyPr wrap="square" lIns="0" tIns="0" rIns="0" bIns="0" rtlCol="0" anchor="ctr"/>
-          <a:lstStyle/>
-          <a:p>
-            <a:pPr algn="ctr" indent="0" marL="0">
-              <a:buNone/>
-            </a:pPr>
-            <a:r>
-              <a:rPr lang="en-US" sz="900" b="1" dirty="0">
-                <a:solidFill>
-                  <a:srgbClr val="111111"/>
-                </a:solidFill>
-                <a:latin typeface="Pretendard" pitchFamily="34" charset="0"/>
-                <a:ea typeface="Pretendard" pitchFamily="34" charset="-122"/>
-                <a:cs typeface="Pretendard" pitchFamily="34" charset="-120"/>
-              </a:rPr>
-              <a:t>08</a:t>
-            </a:r>
-            <a:endParaRPr lang="en-US" sz="900" dirty="0"/>
-          </a:p>
-        </p:txBody>
-      </p:sp>
-      <p:sp>
-        <p:nvSpPr>
-          <p:cNvPr id="40" name="Text 38"/>
-          <p:cNvSpPr/>
-          <p:nvPr/>
-        </p:nvSpPr>
-        <p:spPr>
-          <a:xfrm>
-            <a:off x="7010248" y="3218688"/>
-            <a:ext cx="4267048" cy="585216"/>
-          </a:xfrm>
-          <a:prstGeom prst="rect">
-            <a:avLst/>
-          </a:prstGeom>
-          <a:noFill/>
-          <a:ln/>
-        </p:spPr>
-        <p:txBody>
-          <a:bodyPr wrap="square" lIns="0" tIns="0" rIns="0" bIns="0" rtlCol="0" anchor="ctr"/>
-          <a:lstStyle/>
-          <a:p>
-            <a:pPr indent="0" marL="0">
-              <a:buNone/>
-            </a:pPr>
-            <a:r>
-              <a:rPr lang="en-US" sz="1200" dirty="0">
-                <a:solidFill>
-                  <a:srgbClr val="111111"/>
-                </a:solidFill>
-                <a:latin typeface="Pretendard" pitchFamily="34" charset="0"/>
-                <a:ea typeface="Pretendard" pitchFamily="34" charset="-122"/>
-                <a:cs typeface="Pretendard" pitchFamily="34" charset="-120"/>
-              </a:rPr>
-              <a:t>동료 한 사람당 질문 두 개를 준비했다</a:t>
-            </a:r>
-            <a:endParaRPr lang="en-US" sz="1200" dirty="0"/>
-          </a:p>
-        </p:txBody>
-      </p:sp>
-      <p:sp>
-        <p:nvSpPr>
-          <p:cNvPr id="41" name="Shape 39"/>
-          <p:cNvSpPr/>
-          <p:nvPr/>
-        </p:nvSpPr>
-        <p:spPr>
-          <a:xfrm>
-            <a:off x="6297016" y="3950208"/>
-            <a:ext cx="5254600" cy="585216"/>
-          </a:xfrm>
-          <a:prstGeom prst="rect">
-            <a:avLst/>
-          </a:prstGeom>
-          <a:solidFill>
-            <a:srgbClr val="F2F2F2"/>
-          </a:solidFill>
-          <a:ln w="12700">
-            <a:solidFill>
-              <a:srgbClr val="F2F2F2"/>
-            </a:solidFill>
-            <a:prstDash val="solid"/>
-          </a:ln>
-        </p:spPr>
-      </p:sp>
-      <p:sp>
-        <p:nvSpPr>
-          <p:cNvPr id="42" name="Shape 40"/>
-          <p:cNvSpPr/>
-          <p:nvPr/>
-        </p:nvSpPr>
-        <p:spPr>
-          <a:xfrm>
-            <a:off x="6571336" y="4087368"/>
-            <a:ext cx="310896" cy="310896"/>
-          </a:xfrm>
-          <a:prstGeom prst="ellipse">
-            <a:avLst/>
-          </a:prstGeom>
-          <a:solidFill>
-            <a:srgbClr val="F2F2F2"/>
-          </a:solidFill>
-          <a:ln w="12700">
-            <a:solidFill>
-              <a:srgbClr val="111111"/>
-            </a:solidFill>
-            <a:prstDash val="solid"/>
-          </a:ln>
-        </p:spPr>
-      </p:sp>
-      <p:sp>
-        <p:nvSpPr>
-          <p:cNvPr id="43" name="Text 41"/>
-          <p:cNvSpPr/>
-          <p:nvPr/>
-        </p:nvSpPr>
-        <p:spPr>
-          <a:xfrm>
-            <a:off x="6571336" y="4087368"/>
-            <a:ext cx="310896" cy="310896"/>
-          </a:xfrm>
-          <a:prstGeom prst="rect">
-            <a:avLst/>
-          </a:prstGeom>
-          <a:noFill/>
-          <a:ln/>
-        </p:spPr>
-        <p:txBody>
-          <a:bodyPr wrap="square" lIns="0" tIns="0" rIns="0" bIns="0" rtlCol="0" anchor="ctr"/>
-          <a:lstStyle/>
-          <a:p>
-            <a:pPr algn="ctr" indent="0" marL="0">
-              <a:buNone/>
-            </a:pPr>
-            <a:r>
-              <a:rPr lang="en-US" sz="900" b="1" dirty="0">
-                <a:solidFill>
-                  <a:srgbClr val="111111"/>
-                </a:solidFill>
-                <a:latin typeface="Pretendard" pitchFamily="34" charset="0"/>
-                <a:ea typeface="Pretendard" pitchFamily="34" charset="-122"/>
-                <a:cs typeface="Pretendard" pitchFamily="34" charset="-120"/>
-              </a:rPr>
-              <a:t>09</a:t>
-            </a:r>
-            <a:endParaRPr lang="en-US" sz="900" dirty="0"/>
-          </a:p>
-        </p:txBody>
-      </p:sp>
-      <p:sp>
-        <p:nvSpPr>
-          <p:cNvPr id="44" name="Text 42"/>
-          <p:cNvSpPr/>
-          <p:nvPr/>
-        </p:nvSpPr>
-        <p:spPr>
-          <a:xfrm>
-            <a:off x="7010248" y="3950208"/>
-            <a:ext cx="4267048" cy="585216"/>
-          </a:xfrm>
-          <a:prstGeom prst="rect">
-            <a:avLst/>
-          </a:prstGeom>
-          <a:noFill/>
-          <a:ln/>
-        </p:spPr>
-        <p:txBody>
-          <a:bodyPr wrap="square" lIns="0" tIns="0" rIns="0" bIns="0" rtlCol="0" anchor="ctr"/>
-          <a:lstStyle/>
-          <a:p>
-            <a:pPr indent="0" marL="0">
-              <a:buNone/>
-            </a:pPr>
-            <a:r>
-              <a:rPr lang="en-US" sz="1200" dirty="0">
-                <a:solidFill>
-                  <a:srgbClr val="111111"/>
-                </a:solidFill>
-                <a:latin typeface="Pretendard" pitchFamily="34" charset="0"/>
-                <a:ea typeface="Pretendard" pitchFamily="34" charset="-122"/>
-                <a:cs typeface="Pretendard" pitchFamily="34" charset="-120"/>
-              </a:rPr>
-              <a:t>질문 · 방법 · 기여가 서로 맞물리는지 소리 내어 확인했다</a:t>
-            </a:r>
-            <a:endParaRPr lang="en-US" sz="1200" dirty="0"/>
-          </a:p>
-        </p:txBody>
-      </p:sp>
-      <p:sp>
-        <p:nvSpPr>
-          <p:cNvPr id="45" name="Shape 43"/>
-          <p:cNvSpPr/>
-          <p:nvPr/>
-        </p:nvSpPr>
-        <p:spPr>
-          <a:xfrm>
-            <a:off x="6297016" y="4681728"/>
-            <a:ext cx="5254600" cy="585216"/>
-          </a:xfrm>
-          <a:prstGeom prst="rect">
-            <a:avLst/>
-          </a:prstGeom>
-          <a:solidFill>
-            <a:srgbClr val="F2F2F2"/>
-          </a:solidFill>
-          <a:ln w="12700">
-            <a:solidFill>
-              <a:srgbClr val="F2F2F2"/>
-            </a:solidFill>
-            <a:prstDash val="solid"/>
-          </a:ln>
-        </p:spPr>
-      </p:sp>
-      <p:sp>
-        <p:nvSpPr>
-          <p:cNvPr id="46" name="Shape 44"/>
-          <p:cNvSpPr/>
-          <p:nvPr/>
-        </p:nvSpPr>
-        <p:spPr>
-          <a:xfrm>
-            <a:off x="6571336" y="4818888"/>
-            <a:ext cx="310896" cy="310896"/>
-          </a:xfrm>
-          <a:prstGeom prst="ellipse">
-            <a:avLst/>
-          </a:prstGeom>
-          <a:solidFill>
-            <a:srgbClr val="F2F2F2"/>
-          </a:solidFill>
-          <a:ln w="12700">
-            <a:solidFill>
-              <a:srgbClr val="111111"/>
-            </a:solidFill>
-            <a:prstDash val="solid"/>
-          </a:ln>
-        </p:spPr>
-      </p:sp>
-      <p:sp>
-        <p:nvSpPr>
-          <p:cNvPr id="47" name="Text 45"/>
-          <p:cNvSpPr/>
-          <p:nvPr/>
-        </p:nvSpPr>
-        <p:spPr>
-          <a:xfrm>
-            <a:off x="6571336" y="4818888"/>
-            <a:ext cx="310896" cy="310896"/>
-          </a:xfrm>
-          <a:prstGeom prst="rect">
-            <a:avLst/>
-          </a:prstGeom>
-          <a:noFill/>
-          <a:ln/>
-        </p:spPr>
-        <p:txBody>
-          <a:bodyPr wrap="square" lIns="0" tIns="0" rIns="0" bIns="0" rtlCol="0" anchor="ctr"/>
-          <a:lstStyle/>
-          <a:p>
-            <a:pPr algn="ctr" indent="0" marL="0">
-              <a:buNone/>
-            </a:pPr>
-            <a:r>
-              <a:rPr lang="en-US" sz="900" b="1" dirty="0">
-                <a:solidFill>
-                  <a:srgbClr val="111111"/>
-                </a:solidFill>
-                <a:latin typeface="Pretendard" pitchFamily="34" charset="0"/>
-                <a:ea typeface="Pretendard" pitchFamily="34" charset="-122"/>
-                <a:cs typeface="Pretendard" pitchFamily="34" charset="-120"/>
-              </a:rPr>
-              <a:t>10</a:t>
-            </a:r>
-            <a:endParaRPr lang="en-US" sz="900" dirty="0"/>
-          </a:p>
-        </p:txBody>
-      </p:sp>
-      <p:sp>
-        <p:nvSpPr>
-          <p:cNvPr id="48" name="Text 46"/>
-          <p:cNvSpPr/>
-          <p:nvPr/>
-        </p:nvSpPr>
-        <p:spPr>
-          <a:xfrm>
-            <a:off x="7010248" y="4681728"/>
-            <a:ext cx="4267048" cy="585216"/>
-          </a:xfrm>
-          <a:prstGeom prst="rect">
-            <a:avLst/>
-          </a:prstGeom>
-          <a:noFill/>
-          <a:ln/>
-        </p:spPr>
-        <p:txBody>
-          <a:bodyPr wrap="square" lIns="0" tIns="0" rIns="0" bIns="0" rtlCol="0" anchor="ctr"/>
-          <a:lstStyle/>
-          <a:p>
-            <a:pPr indent="0" marL="0">
-              <a:buNone/>
-            </a:pPr>
-            <a:r>
-              <a:rPr lang="en-US" sz="1200" dirty="0">
-                <a:solidFill>
-                  <a:srgbClr val="111111"/>
-                </a:solidFill>
-                <a:latin typeface="Pretendard" pitchFamily="34" charset="0"/>
-                <a:ea typeface="Pretendard" pitchFamily="34" charset="-122"/>
-                <a:cs typeface="Pretendard" pitchFamily="34" charset="-120"/>
-              </a:rPr>
-              <a:t>드래프트를 세션 48시간 전까지 올렸다</a:t>
-            </a:r>
-            <a:endParaRPr lang="en-US" sz="1200" dirty="0"/>
-          </a:p>
-        </p:txBody>
-      </p:sp>
-      <p:sp>
-        <p:nvSpPr>
-          <p:cNvPr id="49" name="Shape 47"/>
-          <p:cNvSpPr/>
-          <p:nvPr/>
-        </p:nvSpPr>
-        <p:spPr>
-          <a:xfrm>
-            <a:off x="640080" y="5468112"/>
-            <a:ext cx="10911535" cy="7315"/>
+                <a:latin typeface="Pretendard SemiBold" pitchFamily="34" charset="0"/>
+                <a:ea typeface="Pretendard SemiBold" pitchFamily="34" charset="-122"/>
+                <a:cs typeface="Pretendard SemiBold" pitchFamily="34" charset="-120"/>
+              </a:rPr>
+              <a:t>절마다 하는 일</a:t>
+            </a:r>
+            <a:endParaRPr lang="en-US" sz="1700" dirty="0"/>
+          </a:p>
+        </p:txBody>
+      </p:sp>
+      <p:sp>
+        <p:nvSpPr>
+          <p:cNvPr id="11" name="Shape 9"/>
+          <p:cNvSpPr/>
+          <p:nvPr/>
+        </p:nvSpPr>
+        <p:spPr>
+          <a:xfrm>
+            <a:off x="1060704" y="2414016"/>
+            <a:ext cx="4413352" cy="7315"/>
           </a:xfrm>
           <a:prstGeom prst="rect">
             <a:avLst/>
@@ -7420,13 +6770,386 @@
       </p:sp>
       <p:sp>
         <p:nvSpPr>
-          <p:cNvPr id="50" name="Text 48"/>
-          <p:cNvSpPr/>
-          <p:nvPr/>
-        </p:nvSpPr>
-        <p:spPr>
-          <a:xfrm>
-            <a:off x="640080" y="5577840"/>
+          <p:cNvPr id="12" name="Text 10"/>
+          <p:cNvSpPr/>
+          <p:nvPr/>
+        </p:nvSpPr>
+        <p:spPr>
+          <a:xfrm>
+            <a:off x="1060704" y="2523744"/>
+            <a:ext cx="4413352" cy="2706624"/>
+          </a:xfrm>
+          <a:prstGeom prst="rect">
+            <a:avLst/>
+          </a:prstGeom>
+          <a:noFill/>
+          <a:ln/>
+        </p:spPr>
+        <p:txBody>
+          <a:bodyPr wrap="square" lIns="0" tIns="0" rIns="0" bIns="0" rtlCol="0" anchor="t"/>
+          <a:lstStyle/>
+          <a:p>
+            <a:pPr marL="177800" indent="-177800">
+              <a:lnSpc>
+                <a:spcPct val="120000"/>
+              </a:lnSpc>
+              <a:spcAft>
+                <a:spcPts val="1100"/>
+              </a:spcAft>
+              <a:buSzPct val="100000"/>
+              <a:buChar char="•"/>
+            </a:pPr>
+            <a:r>
+              <a:rPr lang="en-US" sz="1200" dirty="0">
+                <a:solidFill>
+                  <a:srgbClr val="1F1F1F"/>
+                </a:solidFill>
+                <a:latin typeface="Pretendard" pitchFamily="34" charset="0"/>
+                <a:ea typeface="Pretendard" pitchFamily="34" charset="-122"/>
+                <a:cs typeface="Pretendard" pitchFamily="34" charset="-120"/>
+              </a:rPr>
+              <a:t>서론 — 무엇이 왜 문제인지만 세웁니다. 대개 전체의 열에 하나</a:t>
+            </a:r>
+            <a:endParaRPr lang="en-US" sz="1200" dirty="0"/>
+          </a:p>
+          <a:p>
+            <a:pPr marL="177800" indent="-177800">
+              <a:lnSpc>
+                <a:spcPct val="120000"/>
+              </a:lnSpc>
+              <a:spcAft>
+                <a:spcPts val="1100"/>
+              </a:spcAft>
+              <a:buSzPct val="100000"/>
+              <a:buChar char="•"/>
+            </a:pPr>
+            <a:r>
+              <a:rPr lang="en-US" sz="1200" dirty="0">
+                <a:solidFill>
+                  <a:srgbClr val="1F1F1F"/>
+                </a:solidFill>
+                <a:latin typeface="Pretendard" pitchFamily="34" charset="0"/>
+                <a:ea typeface="Pretendard" pitchFamily="34" charset="-122"/>
+                <a:cs typeface="Pretendard" pitchFamily="34" charset="-120"/>
+              </a:rPr>
+              <a:t>이론적 배경 — 내가 쓰는 말의 주인을 밝힙니다</a:t>
+            </a:r>
+            <a:endParaRPr lang="en-US" sz="1200" dirty="0"/>
+          </a:p>
+          <a:p>
+            <a:pPr marL="177800" indent="-177800">
+              <a:lnSpc>
+                <a:spcPct val="120000"/>
+              </a:lnSpc>
+              <a:spcAft>
+                <a:spcPts val="1100"/>
+              </a:spcAft>
+              <a:buSzPct val="100000"/>
+              <a:buChar char="•"/>
+            </a:pPr>
+            <a:r>
+              <a:rPr lang="en-US" sz="1200" dirty="0">
+                <a:solidFill>
+                  <a:srgbClr val="1F1F1F"/>
+                </a:solidFill>
+                <a:latin typeface="Pretendard" pitchFamily="34" charset="0"/>
+                <a:ea typeface="Pretendard" pitchFamily="34" charset="-122"/>
+                <a:cs typeface="Pretendard" pitchFamily="34" charset="-120"/>
+              </a:rPr>
+              <a:t>연구 방법 — 남이 읽고 그대로 해 볼 수 있을 만큼 적습니다</a:t>
+            </a:r>
+            <a:endParaRPr lang="en-US" sz="1200" dirty="0"/>
+          </a:p>
+          <a:p>
+            <a:pPr marL="177800" indent="-177800">
+              <a:lnSpc>
+                <a:spcPct val="120000"/>
+              </a:lnSpc>
+              <a:spcAft>
+                <a:spcPts val="1100"/>
+              </a:spcAft>
+              <a:buSzPct val="100000"/>
+              <a:buChar char="•"/>
+            </a:pPr>
+            <a:r>
+              <a:rPr lang="en-US" sz="1200" dirty="0">
+                <a:solidFill>
+                  <a:srgbClr val="1F1F1F"/>
+                </a:solidFill>
+                <a:latin typeface="Pretendard" pitchFamily="34" charset="0"/>
+                <a:ea typeface="Pretendard" pitchFamily="34" charset="-122"/>
+                <a:cs typeface="Pretendard" pitchFamily="34" charset="-120"/>
+              </a:rPr>
+              <a:t>결과 — 나온 것만. 해석은 아직입니다</a:t>
+            </a:r>
+            <a:endParaRPr lang="en-US" sz="1200" dirty="0"/>
+          </a:p>
+          <a:p>
+            <a:pPr marL="177800" indent="-177800">
+              <a:lnSpc>
+                <a:spcPct val="120000"/>
+              </a:lnSpc>
+              <a:spcAft>
+                <a:spcPts val="1100"/>
+              </a:spcAft>
+              <a:buSzPct val="100000"/>
+              <a:buChar char="•"/>
+            </a:pPr>
+            <a:r>
+              <a:rPr lang="en-US" sz="1200" dirty="0">
+                <a:solidFill>
+                  <a:srgbClr val="1F1F1F"/>
+                </a:solidFill>
+                <a:latin typeface="Pretendard" pitchFamily="34" charset="0"/>
+                <a:ea typeface="Pretendard" pitchFamily="34" charset="-122"/>
+                <a:cs typeface="Pretendard" pitchFamily="34" charset="-120"/>
+              </a:rPr>
+              <a:t>논의 — 여기서 해석하고, 못 한 것까지 적습니다</a:t>
+            </a:r>
+            <a:endParaRPr lang="en-US" sz="1200" dirty="0"/>
+          </a:p>
+          <a:p>
+            <a:pPr marL="177800" indent="-177800">
+              <a:lnSpc>
+                <a:spcPct val="120000"/>
+              </a:lnSpc>
+              <a:spcAft>
+                <a:spcPts val="1100"/>
+              </a:spcAft>
+              <a:buSzPct val="100000"/>
+              <a:buChar char="•"/>
+            </a:pPr>
+            <a:r>
+              <a:rPr lang="en-US" sz="1200" dirty="0">
+                <a:solidFill>
+                  <a:srgbClr val="1F1F1F"/>
+                </a:solidFill>
+                <a:latin typeface="Pretendard" pitchFamily="34" charset="0"/>
+                <a:ea typeface="Pretendard" pitchFamily="34" charset="-122"/>
+                <a:cs typeface="Pretendard" pitchFamily="34" charset="-120"/>
+              </a:rPr>
+              <a:t>결론 — 질문에 답하고 멈춥니다. 새 개념을 꺼내지 않습니다</a:t>
+            </a:r>
+            <a:endParaRPr lang="en-US" sz="1200" dirty="0"/>
+          </a:p>
+        </p:txBody>
+      </p:sp>
+      <p:sp>
+        <p:nvSpPr>
+          <p:cNvPr id="13" name="Shape 11"/>
+          <p:cNvSpPr/>
+          <p:nvPr/>
+        </p:nvSpPr>
+        <p:spPr>
+          <a:xfrm>
+            <a:off x="6297016" y="1664208"/>
+            <a:ext cx="5254600" cy="3749040"/>
+          </a:xfrm>
+          <a:prstGeom prst="rect">
+            <a:avLst/>
+          </a:prstGeom>
+          <a:solidFill>
+            <a:srgbClr val="F2F2F2"/>
+          </a:solidFill>
+          <a:ln w="12700">
+            <a:solidFill>
+              <a:srgbClr val="DCDCDC"/>
+            </a:solidFill>
+            <a:prstDash val="solid"/>
+          </a:ln>
+        </p:spPr>
+      </p:sp>
+      <p:sp>
+        <p:nvSpPr>
+          <p:cNvPr id="14" name="Text 12"/>
+          <p:cNvSpPr/>
+          <p:nvPr/>
+        </p:nvSpPr>
+        <p:spPr>
+          <a:xfrm>
+            <a:off x="6717640" y="1993392"/>
+            <a:ext cx="4413352" cy="365760"/>
+          </a:xfrm>
+          <a:prstGeom prst="rect">
+            <a:avLst/>
+          </a:prstGeom>
+          <a:noFill/>
+          <a:ln/>
+        </p:spPr>
+        <p:txBody>
+          <a:bodyPr wrap="square" lIns="0" tIns="0" rIns="0" bIns="0" rtlCol="0" anchor="ctr"/>
+          <a:lstStyle/>
+          <a:p>
+            <a:pPr indent="0" marL="0">
+              <a:buNone/>
+            </a:pPr>
+            <a:r>
+              <a:rPr lang="en-US" sz="1700" dirty="0">
+                <a:solidFill>
+                  <a:srgbClr val="111111"/>
+                </a:solidFill>
+                <a:latin typeface="Pretendard SemiBold" pitchFamily="34" charset="0"/>
+                <a:ea typeface="Pretendard SemiBold" pitchFamily="34" charset="-122"/>
+                <a:cs typeface="Pretendard SemiBold" pitchFamily="34" charset="-120"/>
+              </a:rPr>
+              <a:t>심사에서 나오는 질문</a:t>
+            </a:r>
+            <a:endParaRPr lang="en-US" sz="1700" dirty="0"/>
+          </a:p>
+        </p:txBody>
+      </p:sp>
+      <p:sp>
+        <p:nvSpPr>
+          <p:cNvPr id="15" name="Shape 13"/>
+          <p:cNvSpPr/>
+          <p:nvPr/>
+        </p:nvSpPr>
+        <p:spPr>
+          <a:xfrm>
+            <a:off x="6717640" y="2414016"/>
+            <a:ext cx="4413352" cy="7315"/>
+          </a:xfrm>
+          <a:prstGeom prst="rect">
+            <a:avLst/>
+          </a:prstGeom>
+          <a:solidFill>
+            <a:srgbClr val="111111"/>
+          </a:solidFill>
+          <a:ln w="12700">
+            <a:solidFill>
+              <a:srgbClr val="111111"/>
+            </a:solidFill>
+            <a:prstDash val="solid"/>
+          </a:ln>
+        </p:spPr>
+      </p:sp>
+      <p:sp>
+        <p:nvSpPr>
+          <p:cNvPr id="16" name="Text 14"/>
+          <p:cNvSpPr/>
+          <p:nvPr/>
+        </p:nvSpPr>
+        <p:spPr>
+          <a:xfrm>
+            <a:off x="6717640" y="2523744"/>
+            <a:ext cx="4413352" cy="2706624"/>
+          </a:xfrm>
+          <a:prstGeom prst="rect">
+            <a:avLst/>
+          </a:prstGeom>
+          <a:noFill/>
+          <a:ln/>
+        </p:spPr>
+        <p:txBody>
+          <a:bodyPr wrap="square" lIns="0" tIns="0" rIns="0" bIns="0" rtlCol="0" anchor="t"/>
+          <a:lstStyle/>
+          <a:p>
+            <a:pPr marL="177800" indent="-177800">
+              <a:lnSpc>
+                <a:spcPct val="120000"/>
+              </a:lnSpc>
+              <a:spcAft>
+                <a:spcPts val="1100"/>
+              </a:spcAft>
+              <a:buSzPct val="100000"/>
+              <a:buChar char="•"/>
+            </a:pPr>
+            <a:r>
+              <a:rPr lang="en-US" sz="1200" dirty="0">
+                <a:solidFill>
+                  <a:srgbClr val="1F1F1F"/>
+                </a:solidFill>
+                <a:latin typeface="Pretendard" pitchFamily="34" charset="0"/>
+                <a:ea typeface="Pretendard" pitchFamily="34" charset="-122"/>
+                <a:cs typeface="Pretendard" pitchFamily="34" charset="-120"/>
+              </a:rPr>
+              <a:t>왜 이 순서입니까</a:t>
+            </a:r>
+            <a:endParaRPr lang="en-US" sz="1200" dirty="0"/>
+          </a:p>
+          <a:p>
+            <a:pPr marL="177800" indent="-177800">
+              <a:lnSpc>
+                <a:spcPct val="120000"/>
+              </a:lnSpc>
+              <a:spcAft>
+                <a:spcPts val="1100"/>
+              </a:spcAft>
+              <a:buSzPct val="100000"/>
+              <a:buChar char="•"/>
+            </a:pPr>
+            <a:r>
+              <a:rPr lang="en-US" sz="1200" dirty="0">
+                <a:solidFill>
+                  <a:srgbClr val="1F1F1F"/>
+                </a:solidFill>
+                <a:latin typeface="Pretendard" pitchFamily="34" charset="0"/>
+                <a:ea typeface="Pretendard" pitchFamily="34" charset="-122"/>
+                <a:cs typeface="Pretendard" pitchFamily="34" charset="-120"/>
+              </a:rPr>
+              <a:t>이 절은 왜 있습니까 — 혹은 왜 없습니까</a:t>
+            </a:r>
+            <a:endParaRPr lang="en-US" sz="1200" dirty="0"/>
+          </a:p>
+          <a:p>
+            <a:pPr marL="177800" indent="-177800">
+              <a:lnSpc>
+                <a:spcPct val="120000"/>
+              </a:lnSpc>
+              <a:spcAft>
+                <a:spcPts val="1100"/>
+              </a:spcAft>
+              <a:buSzPct val="100000"/>
+              <a:buChar char="•"/>
+            </a:pPr>
+            <a:r>
+              <a:rPr lang="en-US" sz="1200" dirty="0">
+                <a:solidFill>
+                  <a:srgbClr val="1F1F1F"/>
+                </a:solidFill>
+                <a:latin typeface="Pretendard" pitchFamily="34" charset="0"/>
+                <a:ea typeface="Pretendard" pitchFamily="34" charset="-122"/>
+                <a:cs typeface="Pretendard" pitchFamily="34" charset="-120"/>
+              </a:rPr>
+              <a:t>이 분야에서는 보통 어떻게 씁니까</a:t>
+            </a:r>
+            <a:endParaRPr lang="en-US" sz="1200" dirty="0"/>
+          </a:p>
+          <a:p>
+            <a:pPr marL="177800" indent="-177800">
+              <a:lnSpc>
+                <a:spcPct val="120000"/>
+              </a:lnSpc>
+              <a:spcAft>
+                <a:spcPts val="1100"/>
+              </a:spcAft>
+              <a:buSzPct val="100000"/>
+              <a:buChar char="•"/>
+            </a:pPr>
+            <a:r>
+              <a:rPr lang="en-US" sz="1200" dirty="0">
+                <a:solidFill>
+                  <a:srgbClr val="1F1F1F"/>
+                </a:solidFill>
+                <a:latin typeface="Pretendard" pitchFamily="34" charset="0"/>
+                <a:ea typeface="Pretendard" pitchFamily="34" charset="-122"/>
+                <a:cs typeface="Pretendard" pitchFamily="34" charset="-120"/>
+              </a:rPr>
+              <a:t>그 관습을 따랐습니까, 벗어났습니까. 벗어났다면 왜입니까</a:t>
+            </a:r>
+            <a:endParaRPr lang="en-US" sz="1200" dirty="0"/>
+          </a:p>
+        </p:txBody>
+      </p:sp>
+      <p:sp>
+        <p:nvSpPr>
+          <p:cNvPr id="17" name="Text 15"/>
+          <p:cNvSpPr/>
+          <p:nvPr/>
+        </p:nvSpPr>
+        <p:spPr>
+          <a:xfrm>
+            <a:off x="640080" y="5541264"/>
             <a:ext cx="10911535" cy="402336"/>
           </a:xfrm>
           <a:prstGeom prst="rect">
@@ -7443,23 +7166,23 @@
               <a:buNone/>
             </a:pPr>
             <a:r>
-              <a:rPr lang="en-US" sz="1250" b="1" dirty="0">
-                <a:solidFill>
-                  <a:srgbClr val="111111"/>
-                </a:solidFill>
-                <a:latin typeface="Pretendard" pitchFamily="34" charset="0"/>
-                <a:ea typeface="Pretendard" pitchFamily="34" charset="-122"/>
-                <a:cs typeface="Pretendard" pitchFamily="34" charset="-120"/>
-              </a:rPr>
-              <a:t>3번과 5번이 이번 학기의 실질입니다. 선행연구를 목록으로만 붙이면 2회차에 한 일이 사라집니다.</a:t>
-            </a:r>
-            <a:endParaRPr lang="en-US" sz="1250" dirty="0"/>
-          </a:p>
-        </p:txBody>
-      </p:sp>
-      <p:sp>
-        <p:nvSpPr>
-          <p:cNvPr id="51" name="Shape 49"/>
+              <a:rPr lang="en-US" sz="1200" dirty="0">
+                <a:solidFill>
+                  <a:srgbClr val="6E6E6E"/>
+                </a:solidFill>
+                <a:latin typeface="Pretendard" pitchFamily="34" charset="0"/>
+                <a:ea typeface="Pretendard" pitchFamily="34" charset="-122"/>
+                <a:cs typeface="Pretendard" pitchFamily="34" charset="-120"/>
+              </a:rPr>
+              <a:t>목차는 글을 쓰기 전에 내리는 판단의 목록입니다. 남의 것을 그대로 쓰면 판단을 남에게 맡긴 것입니다.</a:t>
+            </a:r>
+            <a:endParaRPr lang="en-US" sz="1200" dirty="0"/>
+          </a:p>
+        </p:txBody>
+      </p:sp>
+      <p:sp>
+        <p:nvSpPr>
+          <p:cNvPr id="18" name="Shape 16"/>
           <p:cNvSpPr/>
           <p:nvPr/>
         </p:nvSpPr>
@@ -7484,7 +7207,7 @@
       </p:sp>
       <p:sp>
         <p:nvSpPr>
-          <p:cNvPr id="52" name="Text 50"/>
+          <p:cNvPr id="19" name="Text 17"/>
           <p:cNvSpPr/>
           <p:nvPr/>
         </p:nvSpPr>
@@ -7523,7 +7246,7 @@
       </p:sp>
       <p:sp>
         <p:nvSpPr>
-          <p:cNvPr id="53" name="Text 51"/>
+          <p:cNvPr id="20" name="Text 18"/>
           <p:cNvSpPr/>
           <p:nvPr/>
         </p:nvSpPr>
@@ -7554,7 +7277,7 @@
                 <a:ea typeface="Pretendard" pitchFamily="34" charset="-122"/>
                 <a:cs typeface="Pretendard" pitchFamily="34" charset="-120"/>
               </a:rPr>
-              <a:t>P.08</a:t>
+              <a:t>P.07</a:t>
             </a:r>
             <a:endParaRPr lang="en-US" sz="850" dirty="0"/>
           </a:p>
@@ -7767,7 +7490,7 @@
                 <a:ea typeface="Pretendard" pitchFamily="34" charset="-122"/>
                 <a:cs typeface="Pretendard" pitchFamily="34" charset="-120"/>
               </a:rPr>
-              <a:t>HOMEWORK</a:t>
+              <a:t>WORKSHOP</a:t>
             </a:r>
             <a:endParaRPr lang="en-US" sz="950" dirty="0"/>
           </a:p>
@@ -7806,7 +7529,7 @@
                 <a:ea typeface="Pretendard SemiBold" pitchFamily="34" charset="-122"/>
                 <a:cs typeface="Pretendard SemiBold" pitchFamily="34" charset="-120"/>
               </a:rPr>
-              <a:t>과제와 다음 주</a:t>
+              <a:t>워크숍 · 내 연구가 서는 자리</a:t>
             </a:r>
             <a:endParaRPr lang="en-US" sz="3000" dirty="0"/>
           </a:p>
@@ -7845,7 +7568,7 @@
                 <a:ea typeface="Pretendard" pitchFamily="34" charset="-122"/>
                 <a:cs typeface="Pretendard" pitchFamily="34" charset="-120"/>
               </a:rPr>
-              <a:t>8회차는 프로포절 발표와 상호 리뷰입니다. 마지막 회차입니다.</a:t>
+              <a:t>다음 회차 프로포절에 그대로 들어갈 한 문단입니다.</a:t>
             </a:r>
             <a:endParaRPr lang="en-US" sz="1150" dirty="0"/>
           </a:p>
@@ -7860,7 +7583,7 @@
         <p:spPr>
           <a:xfrm>
             <a:off x="640080" y="1719072"/>
-            <a:ext cx="6309360" cy="896112"/>
+            <a:ext cx="10911535" cy="672998"/>
           </a:xfrm>
           <a:prstGeom prst="rect">
             <a:avLst/>
@@ -7878,16 +7601,415 @@
       </p:sp>
       <p:sp>
         <p:nvSpPr>
-          <p:cNvPr id="10" name="Shape 8"/>
-          <p:cNvSpPr/>
-          <p:nvPr/>
-        </p:nvSpPr>
-        <p:spPr>
-          <a:xfrm>
-            <a:off x="969264" y="1993392"/>
-            <a:ext cx="329184" cy="329184"/>
-          </a:xfrm>
-          <a:prstGeom prst="ellipse">
+          <p:cNvPr id="10" name="Text 8"/>
+          <p:cNvSpPr/>
+          <p:nvPr/>
+        </p:nvSpPr>
+        <p:spPr>
+          <a:xfrm>
+            <a:off x="1097280" y="1810512"/>
+            <a:ext cx="3291840" cy="490118"/>
+          </a:xfrm>
+          <a:prstGeom prst="rect">
+            <a:avLst/>
+          </a:prstGeom>
+          <a:noFill/>
+          <a:ln/>
+        </p:spPr>
+        <p:txBody>
+          <a:bodyPr wrap="square" lIns="0" tIns="0" rIns="0" bIns="0" rtlCol="0" anchor="ctr"/>
+          <a:lstStyle/>
+          <a:p>
+            <a:pPr indent="0" marL="0">
+              <a:buNone/>
+            </a:pPr>
+            <a:r>
+              <a:rPr lang="en-US" sz="1450" dirty="0">
+                <a:solidFill>
+                  <a:srgbClr val="111111"/>
+                </a:solidFill>
+                <a:latin typeface="Pretendard SemiBold" pitchFamily="34" charset="0"/>
+                <a:ea typeface="Pretendard SemiBold" pitchFamily="34" charset="-122"/>
+                <a:cs typeface="Pretendard SemiBold" pitchFamily="34" charset="-120"/>
+              </a:rPr>
+              <a:t>내 연구가 따르는 절차를 한 줄로</a:t>
+            </a:r>
+            <a:endParaRPr lang="en-US" sz="1450" dirty="0"/>
+          </a:p>
+        </p:txBody>
+      </p:sp>
+      <p:sp>
+        <p:nvSpPr>
+          <p:cNvPr id="11" name="Text 9"/>
+          <p:cNvSpPr/>
+          <p:nvPr/>
+        </p:nvSpPr>
+        <p:spPr>
+          <a:xfrm>
+            <a:off x="4480560" y="1810512"/>
+            <a:ext cx="6705295" cy="490118"/>
+          </a:xfrm>
+          <a:prstGeom prst="rect">
+            <a:avLst/>
+          </a:prstGeom>
+          <a:noFill/>
+          <a:ln/>
+        </p:spPr>
+        <p:txBody>
+          <a:bodyPr wrap="square" lIns="0" tIns="0" rIns="0" bIns="0" rtlCol="0" anchor="ctr"/>
+          <a:lstStyle/>
+          <a:p>
+            <a:pPr indent="0" marL="0">
+              <a:lnSpc>
+                <a:spcPct val="124000"/>
+              </a:lnSpc>
+              <a:buNone/>
+            </a:pPr>
+            <a:r>
+              <a:rPr lang="en-US" sz="1150" dirty="0">
+                <a:solidFill>
+                  <a:srgbClr val="6E6E6E"/>
+                </a:solidFill>
+                <a:latin typeface="Pretendard" pitchFamily="34" charset="0"/>
+                <a:ea typeface="Pretendard" pitchFamily="34" charset="-122"/>
+                <a:cs typeface="Pretendard" pitchFamily="34" charset="-120"/>
+              </a:rPr>
+              <a:t>더블 다이아몬드든 자기가 짠 것이든. 아직 없으면 없다고 적습니다.</a:t>
+            </a:r>
+            <a:endParaRPr lang="en-US" sz="1150" dirty="0"/>
+          </a:p>
+        </p:txBody>
+      </p:sp>
+      <p:sp>
+        <p:nvSpPr>
+          <p:cNvPr id="12" name="Shape 10"/>
+          <p:cNvSpPr/>
+          <p:nvPr/>
+        </p:nvSpPr>
+        <p:spPr>
+          <a:xfrm>
+            <a:off x="640080" y="2538374"/>
+            <a:ext cx="10911535" cy="672998"/>
+          </a:xfrm>
+          <a:prstGeom prst="rect">
+            <a:avLst/>
+          </a:prstGeom>
+          <a:solidFill>
+            <a:srgbClr val="FFFFFF"/>
+          </a:solidFill>
+          <a:ln w="12700">
+            <a:solidFill>
+              <a:srgbClr val="DCDCDC"/>
+            </a:solidFill>
+            <a:prstDash val="solid"/>
+          </a:ln>
+        </p:spPr>
+      </p:sp>
+      <p:sp>
+        <p:nvSpPr>
+          <p:cNvPr id="13" name="Text 11"/>
+          <p:cNvSpPr/>
+          <p:nvPr/>
+        </p:nvSpPr>
+        <p:spPr>
+          <a:xfrm>
+            <a:off x="1097280" y="2629814"/>
+            <a:ext cx="3291840" cy="490118"/>
+          </a:xfrm>
+          <a:prstGeom prst="rect">
+            <a:avLst/>
+          </a:prstGeom>
+          <a:noFill/>
+          <a:ln/>
+        </p:spPr>
+        <p:txBody>
+          <a:bodyPr wrap="square" lIns="0" tIns="0" rIns="0" bIns="0" rtlCol="0" anchor="ctr"/>
+          <a:lstStyle/>
+          <a:p>
+            <a:pPr indent="0" marL="0">
+              <a:buNone/>
+            </a:pPr>
+            <a:r>
+              <a:rPr lang="en-US" sz="1450" dirty="0">
+                <a:solidFill>
+                  <a:srgbClr val="111111"/>
+                </a:solidFill>
+                <a:latin typeface="Pretendard SemiBold" pitchFamily="34" charset="0"/>
+                <a:ea typeface="Pretendard SemiBold" pitchFamily="34" charset="-122"/>
+                <a:cs typeface="Pretendard SemiBold" pitchFamily="34" charset="-120"/>
+              </a:rPr>
+              <a:t>비판 네 줄 중 걸리는 것을 고른다</a:t>
+            </a:r>
+            <a:endParaRPr lang="en-US" sz="1450" dirty="0"/>
+          </a:p>
+        </p:txBody>
+      </p:sp>
+      <p:sp>
+        <p:nvSpPr>
+          <p:cNvPr id="14" name="Text 12"/>
+          <p:cNvSpPr/>
+          <p:nvPr/>
+        </p:nvSpPr>
+        <p:spPr>
+          <a:xfrm>
+            <a:off x="4480560" y="2629814"/>
+            <a:ext cx="6705295" cy="490118"/>
+          </a:xfrm>
+          <a:prstGeom prst="rect">
+            <a:avLst/>
+          </a:prstGeom>
+          <a:noFill/>
+          <a:ln/>
+        </p:spPr>
+        <p:txBody>
+          <a:bodyPr wrap="square" lIns="0" tIns="0" rIns="0" bIns="0" rtlCol="0" anchor="ctr"/>
+          <a:lstStyle/>
+          <a:p>
+            <a:pPr indent="0" marL="0">
+              <a:lnSpc>
+                <a:spcPct val="124000"/>
+              </a:lnSpc>
+              <a:buNone/>
+            </a:pPr>
+            <a:r>
+              <a:rPr lang="en-US" sz="1150" dirty="0">
+                <a:solidFill>
+                  <a:srgbClr val="6E6E6E"/>
+                </a:solidFill>
+                <a:latin typeface="Pretendard" pitchFamily="34" charset="0"/>
+                <a:ea typeface="Pretendard" pitchFamily="34" charset="-122"/>
+                <a:cs typeface="Pretendard" pitchFamily="34" charset="-120"/>
+              </a:rPr>
+              <a:t>순서 · 문제와 해결 · 끝나는 지점 · 누가 하는가. 하나나 둘이면 충분합니다.</a:t>
+            </a:r>
+            <a:endParaRPr lang="en-US" sz="1150" dirty="0"/>
+          </a:p>
+        </p:txBody>
+      </p:sp>
+      <p:sp>
+        <p:nvSpPr>
+          <p:cNvPr id="15" name="Shape 13"/>
+          <p:cNvSpPr/>
+          <p:nvPr/>
+        </p:nvSpPr>
+        <p:spPr>
+          <a:xfrm>
+            <a:off x="640080" y="3357677"/>
+            <a:ext cx="10911535" cy="672998"/>
+          </a:xfrm>
+          <a:prstGeom prst="rect">
+            <a:avLst/>
+          </a:prstGeom>
+          <a:solidFill>
+            <a:srgbClr val="FFFFFF"/>
+          </a:solidFill>
+          <a:ln w="12700">
+            <a:solidFill>
+              <a:srgbClr val="DCDCDC"/>
+            </a:solidFill>
+            <a:prstDash val="solid"/>
+          </a:ln>
+        </p:spPr>
+      </p:sp>
+      <p:sp>
+        <p:nvSpPr>
+          <p:cNvPr id="16" name="Text 14"/>
+          <p:cNvSpPr/>
+          <p:nvPr/>
+        </p:nvSpPr>
+        <p:spPr>
+          <a:xfrm>
+            <a:off x="1097280" y="3449117"/>
+            <a:ext cx="3291840" cy="490118"/>
+          </a:xfrm>
+          <a:prstGeom prst="rect">
+            <a:avLst/>
+          </a:prstGeom>
+          <a:noFill/>
+          <a:ln/>
+        </p:spPr>
+        <p:txBody>
+          <a:bodyPr wrap="square" lIns="0" tIns="0" rIns="0" bIns="0" rtlCol="0" anchor="ctr"/>
+          <a:lstStyle/>
+          <a:p>
+            <a:pPr indent="0" marL="0">
+              <a:buNone/>
+            </a:pPr>
+            <a:r>
+              <a:rPr lang="en-US" sz="1450" dirty="0">
+                <a:solidFill>
+                  <a:srgbClr val="111111"/>
+                </a:solidFill>
+                <a:latin typeface="Pretendard SemiBold" pitchFamily="34" charset="0"/>
+                <a:ea typeface="Pretendard SemiBold" pitchFamily="34" charset="-122"/>
+                <a:cs typeface="Pretendard SemiBold" pitchFamily="34" charset="-120"/>
+              </a:rPr>
+              <a:t>그 자리를 어떻게 다루는지 적는다</a:t>
+            </a:r>
+            <a:endParaRPr lang="en-US" sz="1450" dirty="0"/>
+          </a:p>
+        </p:txBody>
+      </p:sp>
+      <p:sp>
+        <p:nvSpPr>
+          <p:cNvPr id="17" name="Text 15"/>
+          <p:cNvSpPr/>
+          <p:nvPr/>
+        </p:nvSpPr>
+        <p:spPr>
+          <a:xfrm>
+            <a:off x="4480560" y="3449117"/>
+            <a:ext cx="6705295" cy="490118"/>
+          </a:xfrm>
+          <a:prstGeom prst="rect">
+            <a:avLst/>
+          </a:prstGeom>
+          <a:noFill/>
+          <a:ln/>
+        </p:spPr>
+        <p:txBody>
+          <a:bodyPr wrap="square" lIns="0" tIns="0" rIns="0" bIns="0" rtlCol="0" anchor="ctr"/>
+          <a:lstStyle/>
+          <a:p>
+            <a:pPr indent="0" marL="0">
+              <a:lnSpc>
+                <a:spcPct val="124000"/>
+              </a:lnSpc>
+              <a:buNone/>
+            </a:pPr>
+            <a:r>
+              <a:rPr lang="en-US" sz="1150" dirty="0">
+                <a:solidFill>
+                  <a:srgbClr val="6E6E6E"/>
+                </a:solidFill>
+                <a:latin typeface="Pretendard" pitchFamily="34" charset="0"/>
+                <a:ea typeface="Pretendard" pitchFamily="34" charset="-122"/>
+                <a:cs typeface="Pretendard" pitchFamily="34" charset="-120"/>
+              </a:rPr>
+              <a:t>'한계로 인정한다'도 답입니다. 다만 인정했다고 적어야 합니다.</a:t>
+            </a:r>
+            <a:endParaRPr lang="en-US" sz="1150" dirty="0"/>
+          </a:p>
+        </p:txBody>
+      </p:sp>
+      <p:sp>
+        <p:nvSpPr>
+          <p:cNvPr id="18" name="Shape 16"/>
+          <p:cNvSpPr/>
+          <p:nvPr/>
+        </p:nvSpPr>
+        <p:spPr>
+          <a:xfrm>
+            <a:off x="640080" y="4176979"/>
+            <a:ext cx="10911535" cy="672998"/>
+          </a:xfrm>
+          <a:prstGeom prst="rect">
+            <a:avLst/>
+          </a:prstGeom>
+          <a:solidFill>
+            <a:srgbClr val="FFFFFF"/>
+          </a:solidFill>
+          <a:ln w="12700">
+            <a:solidFill>
+              <a:srgbClr val="DCDCDC"/>
+            </a:solidFill>
+            <a:prstDash val="solid"/>
+          </a:ln>
+        </p:spPr>
+      </p:sp>
+      <p:sp>
+        <p:nvSpPr>
+          <p:cNvPr id="19" name="Text 17"/>
+          <p:cNvSpPr/>
+          <p:nvPr/>
+        </p:nvSpPr>
+        <p:spPr>
+          <a:xfrm>
+            <a:off x="1097280" y="4268419"/>
+            <a:ext cx="3291840" cy="490118"/>
+          </a:xfrm>
+          <a:prstGeom prst="rect">
+            <a:avLst/>
+          </a:prstGeom>
+          <a:noFill/>
+          <a:ln/>
+        </p:spPr>
+        <p:txBody>
+          <a:bodyPr wrap="square" lIns="0" tIns="0" rIns="0" bIns="0" rtlCol="0" anchor="ctr"/>
+          <a:lstStyle/>
+          <a:p>
+            <a:pPr indent="0" marL="0">
+              <a:buNone/>
+            </a:pPr>
+            <a:r>
+              <a:rPr lang="en-US" sz="1450" dirty="0">
+                <a:solidFill>
+                  <a:srgbClr val="111111"/>
+                </a:solidFill>
+                <a:latin typeface="Pretendard SemiBold" pitchFamily="34" charset="0"/>
+                <a:ea typeface="Pretendard SemiBold" pitchFamily="34" charset="-122"/>
+                <a:cs typeface="Pretendard SemiBold" pitchFamily="34" charset="-120"/>
+              </a:rPr>
+              <a:t>네 문장으로 이어 붙인다</a:t>
+            </a:r>
+            <a:endParaRPr lang="en-US" sz="1450" dirty="0"/>
+          </a:p>
+        </p:txBody>
+      </p:sp>
+      <p:sp>
+        <p:nvSpPr>
+          <p:cNvPr id="20" name="Text 18"/>
+          <p:cNvSpPr/>
+          <p:nvPr/>
+        </p:nvSpPr>
+        <p:spPr>
+          <a:xfrm>
+            <a:off x="4480560" y="4268419"/>
+            <a:ext cx="6705295" cy="490118"/>
+          </a:xfrm>
+          <a:prstGeom prst="rect">
+            <a:avLst/>
+          </a:prstGeom>
+          <a:noFill/>
+          <a:ln/>
+        </p:spPr>
+        <p:txBody>
+          <a:bodyPr wrap="square" lIns="0" tIns="0" rIns="0" bIns="0" rtlCol="0" anchor="ctr"/>
+          <a:lstStyle/>
+          <a:p>
+            <a:pPr indent="0" marL="0">
+              <a:lnSpc>
+                <a:spcPct val="124000"/>
+              </a:lnSpc>
+              <a:buNone/>
+            </a:pPr>
+            <a:r>
+              <a:rPr lang="en-US" sz="1150" dirty="0">
+                <a:solidFill>
+                  <a:srgbClr val="6E6E6E"/>
+                </a:solidFill>
+                <a:latin typeface="Pretendard" pitchFamily="34" charset="0"/>
+                <a:ea typeface="Pretendard" pitchFamily="34" charset="-122"/>
+                <a:cs typeface="Pretendard" pitchFamily="34" charset="-120"/>
+              </a:rPr>
+              <a:t>내 절차 · 그 절차의 약한 곳 · 내가 다루는 방식 · 그 선택이 정당한 이유.</a:t>
+            </a:r>
+            <a:endParaRPr lang="en-US" sz="1150" dirty="0"/>
+          </a:p>
+        </p:txBody>
+      </p:sp>
+      <p:sp>
+        <p:nvSpPr>
+          <p:cNvPr id="21" name="Shape 19"/>
+          <p:cNvSpPr/>
+          <p:nvPr/>
+        </p:nvSpPr>
+        <p:spPr>
+          <a:xfrm>
+            <a:off x="640080" y="4996282"/>
+            <a:ext cx="10911535" cy="672998"/>
+          </a:xfrm>
+          <a:prstGeom prst="rect">
             <a:avLst/>
           </a:prstGeom>
           <a:solidFill>
@@ -7903,111 +8025,466 @@
       </p:sp>
       <p:sp>
         <p:nvSpPr>
-          <p:cNvPr id="11" name="Text 9"/>
-          <p:cNvSpPr/>
-          <p:nvPr/>
-        </p:nvSpPr>
-        <p:spPr>
-          <a:xfrm>
-            <a:off x="969264" y="1993392"/>
-            <a:ext cx="329184" cy="329184"/>
-          </a:xfrm>
-          <a:prstGeom prst="rect">
-            <a:avLst/>
-          </a:prstGeom>
-          <a:noFill/>
-          <a:ln/>
-        </p:spPr>
-        <p:txBody>
-          <a:bodyPr wrap="square" lIns="0" tIns="0" rIns="0" bIns="0" rtlCol="0" anchor="ctr"/>
-          <a:lstStyle/>
-          <a:p>
-            <a:pPr algn="ctr" indent="0" marL="0">
-              <a:buNone/>
-            </a:pPr>
-            <a:r>
-              <a:rPr lang="en-US" sz="1100" b="1" dirty="0">
+          <p:cNvPr id="22" name="Text 20"/>
+          <p:cNvSpPr/>
+          <p:nvPr/>
+        </p:nvSpPr>
+        <p:spPr>
+          <a:xfrm>
+            <a:off x="1097280" y="5087722"/>
+            <a:ext cx="3291840" cy="490118"/>
+          </a:xfrm>
+          <a:prstGeom prst="rect">
+            <a:avLst/>
+          </a:prstGeom>
+          <a:noFill/>
+          <a:ln/>
+        </p:spPr>
+        <p:txBody>
+          <a:bodyPr wrap="square" lIns="0" tIns="0" rIns="0" bIns="0" rtlCol="0" anchor="ctr"/>
+          <a:lstStyle/>
+          <a:p>
+            <a:pPr indent="0" marL="0">
+              <a:buNone/>
+            </a:pPr>
+            <a:r>
+              <a:rPr lang="en-US" sz="1450" dirty="0">
                 <a:solidFill>
                   <a:srgbClr val="FFFFFF"/>
-                </a:solidFill>
-                <a:latin typeface="Pretendard" pitchFamily="34" charset="0"/>
-                <a:ea typeface="Pretendard" pitchFamily="34" charset="-122"/>
-                <a:cs typeface="Pretendard" pitchFamily="34" charset="-120"/>
-              </a:rPr>
-              <a:t>1</a:t>
-            </a:r>
-            <a:endParaRPr lang="en-US" sz="1100" dirty="0"/>
-          </a:p>
-        </p:txBody>
-      </p:sp>
-      <p:sp>
-        <p:nvSpPr>
-          <p:cNvPr id="12" name="Text 10"/>
-          <p:cNvSpPr/>
-          <p:nvPr/>
-        </p:nvSpPr>
-        <p:spPr>
-          <a:xfrm>
-            <a:off x="1426464" y="1810512"/>
-            <a:ext cx="5175504" cy="329184"/>
-          </a:xfrm>
-          <a:prstGeom prst="rect">
-            <a:avLst/>
-          </a:prstGeom>
-          <a:noFill/>
-          <a:ln/>
-        </p:spPr>
-        <p:txBody>
-          <a:bodyPr wrap="square" lIns="0" tIns="0" rIns="0" bIns="0" rtlCol="0" anchor="ctr"/>
-          <a:lstStyle/>
-          <a:p>
-            <a:pPr indent="0" marL="0">
-              <a:buNone/>
-            </a:pPr>
-            <a:r>
-              <a:rPr lang="en-US" sz="1400" dirty="0">
-                <a:solidFill>
-                  <a:srgbClr val="111111"/>
                 </a:solidFill>
                 <a:latin typeface="Pretendard SemiBold" pitchFamily="34" charset="0"/>
                 <a:ea typeface="Pretendard SemiBold" pitchFamily="34" charset="-122"/>
                 <a:cs typeface="Pretendard SemiBold" pitchFamily="34" charset="-120"/>
               </a:rPr>
-              <a:t>프로포절 드래프트</a:t>
-            </a:r>
-            <a:endParaRPr lang="en-US" sz="1400" dirty="0"/>
-          </a:p>
-        </p:txBody>
-      </p:sp>
-      <p:sp>
-        <p:nvSpPr>
-          <p:cNvPr id="13" name="Text 11"/>
-          <p:cNvSpPr/>
-          <p:nvPr/>
-        </p:nvSpPr>
-        <p:spPr>
-          <a:xfrm>
-            <a:off x="1426464" y="2121408"/>
-            <a:ext cx="5175504" cy="420624"/>
-          </a:xfrm>
-          <a:prstGeom prst="rect">
-            <a:avLst/>
-          </a:prstGeom>
-          <a:noFill/>
-          <a:ln/>
-        </p:spPr>
-        <p:txBody>
-          <a:bodyPr wrap="square" lIns="0" tIns="0" rIns="0" bIns="0" rtlCol="0" anchor="t"/>
+              <a:t>가장 가까운 한 편의 목차를 옮겨 적는다</a:t>
+            </a:r>
+            <a:endParaRPr lang="en-US" sz="1450" dirty="0"/>
+          </a:p>
+        </p:txBody>
+      </p:sp>
+      <p:sp>
+        <p:nvSpPr>
+          <p:cNvPr id="23" name="Text 21"/>
+          <p:cNvSpPr/>
+          <p:nvPr/>
+        </p:nvSpPr>
+        <p:spPr>
+          <a:xfrm>
+            <a:off x="4480560" y="5087722"/>
+            <a:ext cx="6705295" cy="490118"/>
+          </a:xfrm>
+          <a:prstGeom prst="rect">
+            <a:avLst/>
+          </a:prstGeom>
+          <a:noFill/>
+          <a:ln/>
+        </p:spPr>
+        <p:txBody>
+          <a:bodyPr wrap="square" lIns="0" tIns="0" rIns="0" bIns="0" rtlCol="0" anchor="ctr"/>
           <a:lstStyle/>
           <a:p>
             <a:pPr indent="0" marL="0">
               <a:lnSpc>
-                <a:spcPct val="122000"/>
+                <a:spcPct val="124000"/>
               </a:lnSpc>
               <a:buNone/>
             </a:pPr>
             <a:r>
-              <a:rPr lang="en-US" sz="1100" dirty="0">
+              <a:rPr lang="en-US" sz="1150" dirty="0">
+                <a:solidFill>
+                  <a:srgbClr val="B8B8B8"/>
+                </a:solidFill>
+                <a:latin typeface="Pretendard" pitchFamily="34" charset="0"/>
+                <a:ea typeface="Pretendard" pitchFamily="34" charset="-122"/>
+                <a:cs typeface="Pretendard" pitchFamily="34" charset="-120"/>
+              </a:rPr>
+              <a:t>2회차에 찾은 다섯 편 중 하나를 골라 절 제목과 쪽수를 그대로. 그 아래에 내 논문에서 그 절이 무엇이 될지 한 줄씩 답니다.</a:t>
+            </a:r>
+            <a:endParaRPr lang="en-US" sz="1150" dirty="0"/>
+          </a:p>
+        </p:txBody>
+      </p:sp>
+      <p:sp>
+        <p:nvSpPr>
+          <p:cNvPr id="24" name="Shape 22"/>
+          <p:cNvSpPr/>
+          <p:nvPr/>
+        </p:nvSpPr>
+        <p:spPr>
+          <a:xfrm>
+            <a:off x="640080" y="6291072"/>
+            <a:ext cx="10911535" cy="7315"/>
+          </a:xfrm>
+          <a:prstGeom prst="rect">
+            <a:avLst/>
+          </a:prstGeom>
+          <a:solidFill>
+            <a:srgbClr val="DCDCDC"/>
+          </a:solidFill>
+          <a:ln w="12700">
+            <a:solidFill>
+              <a:srgbClr val="DCDCDC"/>
+            </a:solidFill>
+            <a:prstDash val="solid"/>
+          </a:ln>
+        </p:spPr>
+      </p:sp>
+      <p:sp>
+        <p:nvSpPr>
+          <p:cNvPr id="25" name="Text 23"/>
+          <p:cNvSpPr/>
+          <p:nvPr/>
+        </p:nvSpPr>
+        <p:spPr>
+          <a:xfrm>
+            <a:off x="640080" y="6382512"/>
+            <a:ext cx="7772400" cy="237744"/>
+          </a:xfrm>
+          <a:prstGeom prst="rect">
+            <a:avLst/>
+          </a:prstGeom>
+          <a:noFill/>
+          <a:ln/>
+        </p:spPr>
+        <p:txBody>
+          <a:bodyPr wrap="square" lIns="0" tIns="0" rIns="0" bIns="0" rtlCol="0" anchor="ctr"/>
+          <a:lstStyle/>
+          <a:p>
+            <a:pPr indent="0" marL="0">
+              <a:buNone/>
+            </a:pPr>
+            <a:r>
+              <a:rPr lang="en-US" sz="850" spc="40" kern="0" dirty="0">
+                <a:solidFill>
+                  <a:srgbClr val="9B9B9B"/>
+                </a:solidFill>
+                <a:latin typeface="Pretendard" pitchFamily="34" charset="0"/>
+                <a:ea typeface="Pretendard" pitchFamily="34" charset="-122"/>
+                <a:cs typeface="Pretendard" pitchFamily="34" charset="-120"/>
+              </a:rPr>
+              <a:t>컨셉트와 프로세스 · 7주차 도식의 바깥 — 비판과 확장</a:t>
+            </a:r>
+            <a:endParaRPr lang="en-US" sz="850" dirty="0"/>
+          </a:p>
+        </p:txBody>
+      </p:sp>
+      <p:sp>
+        <p:nvSpPr>
+          <p:cNvPr id="26" name="Text 24"/>
+          <p:cNvSpPr/>
+          <p:nvPr/>
+        </p:nvSpPr>
+        <p:spPr>
+          <a:xfrm>
+            <a:off x="10271455" y="6382512"/>
+            <a:ext cx="1280160" cy="237744"/>
+          </a:xfrm>
+          <a:prstGeom prst="rect">
+            <a:avLst/>
+          </a:prstGeom>
+          <a:noFill/>
+          <a:ln/>
+        </p:spPr>
+        <p:txBody>
+          <a:bodyPr wrap="square" lIns="0" tIns="0" rIns="0" bIns="0" rtlCol="0" anchor="ctr"/>
+          <a:lstStyle/>
+          <a:p>
+            <a:pPr algn="r" indent="0" marL="0">
+              <a:buNone/>
+            </a:pPr>
+            <a:r>
+              <a:rPr lang="en-US" sz="850" spc="140" kern="0" dirty="0">
+                <a:solidFill>
+                  <a:srgbClr val="9B9B9B"/>
+                </a:solidFill>
+                <a:latin typeface="Pretendard" pitchFamily="34" charset="0"/>
+                <a:ea typeface="Pretendard" pitchFamily="34" charset="-122"/>
+                <a:cs typeface="Pretendard" pitchFamily="34" charset="-120"/>
+              </a:rPr>
+              <a:t>P.08</a:t>
+            </a:r>
+            <a:endParaRPr lang="en-US" sz="850" dirty="0"/>
+          </a:p>
+        </p:txBody>
+      </p:sp>
+    </p:spTree>
+  </p:cSld>
+  <p:clrMapOvr>
+    <a:masterClrMapping/>
+  </p:clrMapOvr>
+</p:sld>
+</file>
+
+<file path=ppt/slides/slide15.xml><?xml version="1.0" encoding="utf-8"?>
+<p:sld xmlns:a="http://schemas.openxmlformats.org/drawingml/2006/main" xmlns:r="http://schemas.openxmlformats.org/officeDocument/2006/relationships" xmlns:p="http://schemas.openxmlformats.org/presentationml/2006/main">
+  <p:cSld name="Slide 15">
+    <p:bg>
+      <p:bgPr>
+        <a:solidFill>
+          <a:srgbClr val="FFFFFF"/>
+        </a:solidFill>
+      </p:bgPr>
+    </p:bg>
+    <p:spTree>
+      <p:nvGrpSpPr>
+        <p:cNvPr id="1" name=""/>
+        <p:cNvGrpSpPr/>
+        <p:nvPr/>
+      </p:nvGrpSpPr>
+      <p:grpSpPr>
+        <a:xfrm>
+          <a:off x="0" y="0"/>
+          <a:ext cx="0" cy="0"/>
+          <a:chOff x="0" y="0"/>
+          <a:chExt cx="0" cy="0"/>
+        </a:xfrm>
+      </p:grpSpPr>
+      <p:sp>
+        <p:nvSpPr>
+          <p:cNvPr id="2" name="Text 0"/>
+          <p:cNvSpPr/>
+          <p:nvPr/>
+        </p:nvSpPr>
+        <p:spPr>
+          <a:xfrm>
+            <a:off x="640080" y="274320"/>
+            <a:ext cx="3657600" cy="219456"/>
+          </a:xfrm>
+          <a:prstGeom prst="rect">
+            <a:avLst/>
+          </a:prstGeom>
+          <a:noFill/>
+          <a:ln/>
+        </p:spPr>
+        <p:txBody>
+          <a:bodyPr wrap="square" lIns="0" tIns="0" rIns="0" bIns="0" rtlCol="0" anchor="ctr"/>
+          <a:lstStyle/>
+          <a:p>
+            <a:pPr indent="0" marL="0">
+              <a:buNone/>
+            </a:pPr>
+            <a:r>
+              <a:rPr lang="en-US" sz="900" spc="120" kern="0" dirty="0">
+                <a:solidFill>
+                  <a:srgbClr val="8A8A8A"/>
+                </a:solidFill>
+                <a:latin typeface="Pretendard" pitchFamily="34" charset="0"/>
+                <a:ea typeface="Pretendard" pitchFamily="34" charset="-122"/>
+                <a:cs typeface="Pretendard" pitchFamily="34" charset="-120"/>
+              </a:rPr>
+              <a:t>컨셉트와 프로세스</a:t>
+            </a:r>
+            <a:endParaRPr lang="en-US" sz="900" dirty="0"/>
+          </a:p>
+        </p:txBody>
+      </p:sp>
+      <p:sp>
+        <p:nvSpPr>
+          <p:cNvPr id="3" name="Text 1"/>
+          <p:cNvSpPr/>
+          <p:nvPr/>
+        </p:nvSpPr>
+        <p:spPr>
+          <a:xfrm>
+            <a:off x="4480560" y="274320"/>
+            <a:ext cx="4572000" cy="219456"/>
+          </a:xfrm>
+          <a:prstGeom prst="rect">
+            <a:avLst/>
+          </a:prstGeom>
+          <a:noFill/>
+          <a:ln/>
+        </p:spPr>
+        <p:txBody>
+          <a:bodyPr wrap="square" lIns="0" tIns="0" rIns="0" bIns="0" rtlCol="0" anchor="ctr"/>
+          <a:lstStyle/>
+          <a:p>
+            <a:pPr algn="ctr" indent="0" marL="0">
+              <a:buNone/>
+            </a:pPr>
+            <a:r>
+              <a:rPr lang="en-US" sz="900" spc="120" kern="0" dirty="0">
+                <a:solidFill>
+                  <a:srgbClr val="8A8A8A"/>
+                </a:solidFill>
+                <a:latin typeface="Pretendard" pitchFamily="34" charset="0"/>
+                <a:ea typeface="Pretendard" pitchFamily="34" charset="-122"/>
+                <a:cs typeface="Pretendard" pitchFamily="34" charset="-120"/>
+              </a:rPr>
+              <a:t>PHASE 3 확장</a:t>
+            </a:r>
+            <a:endParaRPr lang="en-US" sz="900" dirty="0"/>
+          </a:p>
+        </p:txBody>
+      </p:sp>
+      <p:sp>
+        <p:nvSpPr>
+          <p:cNvPr id="4" name="Text 2"/>
+          <p:cNvSpPr/>
+          <p:nvPr/>
+        </p:nvSpPr>
+        <p:spPr>
+          <a:xfrm>
+            <a:off x="8808415" y="274320"/>
+            <a:ext cx="2743200" cy="219456"/>
+          </a:xfrm>
+          <a:prstGeom prst="rect">
+            <a:avLst/>
+          </a:prstGeom>
+          <a:noFill/>
+          <a:ln/>
+        </p:spPr>
+        <p:txBody>
+          <a:bodyPr wrap="square" lIns="0" tIns="0" rIns="0" bIns="0" rtlCol="0" anchor="ctr"/>
+          <a:lstStyle/>
+          <a:p>
+            <a:pPr algn="r" indent="0" marL="0">
+              <a:buNone/>
+            </a:pPr>
+            <a:r>
+              <a:rPr lang="en-US" sz="900" spc="200" kern="0" dirty="0">
+                <a:solidFill>
+                  <a:srgbClr val="8A8A8A"/>
+                </a:solidFill>
+                <a:latin typeface="Pretendard" pitchFamily="34" charset="0"/>
+                <a:ea typeface="Pretendard" pitchFamily="34" charset="-122"/>
+                <a:cs typeface="Pretendard" pitchFamily="34" charset="-120"/>
+              </a:rPr>
+              <a:t>WEEK 07</a:t>
+            </a:r>
+            <a:endParaRPr lang="en-US" sz="900" dirty="0"/>
+          </a:p>
+        </p:txBody>
+      </p:sp>
+      <p:sp>
+        <p:nvSpPr>
+          <p:cNvPr id="5" name="Shape 3"/>
+          <p:cNvSpPr/>
+          <p:nvPr/>
+        </p:nvSpPr>
+        <p:spPr>
+          <a:xfrm>
+            <a:off x="640080" y="548640"/>
+            <a:ext cx="10911535" cy="7315"/>
+          </a:xfrm>
+          <a:prstGeom prst="rect">
+            <a:avLst/>
+          </a:prstGeom>
+          <a:solidFill>
+            <a:srgbClr val="DCDCDC"/>
+          </a:solidFill>
+          <a:ln w="12700">
+            <a:solidFill>
+              <a:srgbClr val="DCDCDC"/>
+            </a:solidFill>
+            <a:prstDash val="solid"/>
+          </a:ln>
+        </p:spPr>
+      </p:sp>
+      <p:sp>
+        <p:nvSpPr>
+          <p:cNvPr id="6" name="Text 4"/>
+          <p:cNvSpPr/>
+          <p:nvPr/>
+        </p:nvSpPr>
+        <p:spPr>
+          <a:xfrm>
+            <a:off x="640080" y="640080"/>
+            <a:ext cx="10911535" cy="219456"/>
+          </a:xfrm>
+          <a:prstGeom prst="rect">
+            <a:avLst/>
+          </a:prstGeom>
+          <a:noFill/>
+          <a:ln/>
+        </p:spPr>
+        <p:txBody>
+          <a:bodyPr wrap="square" lIns="0" tIns="0" rIns="0" bIns="0" rtlCol="0" anchor="ctr"/>
+          <a:lstStyle/>
+          <a:p>
+            <a:pPr indent="0" marL="0">
+              <a:buNone/>
+            </a:pPr>
+            <a:r>
+              <a:rPr lang="en-US" sz="950" spc="260" kern="0" dirty="0">
+                <a:solidFill>
+                  <a:srgbClr val="8A8A8A"/>
+                </a:solidFill>
+                <a:latin typeface="Pretendard" pitchFamily="34" charset="0"/>
+                <a:ea typeface="Pretendard" pitchFamily="34" charset="-122"/>
+                <a:cs typeface="Pretendard" pitchFamily="34" charset="-120"/>
+              </a:rPr>
+              <a:t>FINAL</a:t>
+            </a:r>
+            <a:endParaRPr lang="en-US" sz="950" dirty="0"/>
+          </a:p>
+        </p:txBody>
+      </p:sp>
+      <p:sp>
+        <p:nvSpPr>
+          <p:cNvPr id="7" name="Text 5"/>
+          <p:cNvSpPr/>
+          <p:nvPr/>
+        </p:nvSpPr>
+        <p:spPr>
+          <a:xfrm>
+            <a:off x="640080" y="859536"/>
+            <a:ext cx="10911535" cy="475488"/>
+          </a:xfrm>
+          <a:prstGeom prst="rect">
+            <a:avLst/>
+          </a:prstGeom>
+          <a:noFill/>
+          <a:ln/>
+        </p:spPr>
+        <p:txBody>
+          <a:bodyPr wrap="square" lIns="0" tIns="0" rIns="0" bIns="0" rtlCol="0" anchor="ctr"/>
+          <a:lstStyle/>
+          <a:p>
+            <a:pPr indent="0" marL="0">
+              <a:buNone/>
+            </a:pPr>
+            <a:r>
+              <a:rPr lang="en-US" sz="3000" dirty="0">
+                <a:solidFill>
+                  <a:srgbClr val="111111"/>
+                </a:solidFill>
+                <a:latin typeface="Pretendard SemiBold" pitchFamily="34" charset="0"/>
+                <a:ea typeface="Pretendard SemiBold" pitchFamily="34" charset="-122"/>
+                <a:cs typeface="Pretendard SemiBold" pitchFamily="34" charset="-120"/>
+              </a:rPr>
+              <a:t>8회차 — 프로포절 발표와 상호 리뷰</a:t>
+            </a:r>
+            <a:endParaRPr lang="en-US" sz="3000" dirty="0"/>
+          </a:p>
+        </p:txBody>
+      </p:sp>
+      <p:sp>
+        <p:nvSpPr>
+          <p:cNvPr id="8" name="Text 6"/>
+          <p:cNvSpPr/>
+          <p:nvPr/>
+        </p:nvSpPr>
+        <p:spPr>
+          <a:xfrm>
+            <a:off x="640080" y="1371600"/>
+            <a:ext cx="10911535" cy="219456"/>
+          </a:xfrm>
+          <a:prstGeom prst="rect">
+            <a:avLst/>
+          </a:prstGeom>
+          <a:noFill/>
+          <a:ln/>
+        </p:spPr>
+        <p:txBody>
+          <a:bodyPr wrap="square" lIns="0" tIns="0" rIns="0" bIns="0" rtlCol="0" anchor="ctr"/>
+          <a:lstStyle/>
+          <a:p>
+            <a:pPr indent="0" marL="0">
+              <a:buNone/>
+            </a:pPr>
+            <a:r>
+              <a:rPr lang="en-US" sz="1150" dirty="0">
                 <a:solidFill>
                   <a:srgbClr val="6E6E6E"/>
                 </a:solidFill>
@@ -8015,22 +8492,22 @@
                 <a:ea typeface="Pretendard" pitchFamily="34" charset="-122"/>
                 <a:cs typeface="Pretendard" pitchFamily="34" charset="-120"/>
               </a:rPr>
-              <a:t>여섯 절로 씁니다. 연구 배경과 문제 · 연구 질문과 가설 · 선행연구와 내 자리 · 연구 방법과 절차 · 예상 기여 · 일정. 분량은 회차가 줄어든 만큼 조정했습니다. 8회차 48시간 전까지 올립니다.</a:t>
-            </a:r>
-            <a:endParaRPr lang="en-US" sz="1100" dirty="0"/>
-          </a:p>
-        </p:txBody>
-      </p:sp>
-      <p:sp>
-        <p:nvSpPr>
-          <p:cNvPr id="14" name="Shape 12"/>
-          <p:cNvSpPr/>
-          <p:nvPr/>
-        </p:nvSpPr>
-        <p:spPr>
-          <a:xfrm>
-            <a:off x="640080" y="2743200"/>
-            <a:ext cx="6309360" cy="896112"/>
+              <a:t>한 학기 동안 쓴 과제를 이어 붙이면 뼈대가 나옵니다.</a:t>
+            </a:r>
+            <a:endParaRPr lang="en-US" sz="1150" dirty="0"/>
+          </a:p>
+        </p:txBody>
+      </p:sp>
+      <p:sp>
+        <p:nvSpPr>
+          <p:cNvPr id="9" name="Shape 7"/>
+          <p:cNvSpPr/>
+          <p:nvPr/>
+        </p:nvSpPr>
+        <p:spPr>
+          <a:xfrm>
+            <a:off x="640080" y="1664208"/>
+            <a:ext cx="5254600" cy="3749040"/>
           </a:xfrm>
           <a:prstGeom prst="rect">
             <a:avLst/>
@@ -8048,16 +8525,55 @@
       </p:sp>
       <p:sp>
         <p:nvSpPr>
-          <p:cNvPr id="15" name="Shape 13"/>
-          <p:cNvSpPr/>
-          <p:nvPr/>
-        </p:nvSpPr>
-        <p:spPr>
-          <a:xfrm>
-            <a:off x="969264" y="3017520"/>
-            <a:ext cx="329184" cy="329184"/>
-          </a:xfrm>
-          <a:prstGeom prst="ellipse">
+          <p:cNvPr id="10" name="Text 8"/>
+          <p:cNvSpPr/>
+          <p:nvPr/>
+        </p:nvSpPr>
+        <p:spPr>
+          <a:xfrm>
+            <a:off x="1060704" y="1993392"/>
+            <a:ext cx="4413352" cy="365760"/>
+          </a:xfrm>
+          <a:prstGeom prst="rect">
+            <a:avLst/>
+          </a:prstGeom>
+          <a:noFill/>
+          <a:ln/>
+        </p:spPr>
+        <p:txBody>
+          <a:bodyPr wrap="square" lIns="0" tIns="0" rIns="0" bIns="0" rtlCol="0" anchor="ctr"/>
+          <a:lstStyle/>
+          <a:p>
+            <a:pPr indent="0" marL="0">
+              <a:buNone/>
+            </a:pPr>
+            <a:r>
+              <a:rPr lang="en-US" sz="1700" dirty="0">
+                <a:solidFill>
+                  <a:srgbClr val="111111"/>
+                </a:solidFill>
+                <a:latin typeface="Pretendard SemiBold" pitchFamily="34" charset="0"/>
+                <a:ea typeface="Pretendard SemiBold" pitchFamily="34" charset="-122"/>
+                <a:cs typeface="Pretendard SemiBold" pitchFamily="34" charset="-120"/>
+              </a:rPr>
+              <a:t>프로포절 여섯 절</a:t>
+            </a:r>
+            <a:endParaRPr lang="en-US" sz="1700" dirty="0"/>
+          </a:p>
+        </p:txBody>
+      </p:sp>
+      <p:sp>
+        <p:nvSpPr>
+          <p:cNvPr id="11" name="Shape 9"/>
+          <p:cNvSpPr/>
+          <p:nvPr/>
+        </p:nvSpPr>
+        <p:spPr>
+          <a:xfrm>
+            <a:off x="1060704" y="2414016"/>
+            <a:ext cx="4413352" cy="7315"/>
+          </a:xfrm>
+          <a:prstGeom prst="rect">
             <a:avLst/>
           </a:prstGeom>
           <a:solidFill>
@@ -8073,69 +8589,221 @@
       </p:sp>
       <p:sp>
         <p:nvSpPr>
-          <p:cNvPr id="16" name="Text 14"/>
-          <p:cNvSpPr/>
-          <p:nvPr/>
-        </p:nvSpPr>
-        <p:spPr>
-          <a:xfrm>
-            <a:off x="969264" y="3017520"/>
-            <a:ext cx="329184" cy="329184"/>
-          </a:xfrm>
-          <a:prstGeom prst="rect">
-            <a:avLst/>
-          </a:prstGeom>
-          <a:noFill/>
-          <a:ln/>
-        </p:spPr>
-        <p:txBody>
-          <a:bodyPr wrap="square" lIns="0" tIns="0" rIns="0" bIns="0" rtlCol="0" anchor="ctr"/>
-          <a:lstStyle/>
-          <a:p>
-            <a:pPr algn="ctr" indent="0" marL="0">
-              <a:buNone/>
-            </a:pPr>
-            <a:r>
-              <a:rPr lang="en-US" sz="1100" b="1" dirty="0">
-                <a:solidFill>
-                  <a:srgbClr val="FFFFFF"/>
-                </a:solidFill>
-                <a:latin typeface="Pretendard" pitchFamily="34" charset="0"/>
-                <a:ea typeface="Pretendard" pitchFamily="34" charset="-122"/>
-                <a:cs typeface="Pretendard" pitchFamily="34" charset="-120"/>
-              </a:rPr>
-              <a:t>2</a:t>
-            </a:r>
-            <a:endParaRPr lang="en-US" sz="1100" dirty="0"/>
-          </a:p>
-        </p:txBody>
-      </p:sp>
-      <p:sp>
-        <p:nvSpPr>
-          <p:cNvPr id="17" name="Text 15"/>
-          <p:cNvSpPr/>
-          <p:nvPr/>
-        </p:nvSpPr>
-        <p:spPr>
-          <a:xfrm>
-            <a:off x="1426464" y="2834640"/>
-            <a:ext cx="5175504" cy="329184"/>
-          </a:xfrm>
-          <a:prstGeom prst="rect">
-            <a:avLst/>
-          </a:prstGeom>
-          <a:noFill/>
-          <a:ln/>
-        </p:spPr>
-        <p:txBody>
-          <a:bodyPr wrap="square" lIns="0" tIns="0" rIns="0" bIns="0" rtlCol="0" anchor="ctr"/>
-          <a:lstStyle/>
-          <a:p>
-            <a:pPr indent="0" marL="0">
-              <a:buNone/>
-            </a:pPr>
-            <a:r>
-              <a:rPr lang="en-US" sz="1400" dirty="0">
+          <p:cNvPr id="12" name="Text 10"/>
+          <p:cNvSpPr/>
+          <p:nvPr/>
+        </p:nvSpPr>
+        <p:spPr>
+          <a:xfrm>
+            <a:off x="1060704" y="2523744"/>
+            <a:ext cx="4413352" cy="2706624"/>
+          </a:xfrm>
+          <a:prstGeom prst="rect">
+            <a:avLst/>
+          </a:prstGeom>
+          <a:noFill/>
+          <a:ln/>
+        </p:spPr>
+        <p:txBody>
+          <a:bodyPr wrap="square" lIns="0" tIns="0" rIns="0" bIns="0" rtlCol="0" anchor="t"/>
+          <a:lstStyle/>
+          <a:p>
+            <a:pPr marL="177800" indent="-177800">
+              <a:lnSpc>
+                <a:spcPct val="120000"/>
+              </a:lnSpc>
+              <a:spcAft>
+                <a:spcPts val="1100"/>
+              </a:spcAft>
+              <a:buSzPct val="100000"/>
+              <a:buChar char="•"/>
+            </a:pPr>
+            <a:r>
+              <a:rPr lang="en-US" sz="1200" dirty="0">
+                <a:solidFill>
+                  <a:srgbClr val="1F1F1F"/>
+                </a:solidFill>
+                <a:latin typeface="Pretendard" pitchFamily="34" charset="0"/>
+                <a:ea typeface="Pretendard" pitchFamily="34" charset="-122"/>
+                <a:cs typeface="Pretendard" pitchFamily="34" charset="-120"/>
+              </a:rPr>
+              <a:t>연구 배경과 문제 — 무엇이 왜 문제인가</a:t>
+            </a:r>
+            <a:endParaRPr lang="en-US" sz="1200" dirty="0"/>
+          </a:p>
+          <a:p>
+            <a:pPr marL="177800" indent="-177800">
+              <a:lnSpc>
+                <a:spcPct val="120000"/>
+              </a:lnSpc>
+              <a:spcAft>
+                <a:spcPts val="1100"/>
+              </a:spcAft>
+              <a:buSzPct val="100000"/>
+              <a:buChar char="•"/>
+            </a:pPr>
+            <a:r>
+              <a:rPr lang="en-US" sz="1200" dirty="0">
+                <a:solidFill>
+                  <a:srgbClr val="1F1F1F"/>
+                </a:solidFill>
+                <a:latin typeface="Pretendard" pitchFamily="34" charset="0"/>
+                <a:ea typeface="Pretendard" pitchFamily="34" charset="-122"/>
+                <a:cs typeface="Pretendard" pitchFamily="34" charset="-120"/>
+              </a:rPr>
+              <a:t>연구 질문과 가설 — 무엇을 묻고 무엇을 예상하는가</a:t>
+            </a:r>
+            <a:endParaRPr lang="en-US" sz="1200" dirty="0"/>
+          </a:p>
+          <a:p>
+            <a:pPr marL="177800" indent="-177800">
+              <a:lnSpc>
+                <a:spcPct val="120000"/>
+              </a:lnSpc>
+              <a:spcAft>
+                <a:spcPts val="1100"/>
+              </a:spcAft>
+              <a:buSzPct val="100000"/>
+              <a:buChar char="•"/>
+            </a:pPr>
+            <a:r>
+              <a:rPr lang="en-US" sz="1200" dirty="0">
+                <a:solidFill>
+                  <a:srgbClr val="1F1F1F"/>
+                </a:solidFill>
+                <a:latin typeface="Pretendard" pitchFamily="34" charset="0"/>
+                <a:ea typeface="Pretendard" pitchFamily="34" charset="-122"/>
+                <a:cs typeface="Pretendard" pitchFamily="34" charset="-120"/>
+              </a:rPr>
+              <a:t>선행연구와 내 자리 — 2회차 다섯 편 정리표가 여기로 들어옵니다</a:t>
+            </a:r>
+            <a:endParaRPr lang="en-US" sz="1200" dirty="0"/>
+          </a:p>
+          <a:p>
+            <a:pPr marL="177800" indent="-177800">
+              <a:lnSpc>
+                <a:spcPct val="120000"/>
+              </a:lnSpc>
+              <a:spcAft>
+                <a:spcPts val="1100"/>
+              </a:spcAft>
+              <a:buSzPct val="100000"/>
+              <a:buChar char="•"/>
+            </a:pPr>
+            <a:r>
+              <a:rPr lang="en-US" sz="1200" dirty="0">
+                <a:solidFill>
+                  <a:srgbClr val="1F1F1F"/>
+                </a:solidFill>
+                <a:latin typeface="Pretendard" pitchFamily="34" charset="0"/>
+                <a:ea typeface="Pretendard" pitchFamily="34" charset="-122"/>
+                <a:cs typeface="Pretendard" pitchFamily="34" charset="-120"/>
+              </a:rPr>
+              <a:t>연구 방법과 절차 — 오늘 쓴 한 문단이 이 절 앞에 들어갑니다</a:t>
+            </a:r>
+            <a:endParaRPr lang="en-US" sz="1200" dirty="0"/>
+          </a:p>
+          <a:p>
+            <a:pPr marL="177800" indent="-177800">
+              <a:lnSpc>
+                <a:spcPct val="120000"/>
+              </a:lnSpc>
+              <a:spcAft>
+                <a:spcPts val="1100"/>
+              </a:spcAft>
+              <a:buSzPct val="100000"/>
+              <a:buChar char="•"/>
+            </a:pPr>
+            <a:r>
+              <a:rPr lang="en-US" sz="1200" dirty="0">
+                <a:solidFill>
+                  <a:srgbClr val="1F1F1F"/>
+                </a:solidFill>
+                <a:latin typeface="Pretendard" pitchFamily="34" charset="0"/>
+                <a:ea typeface="Pretendard" pitchFamily="34" charset="-122"/>
+                <a:cs typeface="Pretendard" pitchFamily="34" charset="-120"/>
+              </a:rPr>
+              <a:t>예상 기여 — 무엇이 새로운가, 어디에 보태는가</a:t>
+            </a:r>
+            <a:endParaRPr lang="en-US" sz="1200" dirty="0"/>
+          </a:p>
+          <a:p>
+            <a:pPr marL="177800" indent="-177800">
+              <a:lnSpc>
+                <a:spcPct val="120000"/>
+              </a:lnSpc>
+              <a:spcAft>
+                <a:spcPts val="1100"/>
+              </a:spcAft>
+              <a:buSzPct val="100000"/>
+              <a:buChar char="•"/>
+            </a:pPr>
+            <a:r>
+              <a:rPr lang="en-US" sz="1200" dirty="0">
+                <a:solidFill>
+                  <a:srgbClr val="1F1F1F"/>
+                </a:solidFill>
+                <a:latin typeface="Pretendard" pitchFamily="34" charset="0"/>
+                <a:ea typeface="Pretendard" pitchFamily="34" charset="-122"/>
+                <a:cs typeface="Pretendard" pitchFamily="34" charset="-120"/>
+              </a:rPr>
+              <a:t>일정 — 언제 무엇을 하는가</a:t>
+            </a:r>
+            <a:endParaRPr lang="en-US" sz="1200" dirty="0"/>
+          </a:p>
+        </p:txBody>
+      </p:sp>
+      <p:sp>
+        <p:nvSpPr>
+          <p:cNvPr id="13" name="Shape 11"/>
+          <p:cNvSpPr/>
+          <p:nvPr/>
+        </p:nvSpPr>
+        <p:spPr>
+          <a:xfrm>
+            <a:off x="6297016" y="1664208"/>
+            <a:ext cx="5254600" cy="3749040"/>
+          </a:xfrm>
+          <a:prstGeom prst="rect">
+            <a:avLst/>
+          </a:prstGeom>
+          <a:solidFill>
+            <a:srgbClr val="F2F2F2"/>
+          </a:solidFill>
+          <a:ln w="12700">
+            <a:solidFill>
+              <a:srgbClr val="DCDCDC"/>
+            </a:solidFill>
+            <a:prstDash val="solid"/>
+          </a:ln>
+        </p:spPr>
+      </p:sp>
+      <p:sp>
+        <p:nvSpPr>
+          <p:cNvPr id="14" name="Text 12"/>
+          <p:cNvSpPr/>
+          <p:nvPr/>
+        </p:nvSpPr>
+        <p:spPr>
+          <a:xfrm>
+            <a:off x="6717640" y="1993392"/>
+            <a:ext cx="4413352" cy="365760"/>
+          </a:xfrm>
+          <a:prstGeom prst="rect">
+            <a:avLst/>
+          </a:prstGeom>
+          <a:noFill/>
+          <a:ln/>
+        </p:spPr>
+        <p:txBody>
+          <a:bodyPr wrap="square" lIns="0" tIns="0" rIns="0" bIns="0" rtlCol="0" anchor="ctr"/>
+          <a:lstStyle/>
+          <a:p>
+            <a:pPr indent="0" marL="0">
+              <a:buNone/>
+            </a:pPr>
+            <a:r>
+              <a:rPr lang="en-US" sz="1700" dirty="0">
                 <a:solidFill>
                   <a:srgbClr val="111111"/>
                 </a:solidFill>
@@ -8143,22 +8811,47 @@
                 <a:ea typeface="Pretendard SemiBold" pitchFamily="34" charset="-122"/>
                 <a:cs typeface="Pretendard SemiBold" pitchFamily="34" charset="-120"/>
               </a:rPr>
-              <a:t>내 연구의 입장 한 문단</a:t>
-            </a:r>
-            <a:endParaRPr lang="en-US" sz="1400" dirty="0"/>
-          </a:p>
-        </p:txBody>
-      </p:sp>
-      <p:sp>
-        <p:nvSpPr>
-          <p:cNvPr id="18" name="Text 16"/>
-          <p:cNvSpPr/>
-          <p:nvPr/>
-        </p:nvSpPr>
-        <p:spPr>
-          <a:xfrm>
-            <a:off x="1426464" y="3145536"/>
-            <a:ext cx="5175504" cy="420624"/>
+              <a:t>진행 방식</a:t>
+            </a:r>
+            <a:endParaRPr lang="en-US" sz="1700" dirty="0"/>
+          </a:p>
+        </p:txBody>
+      </p:sp>
+      <p:sp>
+        <p:nvSpPr>
+          <p:cNvPr id="15" name="Shape 13"/>
+          <p:cNvSpPr/>
+          <p:nvPr/>
+        </p:nvSpPr>
+        <p:spPr>
+          <a:xfrm>
+            <a:off x="6717640" y="2414016"/>
+            <a:ext cx="4413352" cy="7315"/>
+          </a:xfrm>
+          <a:prstGeom prst="rect">
+            <a:avLst/>
+          </a:prstGeom>
+          <a:solidFill>
+            <a:srgbClr val="111111"/>
+          </a:solidFill>
+          <a:ln w="12700">
+            <a:solidFill>
+              <a:srgbClr val="111111"/>
+            </a:solidFill>
+            <a:prstDash val="solid"/>
+          </a:ln>
+        </p:spPr>
+      </p:sp>
+      <p:sp>
+        <p:nvSpPr>
+          <p:cNvPr id="16" name="Text 14"/>
+          <p:cNvSpPr/>
+          <p:nvPr/>
+        </p:nvSpPr>
+        <p:spPr>
+          <a:xfrm>
+            <a:off x="6717640" y="2523744"/>
+            <a:ext cx="4413352" cy="2706624"/>
           </a:xfrm>
           <a:prstGeom prst="rect">
             <a:avLst/>
@@ -8170,14 +8863,153 @@
           <a:bodyPr wrap="square" lIns="0" tIns="0" rIns="0" bIns="0" rtlCol="0" anchor="t"/>
           <a:lstStyle/>
           <a:p>
-            <a:pPr indent="0" marL="0">
+            <a:pPr marL="177800" indent="-177800">
               <a:lnSpc>
-                <a:spcPct val="122000"/>
+                <a:spcPct val="120000"/>
               </a:lnSpc>
-              <a:buNone/>
-            </a:pPr>
-            <a:r>
-              <a:rPr lang="en-US" sz="1100" dirty="0">
+              <a:spcAft>
+                <a:spcPts val="1100"/>
+              </a:spcAft>
+              <a:buSzPct val="100000"/>
+              <a:buChar char="•"/>
+            </a:pPr>
+            <a:r>
+              <a:rPr lang="en-US" sz="1200" dirty="0">
+                <a:solidFill>
+                  <a:srgbClr val="1F1F1F"/>
+                </a:solidFill>
+                <a:latin typeface="Pretendard" pitchFamily="34" charset="0"/>
+                <a:ea typeface="Pretendard" pitchFamily="34" charset="-122"/>
+                <a:cs typeface="Pretendard" pitchFamily="34" charset="-120"/>
+              </a:rPr>
+              <a:t>드래프트는 세션 48시간 전까지 공유 폴더에</a:t>
+            </a:r>
+            <a:endParaRPr lang="en-US" sz="1200" dirty="0"/>
+          </a:p>
+          <a:p>
+            <a:pPr marL="177800" indent="-177800">
+              <a:lnSpc>
+                <a:spcPct val="120000"/>
+              </a:lnSpc>
+              <a:spcAft>
+                <a:spcPts val="1100"/>
+              </a:spcAft>
+              <a:buSzPct val="100000"/>
+              <a:buChar char="•"/>
+            </a:pPr>
+            <a:r>
+              <a:rPr lang="en-US" sz="1200" dirty="0">
+                <a:solidFill>
+                  <a:srgbClr val="1F1F1F"/>
+                </a:solidFill>
+                <a:latin typeface="Pretendard" pitchFamily="34" charset="0"/>
+                <a:ea typeface="Pretendard" pitchFamily="34" charset="-122"/>
+                <a:cs typeface="Pretendard" pitchFamily="34" charset="-120"/>
+              </a:rPr>
+              <a:t>1인 발표와 질의 — 상호 리뷰가 절반입니다</a:t>
+            </a:r>
+            <a:endParaRPr lang="en-US" sz="1200" dirty="0"/>
+          </a:p>
+          <a:p>
+            <a:pPr marL="177800" indent="-177800">
+              <a:lnSpc>
+                <a:spcPct val="120000"/>
+              </a:lnSpc>
+              <a:spcAft>
+                <a:spcPts val="1100"/>
+              </a:spcAft>
+              <a:buSzPct val="100000"/>
+              <a:buChar char="•"/>
+            </a:pPr>
+            <a:r>
+              <a:rPr lang="en-US" sz="1200" dirty="0">
+                <a:solidFill>
+                  <a:srgbClr val="1F1F1F"/>
+                </a:solidFill>
+                <a:latin typeface="Pretendard" pitchFamily="34" charset="0"/>
+                <a:ea typeface="Pretendard" pitchFamily="34" charset="-122"/>
+                <a:cs typeface="Pretendard" pitchFamily="34" charset="-120"/>
+              </a:rPr>
+              <a:t>동료 한 사람당 질문 두 개를 준비해 옵니다</a:t>
+            </a:r>
+            <a:endParaRPr lang="en-US" sz="1200" dirty="0"/>
+          </a:p>
+          <a:p>
+            <a:pPr marL="177800" indent="-177800">
+              <a:lnSpc>
+                <a:spcPct val="120000"/>
+              </a:lnSpc>
+              <a:spcAft>
+                <a:spcPts val="1100"/>
+              </a:spcAft>
+              <a:buSzPct val="100000"/>
+              <a:buChar char="•"/>
+            </a:pPr>
+            <a:r>
+              <a:rPr lang="en-US" sz="1200" dirty="0">
+                <a:solidFill>
+                  <a:srgbClr val="1F1F1F"/>
+                </a:solidFill>
+                <a:latin typeface="Pretendard" pitchFamily="34" charset="0"/>
+                <a:ea typeface="Pretendard" pitchFamily="34" charset="-122"/>
+                <a:cs typeface="Pretendard" pitchFamily="34" charset="-120"/>
+              </a:rPr>
+              <a:t>보는 것은 하나 — 질문과 방법과 기여가 맞물리는가</a:t>
+            </a:r>
+            <a:endParaRPr lang="en-US" sz="1200" dirty="0"/>
+          </a:p>
+          <a:p>
+            <a:pPr marL="177800" indent="-177800">
+              <a:lnSpc>
+                <a:spcPct val="120000"/>
+              </a:lnSpc>
+              <a:spcAft>
+                <a:spcPts val="1100"/>
+              </a:spcAft>
+              <a:buSzPct val="100000"/>
+              <a:buChar char="•"/>
+            </a:pPr>
+            <a:r>
+              <a:rPr lang="en-US" sz="1200" dirty="0">
+                <a:solidFill>
+                  <a:srgbClr val="1F1F1F"/>
+                </a:solidFill>
+                <a:latin typeface="Pretendard" pitchFamily="34" charset="0"/>
+                <a:ea typeface="Pretendard" pitchFamily="34" charset="-122"/>
+                <a:cs typeface="Pretendard" pitchFamily="34" charset="-120"/>
+              </a:rPr>
+              <a:t>마지막에 학위 일정과 다음 단계를 함께 봅니다</a:t>
+            </a:r>
+            <a:endParaRPr lang="en-US" sz="1200" dirty="0"/>
+          </a:p>
+        </p:txBody>
+      </p:sp>
+      <p:sp>
+        <p:nvSpPr>
+          <p:cNvPr id="17" name="Text 15"/>
+          <p:cNvSpPr/>
+          <p:nvPr/>
+        </p:nvSpPr>
+        <p:spPr>
+          <a:xfrm>
+            <a:off x="640080" y="5541264"/>
+            <a:ext cx="10911535" cy="402336"/>
+          </a:xfrm>
+          <a:prstGeom prst="rect">
+            <a:avLst/>
+          </a:prstGeom>
+          <a:noFill/>
+          <a:ln/>
+        </p:spPr>
+        <p:txBody>
+          <a:bodyPr wrap="square" lIns="0" tIns="0" rIns="0" bIns="0" rtlCol="0" anchor="ctr"/>
+          <a:lstStyle/>
+          <a:p>
+            <a:pPr indent="0" marL="0">
+              <a:buNone/>
+            </a:pPr>
+            <a:r>
+              <a:rPr lang="en-US" sz="1200" dirty="0">
                 <a:solidFill>
                   <a:srgbClr val="6E6E6E"/>
                 </a:solidFill>
@@ -8185,21 +9017,2537 @@
                 <a:ea typeface="Pretendard" pitchFamily="34" charset="-122"/>
                 <a:cs typeface="Pretendard" pitchFamily="34" charset="-120"/>
               </a:rPr>
-              <a:t>오늘 본 비판과 확장 중 내 연구가 어느 자리에 서는지 한 문단으로 씁니다. 프로포절의 연구 방법 절 앞에 들어갑니다.</a:t>
-            </a:r>
-            <a:endParaRPr lang="en-US" sz="1100" dirty="0"/>
-          </a:p>
-        </p:txBody>
-      </p:sp>
-      <p:sp>
-        <p:nvSpPr>
-          <p:cNvPr id="19" name="Shape 17"/>
-          <p:cNvSpPr/>
-          <p:nvPr/>
-        </p:nvSpPr>
-        <p:spPr>
-          <a:xfrm>
-            <a:off x="640080" y="3767328"/>
+              <a:t>가장 흔한 문제는 질문은 큰데 방법이 작거나, 방법은 촘촘한데 그것으로 그 질문에 답할 수 없는 경우입니다.</a:t>
+            </a:r>
+            <a:endParaRPr lang="en-US" sz="1200" dirty="0"/>
+          </a:p>
+        </p:txBody>
+      </p:sp>
+      <p:sp>
+        <p:nvSpPr>
+          <p:cNvPr id="18" name="Shape 16"/>
+          <p:cNvSpPr/>
+          <p:nvPr/>
+        </p:nvSpPr>
+        <p:spPr>
+          <a:xfrm>
+            <a:off x="640080" y="6291072"/>
+            <a:ext cx="10911535" cy="7315"/>
+          </a:xfrm>
+          <a:prstGeom prst="rect">
+            <a:avLst/>
+          </a:prstGeom>
+          <a:solidFill>
+            <a:srgbClr val="DCDCDC"/>
+          </a:solidFill>
+          <a:ln w="12700">
+            <a:solidFill>
+              <a:srgbClr val="DCDCDC"/>
+            </a:solidFill>
+            <a:prstDash val="solid"/>
+          </a:ln>
+        </p:spPr>
+      </p:sp>
+      <p:sp>
+        <p:nvSpPr>
+          <p:cNvPr id="19" name="Text 17"/>
+          <p:cNvSpPr/>
+          <p:nvPr/>
+        </p:nvSpPr>
+        <p:spPr>
+          <a:xfrm>
+            <a:off x="640080" y="6382512"/>
+            <a:ext cx="7772400" cy="237744"/>
+          </a:xfrm>
+          <a:prstGeom prst="rect">
+            <a:avLst/>
+          </a:prstGeom>
+          <a:noFill/>
+          <a:ln/>
+        </p:spPr>
+        <p:txBody>
+          <a:bodyPr wrap="square" lIns="0" tIns="0" rIns="0" bIns="0" rtlCol="0" anchor="ctr"/>
+          <a:lstStyle/>
+          <a:p>
+            <a:pPr indent="0" marL="0">
+              <a:buNone/>
+            </a:pPr>
+            <a:r>
+              <a:rPr lang="en-US" sz="850" spc="40" kern="0" dirty="0">
+                <a:solidFill>
+                  <a:srgbClr val="9B9B9B"/>
+                </a:solidFill>
+                <a:latin typeface="Pretendard" pitchFamily="34" charset="0"/>
+                <a:ea typeface="Pretendard" pitchFamily="34" charset="-122"/>
+                <a:cs typeface="Pretendard" pitchFamily="34" charset="-120"/>
+              </a:rPr>
+              <a:t>컨셉트와 프로세스 · 7주차 도식의 바깥 — 비판과 확장</a:t>
+            </a:r>
+            <a:endParaRPr lang="en-US" sz="850" dirty="0"/>
+          </a:p>
+        </p:txBody>
+      </p:sp>
+      <p:sp>
+        <p:nvSpPr>
+          <p:cNvPr id="20" name="Text 18"/>
+          <p:cNvSpPr/>
+          <p:nvPr/>
+        </p:nvSpPr>
+        <p:spPr>
+          <a:xfrm>
+            <a:off x="10271455" y="6382512"/>
+            <a:ext cx="1280160" cy="237744"/>
+          </a:xfrm>
+          <a:prstGeom prst="rect">
+            <a:avLst/>
+          </a:prstGeom>
+          <a:noFill/>
+          <a:ln/>
+        </p:spPr>
+        <p:txBody>
+          <a:bodyPr wrap="square" lIns="0" tIns="0" rIns="0" bIns="0" rtlCol="0" anchor="ctr"/>
+          <a:lstStyle/>
+          <a:p>
+            <a:pPr algn="r" indent="0" marL="0">
+              <a:buNone/>
+            </a:pPr>
+            <a:r>
+              <a:rPr lang="en-US" sz="850" spc="140" kern="0" dirty="0">
+                <a:solidFill>
+                  <a:srgbClr val="9B9B9B"/>
+                </a:solidFill>
+                <a:latin typeface="Pretendard" pitchFamily="34" charset="0"/>
+                <a:ea typeface="Pretendard" pitchFamily="34" charset="-122"/>
+                <a:cs typeface="Pretendard" pitchFamily="34" charset="-120"/>
+              </a:rPr>
+              <a:t>P.09</a:t>
+            </a:r>
+            <a:endParaRPr lang="en-US" sz="850" dirty="0"/>
+          </a:p>
+        </p:txBody>
+      </p:sp>
+    </p:spTree>
+  </p:cSld>
+  <p:clrMapOvr>
+    <a:masterClrMapping/>
+  </p:clrMapOvr>
+</p:sld>
+</file>
+
+<file path=ppt/slides/slide16.xml><?xml version="1.0" encoding="utf-8"?>
+<p:sld xmlns:a="http://schemas.openxmlformats.org/drawingml/2006/main" xmlns:r="http://schemas.openxmlformats.org/officeDocument/2006/relationships" xmlns:p="http://schemas.openxmlformats.org/presentationml/2006/main">
+  <p:cSld name="Slide 16">
+    <p:bg>
+      <p:bgPr>
+        <a:solidFill>
+          <a:srgbClr val="FFFFFF"/>
+        </a:solidFill>
+      </p:bgPr>
+    </p:bg>
+    <p:spTree>
+      <p:nvGrpSpPr>
+        <p:cNvPr id="1" name=""/>
+        <p:cNvGrpSpPr/>
+        <p:nvPr/>
+      </p:nvGrpSpPr>
+      <p:grpSpPr>
+        <a:xfrm>
+          <a:off x="0" y="0"/>
+          <a:ext cx="0" cy="0"/>
+          <a:chOff x="0" y="0"/>
+          <a:chExt cx="0" cy="0"/>
+        </a:xfrm>
+      </p:grpSpPr>
+      <p:sp>
+        <p:nvSpPr>
+          <p:cNvPr id="2" name="Text 0"/>
+          <p:cNvSpPr/>
+          <p:nvPr/>
+        </p:nvSpPr>
+        <p:spPr>
+          <a:xfrm>
+            <a:off x="640080" y="274320"/>
+            <a:ext cx="3657600" cy="219456"/>
+          </a:xfrm>
+          <a:prstGeom prst="rect">
+            <a:avLst/>
+          </a:prstGeom>
+          <a:noFill/>
+          <a:ln/>
+        </p:spPr>
+        <p:txBody>
+          <a:bodyPr wrap="square" lIns="0" tIns="0" rIns="0" bIns="0" rtlCol="0" anchor="ctr"/>
+          <a:lstStyle/>
+          <a:p>
+            <a:pPr indent="0" marL="0">
+              <a:buNone/>
+            </a:pPr>
+            <a:r>
+              <a:rPr lang="en-US" sz="900" spc="120" kern="0" dirty="0">
+                <a:solidFill>
+                  <a:srgbClr val="8A8A8A"/>
+                </a:solidFill>
+                <a:latin typeface="Pretendard" pitchFamily="34" charset="0"/>
+                <a:ea typeface="Pretendard" pitchFamily="34" charset="-122"/>
+                <a:cs typeface="Pretendard" pitchFamily="34" charset="-120"/>
+              </a:rPr>
+              <a:t>컨셉트와 프로세스</a:t>
+            </a:r>
+            <a:endParaRPr lang="en-US" sz="900" dirty="0"/>
+          </a:p>
+        </p:txBody>
+      </p:sp>
+      <p:sp>
+        <p:nvSpPr>
+          <p:cNvPr id="3" name="Text 1"/>
+          <p:cNvSpPr/>
+          <p:nvPr/>
+        </p:nvSpPr>
+        <p:spPr>
+          <a:xfrm>
+            <a:off x="4480560" y="274320"/>
+            <a:ext cx="4572000" cy="219456"/>
+          </a:xfrm>
+          <a:prstGeom prst="rect">
+            <a:avLst/>
+          </a:prstGeom>
+          <a:noFill/>
+          <a:ln/>
+        </p:spPr>
+        <p:txBody>
+          <a:bodyPr wrap="square" lIns="0" tIns="0" rIns="0" bIns="0" rtlCol="0" anchor="ctr"/>
+          <a:lstStyle/>
+          <a:p>
+            <a:pPr algn="ctr" indent="0" marL="0">
+              <a:buNone/>
+            </a:pPr>
+            <a:r>
+              <a:rPr lang="en-US" sz="900" spc="120" kern="0" dirty="0">
+                <a:solidFill>
+                  <a:srgbClr val="8A8A8A"/>
+                </a:solidFill>
+                <a:latin typeface="Pretendard" pitchFamily="34" charset="0"/>
+                <a:ea typeface="Pretendard" pitchFamily="34" charset="-122"/>
+                <a:cs typeface="Pretendard" pitchFamily="34" charset="-120"/>
+              </a:rPr>
+              <a:t>PHASE 3 확장</a:t>
+            </a:r>
+            <a:endParaRPr lang="en-US" sz="900" dirty="0"/>
+          </a:p>
+        </p:txBody>
+      </p:sp>
+      <p:sp>
+        <p:nvSpPr>
+          <p:cNvPr id="4" name="Text 2"/>
+          <p:cNvSpPr/>
+          <p:nvPr/>
+        </p:nvSpPr>
+        <p:spPr>
+          <a:xfrm>
+            <a:off x="8808415" y="274320"/>
+            <a:ext cx="2743200" cy="219456"/>
+          </a:xfrm>
+          <a:prstGeom prst="rect">
+            <a:avLst/>
+          </a:prstGeom>
+          <a:noFill/>
+          <a:ln/>
+        </p:spPr>
+        <p:txBody>
+          <a:bodyPr wrap="square" lIns="0" tIns="0" rIns="0" bIns="0" rtlCol="0" anchor="ctr"/>
+          <a:lstStyle/>
+          <a:p>
+            <a:pPr algn="r" indent="0" marL="0">
+              <a:buNone/>
+            </a:pPr>
+            <a:r>
+              <a:rPr lang="en-US" sz="900" spc="200" kern="0" dirty="0">
+                <a:solidFill>
+                  <a:srgbClr val="8A8A8A"/>
+                </a:solidFill>
+                <a:latin typeface="Pretendard" pitchFamily="34" charset="0"/>
+                <a:ea typeface="Pretendard" pitchFamily="34" charset="-122"/>
+                <a:cs typeface="Pretendard" pitchFamily="34" charset="-120"/>
+              </a:rPr>
+              <a:t>WEEK 07</a:t>
+            </a:r>
+            <a:endParaRPr lang="en-US" sz="900" dirty="0"/>
+          </a:p>
+        </p:txBody>
+      </p:sp>
+      <p:sp>
+        <p:nvSpPr>
+          <p:cNvPr id="5" name="Shape 3"/>
+          <p:cNvSpPr/>
+          <p:nvPr/>
+        </p:nvSpPr>
+        <p:spPr>
+          <a:xfrm>
+            <a:off x="640080" y="548640"/>
+            <a:ext cx="10911535" cy="7315"/>
+          </a:xfrm>
+          <a:prstGeom prst="rect">
+            <a:avLst/>
+          </a:prstGeom>
+          <a:solidFill>
+            <a:srgbClr val="DCDCDC"/>
+          </a:solidFill>
+          <a:ln w="12700">
+            <a:solidFill>
+              <a:srgbClr val="DCDCDC"/>
+            </a:solidFill>
+            <a:prstDash val="solid"/>
+          </a:ln>
+        </p:spPr>
+      </p:sp>
+      <p:sp>
+        <p:nvSpPr>
+          <p:cNvPr id="6" name="Text 4"/>
+          <p:cNvSpPr/>
+          <p:nvPr/>
+        </p:nvSpPr>
+        <p:spPr>
+          <a:xfrm>
+            <a:off x="640080" y="640080"/>
+            <a:ext cx="10911535" cy="219456"/>
+          </a:xfrm>
+          <a:prstGeom prst="rect">
+            <a:avLst/>
+          </a:prstGeom>
+          <a:noFill/>
+          <a:ln/>
+        </p:spPr>
+        <p:txBody>
+          <a:bodyPr wrap="square" lIns="0" tIns="0" rIns="0" bIns="0" rtlCol="0" anchor="ctr"/>
+          <a:lstStyle/>
+          <a:p>
+            <a:pPr indent="0" marL="0">
+              <a:buNone/>
+            </a:pPr>
+            <a:r>
+              <a:rPr lang="en-US" sz="950" spc="260" kern="0" dirty="0">
+                <a:solidFill>
+                  <a:srgbClr val="8A8A8A"/>
+                </a:solidFill>
+                <a:latin typeface="Pretendard" pitchFamily="34" charset="0"/>
+                <a:ea typeface="Pretendard" pitchFamily="34" charset="-122"/>
+                <a:cs typeface="Pretendard" pitchFamily="34" charset="-120"/>
+              </a:rPr>
+              <a:t>SUBMIT</a:t>
+            </a:r>
+            <a:endParaRPr lang="en-US" sz="950" dirty="0"/>
+          </a:p>
+        </p:txBody>
+      </p:sp>
+      <p:sp>
+        <p:nvSpPr>
+          <p:cNvPr id="7" name="Text 5"/>
+          <p:cNvSpPr/>
+          <p:nvPr/>
+        </p:nvSpPr>
+        <p:spPr>
+          <a:xfrm>
+            <a:off x="640080" y="859536"/>
+            <a:ext cx="10911535" cy="475488"/>
+          </a:xfrm>
+          <a:prstGeom prst="rect">
+            <a:avLst/>
+          </a:prstGeom>
+          <a:noFill/>
+          <a:ln/>
+        </p:spPr>
+        <p:txBody>
+          <a:bodyPr wrap="square" lIns="0" tIns="0" rIns="0" bIns="0" rtlCol="0" anchor="ctr"/>
+          <a:lstStyle/>
+          <a:p>
+            <a:pPr indent="0" marL="0">
+              <a:buNone/>
+            </a:pPr>
+            <a:r>
+              <a:rPr lang="en-US" sz="3000" dirty="0">
+                <a:solidFill>
+                  <a:srgbClr val="111111"/>
+                </a:solidFill>
+                <a:latin typeface="Pretendard SemiBold" pitchFamily="34" charset="0"/>
+                <a:ea typeface="Pretendard SemiBold" pitchFamily="34" charset="-122"/>
+                <a:cs typeface="Pretendard SemiBold" pitchFamily="34" charset="-120"/>
+              </a:rPr>
+              <a:t>다음 회차까지 확인할 것</a:t>
+            </a:r>
+            <a:endParaRPr lang="en-US" sz="3000" dirty="0"/>
+          </a:p>
+        </p:txBody>
+      </p:sp>
+      <p:sp>
+        <p:nvSpPr>
+          <p:cNvPr id="8" name="Text 6"/>
+          <p:cNvSpPr/>
+          <p:nvPr/>
+        </p:nvSpPr>
+        <p:spPr>
+          <a:xfrm>
+            <a:off x="640080" y="1371600"/>
+            <a:ext cx="10911535" cy="219456"/>
+          </a:xfrm>
+          <a:prstGeom prst="rect">
+            <a:avLst/>
+          </a:prstGeom>
+          <a:noFill/>
+          <a:ln/>
+        </p:spPr>
+        <p:txBody>
+          <a:bodyPr wrap="square" lIns="0" tIns="0" rIns="0" bIns="0" rtlCol="0" anchor="ctr"/>
+          <a:lstStyle/>
+          <a:p>
+            <a:pPr indent="0" marL="0">
+              <a:buNone/>
+            </a:pPr>
+            <a:r>
+              <a:rPr lang="en-US" sz="1150" dirty="0">
+                <a:solidFill>
+                  <a:srgbClr val="6E6E6E"/>
+                </a:solidFill>
+                <a:latin typeface="Pretendard" pitchFamily="34" charset="0"/>
+                <a:ea typeface="Pretendard" pitchFamily="34" charset="-122"/>
+                <a:cs typeface="Pretendard" pitchFamily="34" charset="-120"/>
+              </a:rPr>
+              <a:t>마지막 회차입니다. 2주가 있습니다.</a:t>
+            </a:r>
+            <a:endParaRPr lang="en-US" sz="1150" dirty="0"/>
+          </a:p>
+        </p:txBody>
+      </p:sp>
+      <p:sp>
+        <p:nvSpPr>
+          <p:cNvPr id="9" name="Shape 7"/>
+          <p:cNvSpPr/>
+          <p:nvPr/>
+        </p:nvSpPr>
+        <p:spPr>
+          <a:xfrm>
+            <a:off x="640080" y="1755648"/>
+            <a:ext cx="5254600" cy="389273"/>
+          </a:xfrm>
+          <a:prstGeom prst="rect">
+            <a:avLst/>
+          </a:prstGeom>
+          <a:solidFill>
+            <a:srgbClr val="F2F2F2"/>
+          </a:solidFill>
+          <a:ln w="12700">
+            <a:solidFill>
+              <a:srgbClr val="F2F2F2"/>
+            </a:solidFill>
+            <a:prstDash val="solid"/>
+          </a:ln>
+        </p:spPr>
+      </p:sp>
+      <p:sp>
+        <p:nvSpPr>
+          <p:cNvPr id="10" name="Shape 8"/>
+          <p:cNvSpPr/>
+          <p:nvPr/>
+        </p:nvSpPr>
+        <p:spPr>
+          <a:xfrm>
+            <a:off x="914400" y="1822269"/>
+            <a:ext cx="256032" cy="256032"/>
+          </a:xfrm>
+          <a:prstGeom prst="ellipse">
+            <a:avLst/>
+          </a:prstGeom>
+          <a:solidFill>
+            <a:srgbClr val="F2F2F2"/>
+          </a:solidFill>
+          <a:ln w="12700">
+            <a:solidFill>
+              <a:srgbClr val="111111"/>
+            </a:solidFill>
+            <a:prstDash val="solid"/>
+          </a:ln>
+        </p:spPr>
+      </p:sp>
+      <p:sp>
+        <p:nvSpPr>
+          <p:cNvPr id="11" name="Text 9"/>
+          <p:cNvSpPr/>
+          <p:nvPr/>
+        </p:nvSpPr>
+        <p:spPr>
+          <a:xfrm>
+            <a:off x="914400" y="1822269"/>
+            <a:ext cx="256032" cy="256032"/>
+          </a:xfrm>
+          <a:prstGeom prst="rect">
+            <a:avLst/>
+          </a:prstGeom>
+          <a:noFill/>
+          <a:ln/>
+        </p:spPr>
+        <p:txBody>
+          <a:bodyPr wrap="square" lIns="0" tIns="0" rIns="0" bIns="0" rtlCol="0" anchor="ctr"/>
+          <a:lstStyle/>
+          <a:p>
+            <a:pPr algn="ctr" indent="0" marL="0">
+              <a:buNone/>
+            </a:pPr>
+            <a:r>
+              <a:rPr lang="en-US" sz="800" b="1" dirty="0">
+                <a:solidFill>
+                  <a:srgbClr val="111111"/>
+                </a:solidFill>
+                <a:latin typeface="Pretendard" pitchFamily="34" charset="0"/>
+                <a:ea typeface="Pretendard" pitchFamily="34" charset="-122"/>
+                <a:cs typeface="Pretendard" pitchFamily="34" charset="-120"/>
+              </a:rPr>
+              <a:t>01</a:t>
+            </a:r>
+            <a:endParaRPr lang="en-US" sz="800" dirty="0"/>
+          </a:p>
+        </p:txBody>
+      </p:sp>
+      <p:sp>
+        <p:nvSpPr>
+          <p:cNvPr id="12" name="Text 10"/>
+          <p:cNvSpPr/>
+          <p:nvPr/>
+        </p:nvSpPr>
+        <p:spPr>
+          <a:xfrm>
+            <a:off x="1298448" y="1755648"/>
+            <a:ext cx="4321912" cy="389273"/>
+          </a:xfrm>
+          <a:prstGeom prst="rect">
+            <a:avLst/>
+          </a:prstGeom>
+          <a:noFill/>
+          <a:ln/>
+        </p:spPr>
+        <p:txBody>
+          <a:bodyPr wrap="square" lIns="0" tIns="0" rIns="0" bIns="0" rtlCol="0" anchor="ctr"/>
+          <a:lstStyle/>
+          <a:p>
+            <a:pPr indent="0" marL="0">
+              <a:buNone/>
+            </a:pPr>
+            <a:r>
+              <a:rPr lang="en-US" sz="1050" dirty="0">
+                <a:solidFill>
+                  <a:srgbClr val="111111"/>
+                </a:solidFill>
+                <a:latin typeface="Pretendard" pitchFamily="34" charset="0"/>
+                <a:ea typeface="Pretendard" pitchFamily="34" charset="-122"/>
+                <a:cs typeface="Pretendard" pitchFamily="34" charset="-120"/>
+              </a:rPr>
+              <a:t>프로포절이 여섯 절로 되어 있다</a:t>
+            </a:r>
+            <a:endParaRPr lang="en-US" sz="1050" dirty="0"/>
+          </a:p>
+        </p:txBody>
+      </p:sp>
+      <p:sp>
+        <p:nvSpPr>
+          <p:cNvPr id="13" name="Shape 11"/>
+          <p:cNvSpPr/>
+          <p:nvPr/>
+        </p:nvSpPr>
+        <p:spPr>
+          <a:xfrm>
+            <a:off x="640080" y="2291225"/>
+            <a:ext cx="5254600" cy="389273"/>
+          </a:xfrm>
+          <a:prstGeom prst="rect">
+            <a:avLst/>
+          </a:prstGeom>
+          <a:solidFill>
+            <a:srgbClr val="F2F2F2"/>
+          </a:solidFill>
+          <a:ln w="12700">
+            <a:solidFill>
+              <a:srgbClr val="F2F2F2"/>
+            </a:solidFill>
+            <a:prstDash val="solid"/>
+          </a:ln>
+        </p:spPr>
+      </p:sp>
+      <p:sp>
+        <p:nvSpPr>
+          <p:cNvPr id="14" name="Shape 12"/>
+          <p:cNvSpPr/>
+          <p:nvPr/>
+        </p:nvSpPr>
+        <p:spPr>
+          <a:xfrm>
+            <a:off x="914400" y="2357846"/>
+            <a:ext cx="256032" cy="256032"/>
+          </a:xfrm>
+          <a:prstGeom prst="ellipse">
+            <a:avLst/>
+          </a:prstGeom>
+          <a:solidFill>
+            <a:srgbClr val="F2F2F2"/>
+          </a:solidFill>
+          <a:ln w="12700">
+            <a:solidFill>
+              <a:srgbClr val="111111"/>
+            </a:solidFill>
+            <a:prstDash val="solid"/>
+          </a:ln>
+        </p:spPr>
+      </p:sp>
+      <p:sp>
+        <p:nvSpPr>
+          <p:cNvPr id="15" name="Text 13"/>
+          <p:cNvSpPr/>
+          <p:nvPr/>
+        </p:nvSpPr>
+        <p:spPr>
+          <a:xfrm>
+            <a:off x="914400" y="2357846"/>
+            <a:ext cx="256032" cy="256032"/>
+          </a:xfrm>
+          <a:prstGeom prst="rect">
+            <a:avLst/>
+          </a:prstGeom>
+          <a:noFill/>
+          <a:ln/>
+        </p:spPr>
+        <p:txBody>
+          <a:bodyPr wrap="square" lIns="0" tIns="0" rIns="0" bIns="0" rtlCol="0" anchor="ctr"/>
+          <a:lstStyle/>
+          <a:p>
+            <a:pPr algn="ctr" indent="0" marL="0">
+              <a:buNone/>
+            </a:pPr>
+            <a:r>
+              <a:rPr lang="en-US" sz="800" b="1" dirty="0">
+                <a:solidFill>
+                  <a:srgbClr val="111111"/>
+                </a:solidFill>
+                <a:latin typeface="Pretendard" pitchFamily="34" charset="0"/>
+                <a:ea typeface="Pretendard" pitchFamily="34" charset="-122"/>
+                <a:cs typeface="Pretendard" pitchFamily="34" charset="-120"/>
+              </a:rPr>
+              <a:t>02</a:t>
+            </a:r>
+            <a:endParaRPr lang="en-US" sz="800" dirty="0"/>
+          </a:p>
+        </p:txBody>
+      </p:sp>
+      <p:sp>
+        <p:nvSpPr>
+          <p:cNvPr id="16" name="Text 14"/>
+          <p:cNvSpPr/>
+          <p:nvPr/>
+        </p:nvSpPr>
+        <p:spPr>
+          <a:xfrm>
+            <a:off x="1298448" y="2291225"/>
+            <a:ext cx="4321912" cy="389273"/>
+          </a:xfrm>
+          <a:prstGeom prst="rect">
+            <a:avLst/>
+          </a:prstGeom>
+          <a:noFill/>
+          <a:ln/>
+        </p:spPr>
+        <p:txBody>
+          <a:bodyPr wrap="square" lIns="0" tIns="0" rIns="0" bIns="0" rtlCol="0" anchor="ctr"/>
+          <a:lstStyle/>
+          <a:p>
+            <a:pPr indent="0" marL="0">
+              <a:buNone/>
+            </a:pPr>
+            <a:r>
+              <a:rPr lang="en-US" sz="1050" dirty="0">
+                <a:solidFill>
+                  <a:srgbClr val="111111"/>
+                </a:solidFill>
+                <a:latin typeface="Pretendard" pitchFamily="34" charset="0"/>
+                <a:ea typeface="Pretendard" pitchFamily="34" charset="-122"/>
+                <a:cs typeface="Pretendard" pitchFamily="34" charset="-120"/>
+              </a:rPr>
+              <a:t>연구 질문이 한 문장으로 적혀 있다</a:t>
+            </a:r>
+            <a:endParaRPr lang="en-US" sz="1050" dirty="0"/>
+          </a:p>
+        </p:txBody>
+      </p:sp>
+      <p:sp>
+        <p:nvSpPr>
+          <p:cNvPr id="17" name="Shape 15"/>
+          <p:cNvSpPr/>
+          <p:nvPr/>
+        </p:nvSpPr>
+        <p:spPr>
+          <a:xfrm>
+            <a:off x="640080" y="2826802"/>
+            <a:ext cx="5254600" cy="389273"/>
+          </a:xfrm>
+          <a:prstGeom prst="rect">
+            <a:avLst/>
+          </a:prstGeom>
+          <a:solidFill>
+            <a:srgbClr val="F2F2F2"/>
+          </a:solidFill>
+          <a:ln w="12700">
+            <a:solidFill>
+              <a:srgbClr val="F2F2F2"/>
+            </a:solidFill>
+            <a:prstDash val="solid"/>
+          </a:ln>
+        </p:spPr>
+      </p:sp>
+      <p:sp>
+        <p:nvSpPr>
+          <p:cNvPr id="18" name="Shape 16"/>
+          <p:cNvSpPr/>
+          <p:nvPr/>
+        </p:nvSpPr>
+        <p:spPr>
+          <a:xfrm>
+            <a:off x="914400" y="2893423"/>
+            <a:ext cx="256032" cy="256032"/>
+          </a:xfrm>
+          <a:prstGeom prst="ellipse">
+            <a:avLst/>
+          </a:prstGeom>
+          <a:solidFill>
+            <a:srgbClr val="F2F2F2"/>
+          </a:solidFill>
+          <a:ln w="12700">
+            <a:solidFill>
+              <a:srgbClr val="111111"/>
+            </a:solidFill>
+            <a:prstDash val="solid"/>
+          </a:ln>
+        </p:spPr>
+      </p:sp>
+      <p:sp>
+        <p:nvSpPr>
+          <p:cNvPr id="19" name="Text 17"/>
+          <p:cNvSpPr/>
+          <p:nvPr/>
+        </p:nvSpPr>
+        <p:spPr>
+          <a:xfrm>
+            <a:off x="914400" y="2893423"/>
+            <a:ext cx="256032" cy="256032"/>
+          </a:xfrm>
+          <a:prstGeom prst="rect">
+            <a:avLst/>
+          </a:prstGeom>
+          <a:noFill/>
+          <a:ln/>
+        </p:spPr>
+        <p:txBody>
+          <a:bodyPr wrap="square" lIns="0" tIns="0" rIns="0" bIns="0" rtlCol="0" anchor="ctr"/>
+          <a:lstStyle/>
+          <a:p>
+            <a:pPr algn="ctr" indent="0" marL="0">
+              <a:buNone/>
+            </a:pPr>
+            <a:r>
+              <a:rPr lang="en-US" sz="800" b="1" dirty="0">
+                <a:solidFill>
+                  <a:srgbClr val="111111"/>
+                </a:solidFill>
+                <a:latin typeface="Pretendard" pitchFamily="34" charset="0"/>
+                <a:ea typeface="Pretendard" pitchFamily="34" charset="-122"/>
+                <a:cs typeface="Pretendard" pitchFamily="34" charset="-120"/>
+              </a:rPr>
+              <a:t>03</a:t>
+            </a:r>
+            <a:endParaRPr lang="en-US" sz="800" dirty="0"/>
+          </a:p>
+        </p:txBody>
+      </p:sp>
+      <p:sp>
+        <p:nvSpPr>
+          <p:cNvPr id="20" name="Text 18"/>
+          <p:cNvSpPr/>
+          <p:nvPr/>
+        </p:nvSpPr>
+        <p:spPr>
+          <a:xfrm>
+            <a:off x="1298448" y="2826802"/>
+            <a:ext cx="4321912" cy="389273"/>
+          </a:xfrm>
+          <a:prstGeom prst="rect">
+            <a:avLst/>
+          </a:prstGeom>
+          <a:noFill/>
+          <a:ln/>
+        </p:spPr>
+        <p:txBody>
+          <a:bodyPr wrap="square" lIns="0" tIns="0" rIns="0" bIns="0" rtlCol="0" anchor="ctr"/>
+          <a:lstStyle/>
+          <a:p>
+            <a:pPr indent="0" marL="0">
+              <a:buNone/>
+            </a:pPr>
+            <a:r>
+              <a:rPr lang="en-US" sz="1050" dirty="0">
+                <a:solidFill>
+                  <a:srgbClr val="111111"/>
+                </a:solidFill>
+                <a:latin typeface="Pretendard" pitchFamily="34" charset="0"/>
+                <a:ea typeface="Pretendard" pitchFamily="34" charset="-122"/>
+                <a:cs typeface="Pretendard" pitchFamily="34" charset="-120"/>
+              </a:rPr>
+              <a:t>선행연구 다섯 편이 목록이 아니라 본문에 인용되어 있다</a:t>
+            </a:r>
+            <a:endParaRPr lang="en-US" sz="1050" dirty="0"/>
+          </a:p>
+        </p:txBody>
+      </p:sp>
+      <p:sp>
+        <p:nvSpPr>
+          <p:cNvPr id="21" name="Shape 19"/>
+          <p:cNvSpPr/>
+          <p:nvPr/>
+        </p:nvSpPr>
+        <p:spPr>
+          <a:xfrm>
+            <a:off x="640080" y="3362379"/>
+            <a:ext cx="5254600" cy="389273"/>
+          </a:xfrm>
+          <a:prstGeom prst="rect">
+            <a:avLst/>
+          </a:prstGeom>
+          <a:solidFill>
+            <a:srgbClr val="F2F2F2"/>
+          </a:solidFill>
+          <a:ln w="12700">
+            <a:solidFill>
+              <a:srgbClr val="F2F2F2"/>
+            </a:solidFill>
+            <a:prstDash val="solid"/>
+          </a:ln>
+        </p:spPr>
+      </p:sp>
+      <p:sp>
+        <p:nvSpPr>
+          <p:cNvPr id="22" name="Shape 20"/>
+          <p:cNvSpPr/>
+          <p:nvPr/>
+        </p:nvSpPr>
+        <p:spPr>
+          <a:xfrm>
+            <a:off x="914400" y="3429000"/>
+            <a:ext cx="256032" cy="256032"/>
+          </a:xfrm>
+          <a:prstGeom prst="ellipse">
+            <a:avLst/>
+          </a:prstGeom>
+          <a:solidFill>
+            <a:srgbClr val="F2F2F2"/>
+          </a:solidFill>
+          <a:ln w="12700">
+            <a:solidFill>
+              <a:srgbClr val="111111"/>
+            </a:solidFill>
+            <a:prstDash val="solid"/>
+          </a:ln>
+        </p:spPr>
+      </p:sp>
+      <p:sp>
+        <p:nvSpPr>
+          <p:cNvPr id="23" name="Text 21"/>
+          <p:cNvSpPr/>
+          <p:nvPr/>
+        </p:nvSpPr>
+        <p:spPr>
+          <a:xfrm>
+            <a:off x="914400" y="3429000"/>
+            <a:ext cx="256032" cy="256032"/>
+          </a:xfrm>
+          <a:prstGeom prst="rect">
+            <a:avLst/>
+          </a:prstGeom>
+          <a:noFill/>
+          <a:ln/>
+        </p:spPr>
+        <p:txBody>
+          <a:bodyPr wrap="square" lIns="0" tIns="0" rIns="0" bIns="0" rtlCol="0" anchor="ctr"/>
+          <a:lstStyle/>
+          <a:p>
+            <a:pPr algn="ctr" indent="0" marL="0">
+              <a:buNone/>
+            </a:pPr>
+            <a:r>
+              <a:rPr lang="en-US" sz="800" b="1" dirty="0">
+                <a:solidFill>
+                  <a:srgbClr val="111111"/>
+                </a:solidFill>
+                <a:latin typeface="Pretendard" pitchFamily="34" charset="0"/>
+                <a:ea typeface="Pretendard" pitchFamily="34" charset="-122"/>
+                <a:cs typeface="Pretendard" pitchFamily="34" charset="-120"/>
+              </a:rPr>
+              <a:t>04</a:t>
+            </a:r>
+            <a:endParaRPr lang="en-US" sz="800" dirty="0"/>
+          </a:p>
+        </p:txBody>
+      </p:sp>
+      <p:sp>
+        <p:nvSpPr>
+          <p:cNvPr id="24" name="Text 22"/>
+          <p:cNvSpPr/>
+          <p:nvPr/>
+        </p:nvSpPr>
+        <p:spPr>
+          <a:xfrm>
+            <a:off x="1298448" y="3362379"/>
+            <a:ext cx="4321912" cy="389273"/>
+          </a:xfrm>
+          <a:prstGeom prst="rect">
+            <a:avLst/>
+          </a:prstGeom>
+          <a:noFill/>
+          <a:ln/>
+        </p:spPr>
+        <p:txBody>
+          <a:bodyPr wrap="square" lIns="0" tIns="0" rIns="0" bIns="0" rtlCol="0" anchor="ctr"/>
+          <a:lstStyle/>
+          <a:p>
+            <a:pPr indent="0" marL="0">
+              <a:buNone/>
+            </a:pPr>
+            <a:r>
+              <a:rPr lang="en-US" sz="1050" dirty="0">
+                <a:solidFill>
+                  <a:srgbClr val="111111"/>
+                </a:solidFill>
+                <a:latin typeface="Pretendard" pitchFamily="34" charset="0"/>
+                <a:ea typeface="Pretendard" pitchFamily="34" charset="-122"/>
+                <a:cs typeface="Pretendard" pitchFamily="34" charset="-120"/>
+              </a:rPr>
+              <a:t>다섯 편이 배경 · 질문 · 방법 · 기여 네 절에 각각 흔적을 남겼다</a:t>
+            </a:r>
+            <a:endParaRPr lang="en-US" sz="1050" dirty="0"/>
+          </a:p>
+        </p:txBody>
+      </p:sp>
+      <p:sp>
+        <p:nvSpPr>
+          <p:cNvPr id="25" name="Shape 23"/>
+          <p:cNvSpPr/>
+          <p:nvPr/>
+        </p:nvSpPr>
+        <p:spPr>
+          <a:xfrm>
+            <a:off x="640080" y="3897957"/>
+            <a:ext cx="5254600" cy="389273"/>
+          </a:xfrm>
+          <a:prstGeom prst="rect">
+            <a:avLst/>
+          </a:prstGeom>
+          <a:solidFill>
+            <a:srgbClr val="F2F2F2"/>
+          </a:solidFill>
+          <a:ln w="12700">
+            <a:solidFill>
+              <a:srgbClr val="F2F2F2"/>
+            </a:solidFill>
+            <a:prstDash val="solid"/>
+          </a:ln>
+        </p:spPr>
+      </p:sp>
+      <p:sp>
+        <p:nvSpPr>
+          <p:cNvPr id="26" name="Shape 24"/>
+          <p:cNvSpPr/>
+          <p:nvPr/>
+        </p:nvSpPr>
+        <p:spPr>
+          <a:xfrm>
+            <a:off x="914400" y="3964577"/>
+            <a:ext cx="256032" cy="256032"/>
+          </a:xfrm>
+          <a:prstGeom prst="ellipse">
+            <a:avLst/>
+          </a:prstGeom>
+          <a:solidFill>
+            <a:srgbClr val="F2F2F2"/>
+          </a:solidFill>
+          <a:ln w="12700">
+            <a:solidFill>
+              <a:srgbClr val="111111"/>
+            </a:solidFill>
+            <a:prstDash val="solid"/>
+          </a:ln>
+        </p:spPr>
+      </p:sp>
+      <p:sp>
+        <p:nvSpPr>
+          <p:cNvPr id="27" name="Text 25"/>
+          <p:cNvSpPr/>
+          <p:nvPr/>
+        </p:nvSpPr>
+        <p:spPr>
+          <a:xfrm>
+            <a:off x="914400" y="3964577"/>
+            <a:ext cx="256032" cy="256032"/>
+          </a:xfrm>
+          <a:prstGeom prst="rect">
+            <a:avLst/>
+          </a:prstGeom>
+          <a:noFill/>
+          <a:ln/>
+        </p:spPr>
+        <p:txBody>
+          <a:bodyPr wrap="square" lIns="0" tIns="0" rIns="0" bIns="0" rtlCol="0" anchor="ctr"/>
+          <a:lstStyle/>
+          <a:p>
+            <a:pPr algn="ctr" indent="0" marL="0">
+              <a:buNone/>
+            </a:pPr>
+            <a:r>
+              <a:rPr lang="en-US" sz="800" b="1" dirty="0">
+                <a:solidFill>
+                  <a:srgbClr val="111111"/>
+                </a:solidFill>
+                <a:latin typeface="Pretendard" pitchFamily="34" charset="0"/>
+                <a:ea typeface="Pretendard" pitchFamily="34" charset="-122"/>
+                <a:cs typeface="Pretendard" pitchFamily="34" charset="-120"/>
+              </a:rPr>
+              <a:t>05</a:t>
+            </a:r>
+            <a:endParaRPr lang="en-US" sz="800" dirty="0"/>
+          </a:p>
+        </p:txBody>
+      </p:sp>
+      <p:sp>
+        <p:nvSpPr>
+          <p:cNvPr id="28" name="Text 26"/>
+          <p:cNvSpPr/>
+          <p:nvPr/>
+        </p:nvSpPr>
+        <p:spPr>
+          <a:xfrm>
+            <a:off x="1298448" y="3897957"/>
+            <a:ext cx="4321912" cy="389273"/>
+          </a:xfrm>
+          <a:prstGeom prst="rect">
+            <a:avLst/>
+          </a:prstGeom>
+          <a:noFill/>
+          <a:ln/>
+        </p:spPr>
+        <p:txBody>
+          <a:bodyPr wrap="square" lIns="0" tIns="0" rIns="0" bIns="0" rtlCol="0" anchor="ctr"/>
+          <a:lstStyle/>
+          <a:p>
+            <a:pPr indent="0" marL="0">
+              <a:buNone/>
+            </a:pPr>
+            <a:r>
+              <a:rPr lang="en-US" sz="1050" dirty="0">
+                <a:solidFill>
+                  <a:srgbClr val="111111"/>
+                </a:solidFill>
+                <a:latin typeface="Pretendard" pitchFamily="34" charset="0"/>
+                <a:ea typeface="Pretendard" pitchFamily="34" charset="-122"/>
+                <a:cs typeface="Pretendard" pitchFamily="34" charset="-120"/>
+              </a:rPr>
+              <a:t>가장 가까운 한 편의 목차와 내 목차를 나란히 놓았다</a:t>
+            </a:r>
+            <a:endParaRPr lang="en-US" sz="1050" dirty="0"/>
+          </a:p>
+        </p:txBody>
+      </p:sp>
+      <p:sp>
+        <p:nvSpPr>
+          <p:cNvPr id="29" name="Shape 27"/>
+          <p:cNvSpPr/>
+          <p:nvPr/>
+        </p:nvSpPr>
+        <p:spPr>
+          <a:xfrm>
+            <a:off x="640080" y="4433534"/>
+            <a:ext cx="5254600" cy="389273"/>
+          </a:xfrm>
+          <a:prstGeom prst="rect">
+            <a:avLst/>
+          </a:prstGeom>
+          <a:solidFill>
+            <a:srgbClr val="F2F2F2"/>
+          </a:solidFill>
+          <a:ln w="12700">
+            <a:solidFill>
+              <a:srgbClr val="F2F2F2"/>
+            </a:solidFill>
+            <a:prstDash val="solid"/>
+          </a:ln>
+        </p:spPr>
+      </p:sp>
+      <p:sp>
+        <p:nvSpPr>
+          <p:cNvPr id="30" name="Shape 28"/>
+          <p:cNvSpPr/>
+          <p:nvPr/>
+        </p:nvSpPr>
+        <p:spPr>
+          <a:xfrm>
+            <a:off x="914400" y="4500154"/>
+            <a:ext cx="256032" cy="256032"/>
+          </a:xfrm>
+          <a:prstGeom prst="ellipse">
+            <a:avLst/>
+          </a:prstGeom>
+          <a:solidFill>
+            <a:srgbClr val="F2F2F2"/>
+          </a:solidFill>
+          <a:ln w="12700">
+            <a:solidFill>
+              <a:srgbClr val="111111"/>
+            </a:solidFill>
+            <a:prstDash val="solid"/>
+          </a:ln>
+        </p:spPr>
+      </p:sp>
+      <p:sp>
+        <p:nvSpPr>
+          <p:cNvPr id="31" name="Text 29"/>
+          <p:cNvSpPr/>
+          <p:nvPr/>
+        </p:nvSpPr>
+        <p:spPr>
+          <a:xfrm>
+            <a:off x="914400" y="4500154"/>
+            <a:ext cx="256032" cy="256032"/>
+          </a:xfrm>
+          <a:prstGeom prst="rect">
+            <a:avLst/>
+          </a:prstGeom>
+          <a:noFill/>
+          <a:ln/>
+        </p:spPr>
+        <p:txBody>
+          <a:bodyPr wrap="square" lIns="0" tIns="0" rIns="0" bIns="0" rtlCol="0" anchor="ctr"/>
+          <a:lstStyle/>
+          <a:p>
+            <a:pPr algn="ctr" indent="0" marL="0">
+              <a:buNone/>
+            </a:pPr>
+            <a:r>
+              <a:rPr lang="en-US" sz="800" b="1" dirty="0">
+                <a:solidFill>
+                  <a:srgbClr val="111111"/>
+                </a:solidFill>
+                <a:latin typeface="Pretendard" pitchFamily="34" charset="0"/>
+                <a:ea typeface="Pretendard" pitchFamily="34" charset="-122"/>
+                <a:cs typeface="Pretendard" pitchFamily="34" charset="-120"/>
+              </a:rPr>
+              <a:t>06</a:t>
+            </a:r>
+            <a:endParaRPr lang="en-US" sz="800" dirty="0"/>
+          </a:p>
+        </p:txBody>
+      </p:sp>
+      <p:sp>
+        <p:nvSpPr>
+          <p:cNvPr id="32" name="Text 30"/>
+          <p:cNvSpPr/>
+          <p:nvPr/>
+        </p:nvSpPr>
+        <p:spPr>
+          <a:xfrm>
+            <a:off x="1298448" y="4433534"/>
+            <a:ext cx="4321912" cy="389273"/>
+          </a:xfrm>
+          <a:prstGeom prst="rect">
+            <a:avLst/>
+          </a:prstGeom>
+          <a:noFill/>
+          <a:ln/>
+        </p:spPr>
+        <p:txBody>
+          <a:bodyPr wrap="square" lIns="0" tIns="0" rIns="0" bIns="0" rtlCol="0" anchor="ctr"/>
+          <a:lstStyle/>
+          <a:p>
+            <a:pPr indent="0" marL="0">
+              <a:buNone/>
+            </a:pPr>
+            <a:r>
+              <a:rPr lang="en-US" sz="1050" dirty="0">
+                <a:solidFill>
+                  <a:srgbClr val="111111"/>
+                </a:solidFill>
+                <a:latin typeface="Pretendard" pitchFamily="34" charset="0"/>
+                <a:ea typeface="Pretendard" pitchFamily="34" charset="-122"/>
+                <a:cs typeface="Pretendard" pitchFamily="34" charset="-120"/>
+              </a:rPr>
+              <a:t>뺀 절 · 더한 절 · 순서를 바꾼 자리에 이유가 한 줄씩 적혀 있다</a:t>
+            </a:r>
+            <a:endParaRPr lang="en-US" sz="1050" dirty="0"/>
+          </a:p>
+        </p:txBody>
+      </p:sp>
+      <p:sp>
+        <p:nvSpPr>
+          <p:cNvPr id="33" name="Shape 31"/>
+          <p:cNvSpPr/>
+          <p:nvPr/>
+        </p:nvSpPr>
+        <p:spPr>
+          <a:xfrm>
+            <a:off x="640080" y="4969111"/>
+            <a:ext cx="5254600" cy="389273"/>
+          </a:xfrm>
+          <a:prstGeom prst="rect">
+            <a:avLst/>
+          </a:prstGeom>
+          <a:solidFill>
+            <a:srgbClr val="F2F2F2"/>
+          </a:solidFill>
+          <a:ln w="12700">
+            <a:solidFill>
+              <a:srgbClr val="F2F2F2"/>
+            </a:solidFill>
+            <a:prstDash val="solid"/>
+          </a:ln>
+        </p:spPr>
+      </p:sp>
+      <p:sp>
+        <p:nvSpPr>
+          <p:cNvPr id="34" name="Shape 32"/>
+          <p:cNvSpPr/>
+          <p:nvPr/>
+        </p:nvSpPr>
+        <p:spPr>
+          <a:xfrm>
+            <a:off x="914400" y="5035731"/>
+            <a:ext cx="256032" cy="256032"/>
+          </a:xfrm>
+          <a:prstGeom prst="ellipse">
+            <a:avLst/>
+          </a:prstGeom>
+          <a:solidFill>
+            <a:srgbClr val="F2F2F2"/>
+          </a:solidFill>
+          <a:ln w="12700">
+            <a:solidFill>
+              <a:srgbClr val="111111"/>
+            </a:solidFill>
+            <a:prstDash val="solid"/>
+          </a:ln>
+        </p:spPr>
+      </p:sp>
+      <p:sp>
+        <p:nvSpPr>
+          <p:cNvPr id="35" name="Text 33"/>
+          <p:cNvSpPr/>
+          <p:nvPr/>
+        </p:nvSpPr>
+        <p:spPr>
+          <a:xfrm>
+            <a:off x="914400" y="5035731"/>
+            <a:ext cx="256032" cy="256032"/>
+          </a:xfrm>
+          <a:prstGeom prst="rect">
+            <a:avLst/>
+          </a:prstGeom>
+          <a:noFill/>
+          <a:ln/>
+        </p:spPr>
+        <p:txBody>
+          <a:bodyPr wrap="square" lIns="0" tIns="0" rIns="0" bIns="0" rtlCol="0" anchor="ctr"/>
+          <a:lstStyle/>
+          <a:p>
+            <a:pPr algn="ctr" indent="0" marL="0">
+              <a:buNone/>
+            </a:pPr>
+            <a:r>
+              <a:rPr lang="en-US" sz="800" b="1" dirty="0">
+                <a:solidFill>
+                  <a:srgbClr val="111111"/>
+                </a:solidFill>
+                <a:latin typeface="Pretendard" pitchFamily="34" charset="0"/>
+                <a:ea typeface="Pretendard" pitchFamily="34" charset="-122"/>
+                <a:cs typeface="Pretendard" pitchFamily="34" charset="-120"/>
+              </a:rPr>
+              <a:t>07</a:t>
+            </a:r>
+            <a:endParaRPr lang="en-US" sz="800" dirty="0"/>
+          </a:p>
+        </p:txBody>
+      </p:sp>
+      <p:sp>
+        <p:nvSpPr>
+          <p:cNvPr id="36" name="Text 34"/>
+          <p:cNvSpPr/>
+          <p:nvPr/>
+        </p:nvSpPr>
+        <p:spPr>
+          <a:xfrm>
+            <a:off x="1298448" y="4969111"/>
+            <a:ext cx="4321912" cy="389273"/>
+          </a:xfrm>
+          <a:prstGeom prst="rect">
+            <a:avLst/>
+          </a:prstGeom>
+          <a:noFill/>
+          <a:ln/>
+        </p:spPr>
+        <p:txBody>
+          <a:bodyPr wrap="square" lIns="0" tIns="0" rIns="0" bIns="0" rtlCol="0" anchor="ctr"/>
+          <a:lstStyle/>
+          <a:p>
+            <a:pPr indent="0" marL="0">
+              <a:buNone/>
+            </a:pPr>
+            <a:r>
+              <a:rPr lang="en-US" sz="1050" dirty="0">
+                <a:solidFill>
+                  <a:srgbClr val="111111"/>
+                </a:solidFill>
+                <a:latin typeface="Pretendard" pitchFamily="34" charset="0"/>
+                <a:ea typeface="Pretendard" pitchFamily="34" charset="-122"/>
+                <a:cs typeface="Pretendard" pitchFamily="34" charset="-120"/>
+              </a:rPr>
+              <a:t>내 연구의 자리가 선행연구와의 관계로 설명되어 있다</a:t>
+            </a:r>
+            <a:endParaRPr lang="en-US" sz="1050" dirty="0"/>
+          </a:p>
+        </p:txBody>
+      </p:sp>
+      <p:sp>
+        <p:nvSpPr>
+          <p:cNvPr id="37" name="Shape 35"/>
+          <p:cNvSpPr/>
+          <p:nvPr/>
+        </p:nvSpPr>
+        <p:spPr>
+          <a:xfrm>
+            <a:off x="6297016" y="1755648"/>
+            <a:ext cx="5254600" cy="389273"/>
+          </a:xfrm>
+          <a:prstGeom prst="rect">
+            <a:avLst/>
+          </a:prstGeom>
+          <a:solidFill>
+            <a:srgbClr val="F2F2F2"/>
+          </a:solidFill>
+          <a:ln w="12700">
+            <a:solidFill>
+              <a:srgbClr val="F2F2F2"/>
+            </a:solidFill>
+            <a:prstDash val="solid"/>
+          </a:ln>
+        </p:spPr>
+      </p:sp>
+      <p:sp>
+        <p:nvSpPr>
+          <p:cNvPr id="38" name="Shape 36"/>
+          <p:cNvSpPr/>
+          <p:nvPr/>
+        </p:nvSpPr>
+        <p:spPr>
+          <a:xfrm>
+            <a:off x="6571336" y="1822269"/>
+            <a:ext cx="256032" cy="256032"/>
+          </a:xfrm>
+          <a:prstGeom prst="ellipse">
+            <a:avLst/>
+          </a:prstGeom>
+          <a:solidFill>
+            <a:srgbClr val="F2F2F2"/>
+          </a:solidFill>
+          <a:ln w="12700">
+            <a:solidFill>
+              <a:srgbClr val="111111"/>
+            </a:solidFill>
+            <a:prstDash val="solid"/>
+          </a:ln>
+        </p:spPr>
+      </p:sp>
+      <p:sp>
+        <p:nvSpPr>
+          <p:cNvPr id="39" name="Text 37"/>
+          <p:cNvSpPr/>
+          <p:nvPr/>
+        </p:nvSpPr>
+        <p:spPr>
+          <a:xfrm>
+            <a:off x="6571336" y="1822269"/>
+            <a:ext cx="256032" cy="256032"/>
+          </a:xfrm>
+          <a:prstGeom prst="rect">
+            <a:avLst/>
+          </a:prstGeom>
+          <a:noFill/>
+          <a:ln/>
+        </p:spPr>
+        <p:txBody>
+          <a:bodyPr wrap="square" lIns="0" tIns="0" rIns="0" bIns="0" rtlCol="0" anchor="ctr"/>
+          <a:lstStyle/>
+          <a:p>
+            <a:pPr algn="ctr" indent="0" marL="0">
+              <a:buNone/>
+            </a:pPr>
+            <a:r>
+              <a:rPr lang="en-US" sz="800" b="1" dirty="0">
+                <a:solidFill>
+                  <a:srgbClr val="111111"/>
+                </a:solidFill>
+                <a:latin typeface="Pretendard" pitchFamily="34" charset="0"/>
+                <a:ea typeface="Pretendard" pitchFamily="34" charset="-122"/>
+                <a:cs typeface="Pretendard" pitchFamily="34" charset="-120"/>
+              </a:rPr>
+              <a:t>08</a:t>
+            </a:r>
+            <a:endParaRPr lang="en-US" sz="800" dirty="0"/>
+          </a:p>
+        </p:txBody>
+      </p:sp>
+      <p:sp>
+        <p:nvSpPr>
+          <p:cNvPr id="40" name="Text 38"/>
+          <p:cNvSpPr/>
+          <p:nvPr/>
+        </p:nvSpPr>
+        <p:spPr>
+          <a:xfrm>
+            <a:off x="6955384" y="1755648"/>
+            <a:ext cx="4321912" cy="389273"/>
+          </a:xfrm>
+          <a:prstGeom prst="rect">
+            <a:avLst/>
+          </a:prstGeom>
+          <a:noFill/>
+          <a:ln/>
+        </p:spPr>
+        <p:txBody>
+          <a:bodyPr wrap="square" lIns="0" tIns="0" rIns="0" bIns="0" rtlCol="0" anchor="ctr"/>
+          <a:lstStyle/>
+          <a:p>
+            <a:pPr indent="0" marL="0">
+              <a:buNone/>
+            </a:pPr>
+            <a:r>
+              <a:rPr lang="en-US" sz="1050" dirty="0">
+                <a:solidFill>
+                  <a:srgbClr val="111111"/>
+                </a:solidFill>
+                <a:latin typeface="Pretendard" pitchFamily="34" charset="0"/>
+                <a:ea typeface="Pretendard" pitchFamily="34" charset="-122"/>
+                <a:cs typeface="Pretendard" pitchFamily="34" charset="-120"/>
+              </a:rPr>
+              <a:t>연구 방법 절에 자료 · 절차 · 판단 기준이 적혀 있다</a:t>
+            </a:r>
+            <a:endParaRPr lang="en-US" sz="1050" dirty="0"/>
+          </a:p>
+        </p:txBody>
+      </p:sp>
+      <p:sp>
+        <p:nvSpPr>
+          <p:cNvPr id="41" name="Shape 39"/>
+          <p:cNvSpPr/>
+          <p:nvPr/>
+        </p:nvSpPr>
+        <p:spPr>
+          <a:xfrm>
+            <a:off x="6297016" y="2291225"/>
+            <a:ext cx="5254600" cy="389273"/>
+          </a:xfrm>
+          <a:prstGeom prst="rect">
+            <a:avLst/>
+          </a:prstGeom>
+          <a:solidFill>
+            <a:srgbClr val="F2F2F2"/>
+          </a:solidFill>
+          <a:ln w="12700">
+            <a:solidFill>
+              <a:srgbClr val="F2F2F2"/>
+            </a:solidFill>
+            <a:prstDash val="solid"/>
+          </a:ln>
+        </p:spPr>
+      </p:sp>
+      <p:sp>
+        <p:nvSpPr>
+          <p:cNvPr id="42" name="Shape 40"/>
+          <p:cNvSpPr/>
+          <p:nvPr/>
+        </p:nvSpPr>
+        <p:spPr>
+          <a:xfrm>
+            <a:off x="6571336" y="2357846"/>
+            <a:ext cx="256032" cy="256032"/>
+          </a:xfrm>
+          <a:prstGeom prst="ellipse">
+            <a:avLst/>
+          </a:prstGeom>
+          <a:solidFill>
+            <a:srgbClr val="F2F2F2"/>
+          </a:solidFill>
+          <a:ln w="12700">
+            <a:solidFill>
+              <a:srgbClr val="111111"/>
+            </a:solidFill>
+            <a:prstDash val="solid"/>
+          </a:ln>
+        </p:spPr>
+      </p:sp>
+      <p:sp>
+        <p:nvSpPr>
+          <p:cNvPr id="43" name="Text 41"/>
+          <p:cNvSpPr/>
+          <p:nvPr/>
+        </p:nvSpPr>
+        <p:spPr>
+          <a:xfrm>
+            <a:off x="6571336" y="2357846"/>
+            <a:ext cx="256032" cy="256032"/>
+          </a:xfrm>
+          <a:prstGeom prst="rect">
+            <a:avLst/>
+          </a:prstGeom>
+          <a:noFill/>
+          <a:ln/>
+        </p:spPr>
+        <p:txBody>
+          <a:bodyPr wrap="square" lIns="0" tIns="0" rIns="0" bIns="0" rtlCol="0" anchor="ctr"/>
+          <a:lstStyle/>
+          <a:p>
+            <a:pPr algn="ctr" indent="0" marL="0">
+              <a:buNone/>
+            </a:pPr>
+            <a:r>
+              <a:rPr lang="en-US" sz="800" b="1" dirty="0">
+                <a:solidFill>
+                  <a:srgbClr val="111111"/>
+                </a:solidFill>
+                <a:latin typeface="Pretendard" pitchFamily="34" charset="0"/>
+                <a:ea typeface="Pretendard" pitchFamily="34" charset="-122"/>
+                <a:cs typeface="Pretendard" pitchFamily="34" charset="-120"/>
+              </a:rPr>
+              <a:t>09</a:t>
+            </a:r>
+            <a:endParaRPr lang="en-US" sz="800" dirty="0"/>
+          </a:p>
+        </p:txBody>
+      </p:sp>
+      <p:sp>
+        <p:nvSpPr>
+          <p:cNvPr id="44" name="Text 42"/>
+          <p:cNvSpPr/>
+          <p:nvPr/>
+        </p:nvSpPr>
+        <p:spPr>
+          <a:xfrm>
+            <a:off x="6955384" y="2291225"/>
+            <a:ext cx="4321912" cy="389273"/>
+          </a:xfrm>
+          <a:prstGeom prst="rect">
+            <a:avLst/>
+          </a:prstGeom>
+          <a:noFill/>
+          <a:ln/>
+        </p:spPr>
+        <p:txBody>
+          <a:bodyPr wrap="square" lIns="0" tIns="0" rIns="0" bIns="0" rtlCol="0" anchor="ctr"/>
+          <a:lstStyle/>
+          <a:p>
+            <a:pPr indent="0" marL="0">
+              <a:buNone/>
+            </a:pPr>
+            <a:r>
+              <a:rPr lang="en-US" sz="1050" dirty="0">
+                <a:solidFill>
+                  <a:srgbClr val="111111"/>
+                </a:solidFill>
+                <a:latin typeface="Pretendard" pitchFamily="34" charset="0"/>
+                <a:ea typeface="Pretendard" pitchFamily="34" charset="-122"/>
+                <a:cs typeface="Pretendard" pitchFamily="34" charset="-120"/>
+              </a:rPr>
+              <a:t>오늘 쓴 입장 한 문단이 연구 방법 절 앞에 들어 있다</a:t>
+            </a:r>
+            <a:endParaRPr lang="en-US" sz="1050" dirty="0"/>
+          </a:p>
+        </p:txBody>
+      </p:sp>
+      <p:sp>
+        <p:nvSpPr>
+          <p:cNvPr id="45" name="Shape 43"/>
+          <p:cNvSpPr/>
+          <p:nvPr/>
+        </p:nvSpPr>
+        <p:spPr>
+          <a:xfrm>
+            <a:off x="6297016" y="2826802"/>
+            <a:ext cx="5254600" cy="389273"/>
+          </a:xfrm>
+          <a:prstGeom prst="rect">
+            <a:avLst/>
+          </a:prstGeom>
+          <a:solidFill>
+            <a:srgbClr val="F2F2F2"/>
+          </a:solidFill>
+          <a:ln w="12700">
+            <a:solidFill>
+              <a:srgbClr val="F2F2F2"/>
+            </a:solidFill>
+            <a:prstDash val="solid"/>
+          </a:ln>
+        </p:spPr>
+      </p:sp>
+      <p:sp>
+        <p:nvSpPr>
+          <p:cNvPr id="46" name="Shape 44"/>
+          <p:cNvSpPr/>
+          <p:nvPr/>
+        </p:nvSpPr>
+        <p:spPr>
+          <a:xfrm>
+            <a:off x="6571336" y="2893423"/>
+            <a:ext cx="256032" cy="256032"/>
+          </a:xfrm>
+          <a:prstGeom prst="ellipse">
+            <a:avLst/>
+          </a:prstGeom>
+          <a:solidFill>
+            <a:srgbClr val="F2F2F2"/>
+          </a:solidFill>
+          <a:ln w="12700">
+            <a:solidFill>
+              <a:srgbClr val="111111"/>
+            </a:solidFill>
+            <a:prstDash val="solid"/>
+          </a:ln>
+        </p:spPr>
+      </p:sp>
+      <p:sp>
+        <p:nvSpPr>
+          <p:cNvPr id="47" name="Text 45"/>
+          <p:cNvSpPr/>
+          <p:nvPr/>
+        </p:nvSpPr>
+        <p:spPr>
+          <a:xfrm>
+            <a:off x="6571336" y="2893423"/>
+            <a:ext cx="256032" cy="256032"/>
+          </a:xfrm>
+          <a:prstGeom prst="rect">
+            <a:avLst/>
+          </a:prstGeom>
+          <a:noFill/>
+          <a:ln/>
+        </p:spPr>
+        <p:txBody>
+          <a:bodyPr wrap="square" lIns="0" tIns="0" rIns="0" bIns="0" rtlCol="0" anchor="ctr"/>
+          <a:lstStyle/>
+          <a:p>
+            <a:pPr algn="ctr" indent="0" marL="0">
+              <a:buNone/>
+            </a:pPr>
+            <a:r>
+              <a:rPr lang="en-US" sz="800" b="1" dirty="0">
+                <a:solidFill>
+                  <a:srgbClr val="111111"/>
+                </a:solidFill>
+                <a:latin typeface="Pretendard" pitchFamily="34" charset="0"/>
+                <a:ea typeface="Pretendard" pitchFamily="34" charset="-122"/>
+                <a:cs typeface="Pretendard" pitchFamily="34" charset="-120"/>
+              </a:rPr>
+              <a:t>10</a:t>
+            </a:r>
+            <a:endParaRPr lang="en-US" sz="800" dirty="0"/>
+          </a:p>
+        </p:txBody>
+      </p:sp>
+      <p:sp>
+        <p:nvSpPr>
+          <p:cNvPr id="48" name="Text 46"/>
+          <p:cNvSpPr/>
+          <p:nvPr/>
+        </p:nvSpPr>
+        <p:spPr>
+          <a:xfrm>
+            <a:off x="6955384" y="2826802"/>
+            <a:ext cx="4321912" cy="389273"/>
+          </a:xfrm>
+          <a:prstGeom prst="rect">
+            <a:avLst/>
+          </a:prstGeom>
+          <a:noFill/>
+          <a:ln/>
+        </p:spPr>
+        <p:txBody>
+          <a:bodyPr wrap="square" lIns="0" tIns="0" rIns="0" bIns="0" rtlCol="0" anchor="ctr"/>
+          <a:lstStyle/>
+          <a:p>
+            <a:pPr indent="0" marL="0">
+              <a:buNone/>
+            </a:pPr>
+            <a:r>
+              <a:rPr lang="en-US" sz="1050" dirty="0">
+                <a:solidFill>
+                  <a:srgbClr val="111111"/>
+                </a:solidFill>
+                <a:latin typeface="Pretendard" pitchFamily="34" charset="0"/>
+                <a:ea typeface="Pretendard" pitchFamily="34" charset="-122"/>
+                <a:cs typeface="Pretendard" pitchFamily="34" charset="-120"/>
+              </a:rPr>
+              <a:t>생성 도구를 썼다면 판단 과정을 기술하는 방식이 적혀 있다</a:t>
+            </a:r>
+            <a:endParaRPr lang="en-US" sz="1050" dirty="0"/>
+          </a:p>
+        </p:txBody>
+      </p:sp>
+      <p:sp>
+        <p:nvSpPr>
+          <p:cNvPr id="49" name="Shape 47"/>
+          <p:cNvSpPr/>
+          <p:nvPr/>
+        </p:nvSpPr>
+        <p:spPr>
+          <a:xfrm>
+            <a:off x="6297016" y="3362379"/>
+            <a:ext cx="5254600" cy="389273"/>
+          </a:xfrm>
+          <a:prstGeom prst="rect">
+            <a:avLst/>
+          </a:prstGeom>
+          <a:solidFill>
+            <a:srgbClr val="F2F2F2"/>
+          </a:solidFill>
+          <a:ln w="12700">
+            <a:solidFill>
+              <a:srgbClr val="F2F2F2"/>
+            </a:solidFill>
+            <a:prstDash val="solid"/>
+          </a:ln>
+        </p:spPr>
+      </p:sp>
+      <p:sp>
+        <p:nvSpPr>
+          <p:cNvPr id="50" name="Shape 48"/>
+          <p:cNvSpPr/>
+          <p:nvPr/>
+        </p:nvSpPr>
+        <p:spPr>
+          <a:xfrm>
+            <a:off x="6571336" y="3429000"/>
+            <a:ext cx="256032" cy="256032"/>
+          </a:xfrm>
+          <a:prstGeom prst="ellipse">
+            <a:avLst/>
+          </a:prstGeom>
+          <a:solidFill>
+            <a:srgbClr val="F2F2F2"/>
+          </a:solidFill>
+          <a:ln w="12700">
+            <a:solidFill>
+              <a:srgbClr val="111111"/>
+            </a:solidFill>
+            <a:prstDash val="solid"/>
+          </a:ln>
+        </p:spPr>
+      </p:sp>
+      <p:sp>
+        <p:nvSpPr>
+          <p:cNvPr id="51" name="Text 49"/>
+          <p:cNvSpPr/>
+          <p:nvPr/>
+        </p:nvSpPr>
+        <p:spPr>
+          <a:xfrm>
+            <a:off x="6571336" y="3429000"/>
+            <a:ext cx="256032" cy="256032"/>
+          </a:xfrm>
+          <a:prstGeom prst="rect">
+            <a:avLst/>
+          </a:prstGeom>
+          <a:noFill/>
+          <a:ln/>
+        </p:spPr>
+        <p:txBody>
+          <a:bodyPr wrap="square" lIns="0" tIns="0" rIns="0" bIns="0" rtlCol="0" anchor="ctr"/>
+          <a:lstStyle/>
+          <a:p>
+            <a:pPr algn="ctr" indent="0" marL="0">
+              <a:buNone/>
+            </a:pPr>
+            <a:r>
+              <a:rPr lang="en-US" sz="800" b="1" dirty="0">
+                <a:solidFill>
+                  <a:srgbClr val="111111"/>
+                </a:solidFill>
+                <a:latin typeface="Pretendard" pitchFamily="34" charset="0"/>
+                <a:ea typeface="Pretendard" pitchFamily="34" charset="-122"/>
+                <a:cs typeface="Pretendard" pitchFamily="34" charset="-120"/>
+              </a:rPr>
+              <a:t>11</a:t>
+            </a:r>
+            <a:endParaRPr lang="en-US" sz="800" dirty="0"/>
+          </a:p>
+        </p:txBody>
+      </p:sp>
+      <p:sp>
+        <p:nvSpPr>
+          <p:cNvPr id="52" name="Text 50"/>
+          <p:cNvSpPr/>
+          <p:nvPr/>
+        </p:nvSpPr>
+        <p:spPr>
+          <a:xfrm>
+            <a:off x="6955384" y="3362379"/>
+            <a:ext cx="4321912" cy="389273"/>
+          </a:xfrm>
+          <a:prstGeom prst="rect">
+            <a:avLst/>
+          </a:prstGeom>
+          <a:noFill/>
+          <a:ln/>
+        </p:spPr>
+        <p:txBody>
+          <a:bodyPr wrap="square" lIns="0" tIns="0" rIns="0" bIns="0" rtlCol="0" anchor="ctr"/>
+          <a:lstStyle/>
+          <a:p>
+            <a:pPr indent="0" marL="0">
+              <a:buNone/>
+            </a:pPr>
+            <a:r>
+              <a:rPr lang="en-US" sz="1050" dirty="0">
+                <a:solidFill>
+                  <a:srgbClr val="111111"/>
+                </a:solidFill>
+                <a:latin typeface="Pretendard" pitchFamily="34" charset="0"/>
+                <a:ea typeface="Pretendard" pitchFamily="34" charset="-122"/>
+                <a:cs typeface="Pretendard" pitchFamily="34" charset="-120"/>
+              </a:rPr>
+              <a:t>동료 한 사람당 질문 두 개를 준비했다</a:t>
+            </a:r>
+            <a:endParaRPr lang="en-US" sz="1050" dirty="0"/>
+          </a:p>
+        </p:txBody>
+      </p:sp>
+      <p:sp>
+        <p:nvSpPr>
+          <p:cNvPr id="53" name="Shape 51"/>
+          <p:cNvSpPr/>
+          <p:nvPr/>
+        </p:nvSpPr>
+        <p:spPr>
+          <a:xfrm>
+            <a:off x="6297016" y="3897957"/>
+            <a:ext cx="5254600" cy="389273"/>
+          </a:xfrm>
+          <a:prstGeom prst="rect">
+            <a:avLst/>
+          </a:prstGeom>
+          <a:solidFill>
+            <a:srgbClr val="F2F2F2"/>
+          </a:solidFill>
+          <a:ln w="12700">
+            <a:solidFill>
+              <a:srgbClr val="F2F2F2"/>
+            </a:solidFill>
+            <a:prstDash val="solid"/>
+          </a:ln>
+        </p:spPr>
+      </p:sp>
+      <p:sp>
+        <p:nvSpPr>
+          <p:cNvPr id="54" name="Shape 52"/>
+          <p:cNvSpPr/>
+          <p:nvPr/>
+        </p:nvSpPr>
+        <p:spPr>
+          <a:xfrm>
+            <a:off x="6571336" y="3964577"/>
+            <a:ext cx="256032" cy="256032"/>
+          </a:xfrm>
+          <a:prstGeom prst="ellipse">
+            <a:avLst/>
+          </a:prstGeom>
+          <a:solidFill>
+            <a:srgbClr val="F2F2F2"/>
+          </a:solidFill>
+          <a:ln w="12700">
+            <a:solidFill>
+              <a:srgbClr val="111111"/>
+            </a:solidFill>
+            <a:prstDash val="solid"/>
+          </a:ln>
+        </p:spPr>
+      </p:sp>
+      <p:sp>
+        <p:nvSpPr>
+          <p:cNvPr id="55" name="Text 53"/>
+          <p:cNvSpPr/>
+          <p:nvPr/>
+        </p:nvSpPr>
+        <p:spPr>
+          <a:xfrm>
+            <a:off x="6571336" y="3964577"/>
+            <a:ext cx="256032" cy="256032"/>
+          </a:xfrm>
+          <a:prstGeom prst="rect">
+            <a:avLst/>
+          </a:prstGeom>
+          <a:noFill/>
+          <a:ln/>
+        </p:spPr>
+        <p:txBody>
+          <a:bodyPr wrap="square" lIns="0" tIns="0" rIns="0" bIns="0" rtlCol="0" anchor="ctr"/>
+          <a:lstStyle/>
+          <a:p>
+            <a:pPr algn="ctr" indent="0" marL="0">
+              <a:buNone/>
+            </a:pPr>
+            <a:r>
+              <a:rPr lang="en-US" sz="800" b="1" dirty="0">
+                <a:solidFill>
+                  <a:srgbClr val="111111"/>
+                </a:solidFill>
+                <a:latin typeface="Pretendard" pitchFamily="34" charset="0"/>
+                <a:ea typeface="Pretendard" pitchFamily="34" charset="-122"/>
+                <a:cs typeface="Pretendard" pitchFamily="34" charset="-120"/>
+              </a:rPr>
+              <a:t>12</a:t>
+            </a:r>
+            <a:endParaRPr lang="en-US" sz="800" dirty="0"/>
+          </a:p>
+        </p:txBody>
+      </p:sp>
+      <p:sp>
+        <p:nvSpPr>
+          <p:cNvPr id="56" name="Text 54"/>
+          <p:cNvSpPr/>
+          <p:nvPr/>
+        </p:nvSpPr>
+        <p:spPr>
+          <a:xfrm>
+            <a:off x="6955384" y="3897957"/>
+            <a:ext cx="4321912" cy="389273"/>
+          </a:xfrm>
+          <a:prstGeom prst="rect">
+            <a:avLst/>
+          </a:prstGeom>
+          <a:noFill/>
+          <a:ln/>
+        </p:spPr>
+        <p:txBody>
+          <a:bodyPr wrap="square" lIns="0" tIns="0" rIns="0" bIns="0" rtlCol="0" anchor="ctr"/>
+          <a:lstStyle/>
+          <a:p>
+            <a:pPr indent="0" marL="0">
+              <a:buNone/>
+            </a:pPr>
+            <a:r>
+              <a:rPr lang="en-US" sz="1050" dirty="0">
+                <a:solidFill>
+                  <a:srgbClr val="111111"/>
+                </a:solidFill>
+                <a:latin typeface="Pretendard" pitchFamily="34" charset="0"/>
+                <a:ea typeface="Pretendard" pitchFamily="34" charset="-122"/>
+                <a:cs typeface="Pretendard" pitchFamily="34" charset="-120"/>
+              </a:rPr>
+              <a:t>질문 · 방법 · 기여가 서로 맞물리는지 소리 내어 확인했다</a:t>
+            </a:r>
+            <a:endParaRPr lang="en-US" sz="1050" dirty="0"/>
+          </a:p>
+        </p:txBody>
+      </p:sp>
+      <p:sp>
+        <p:nvSpPr>
+          <p:cNvPr id="57" name="Shape 55"/>
+          <p:cNvSpPr/>
+          <p:nvPr/>
+        </p:nvSpPr>
+        <p:spPr>
+          <a:xfrm>
+            <a:off x="6297016" y="4433534"/>
+            <a:ext cx="5254600" cy="389273"/>
+          </a:xfrm>
+          <a:prstGeom prst="rect">
+            <a:avLst/>
+          </a:prstGeom>
+          <a:solidFill>
+            <a:srgbClr val="F2F2F2"/>
+          </a:solidFill>
+          <a:ln w="12700">
+            <a:solidFill>
+              <a:srgbClr val="F2F2F2"/>
+            </a:solidFill>
+            <a:prstDash val="solid"/>
+          </a:ln>
+        </p:spPr>
+      </p:sp>
+      <p:sp>
+        <p:nvSpPr>
+          <p:cNvPr id="58" name="Shape 56"/>
+          <p:cNvSpPr/>
+          <p:nvPr/>
+        </p:nvSpPr>
+        <p:spPr>
+          <a:xfrm>
+            <a:off x="6571336" y="4500154"/>
+            <a:ext cx="256032" cy="256032"/>
+          </a:xfrm>
+          <a:prstGeom prst="ellipse">
+            <a:avLst/>
+          </a:prstGeom>
+          <a:solidFill>
+            <a:srgbClr val="F2F2F2"/>
+          </a:solidFill>
+          <a:ln w="12700">
+            <a:solidFill>
+              <a:srgbClr val="111111"/>
+            </a:solidFill>
+            <a:prstDash val="solid"/>
+          </a:ln>
+        </p:spPr>
+      </p:sp>
+      <p:sp>
+        <p:nvSpPr>
+          <p:cNvPr id="59" name="Text 57"/>
+          <p:cNvSpPr/>
+          <p:nvPr/>
+        </p:nvSpPr>
+        <p:spPr>
+          <a:xfrm>
+            <a:off x="6571336" y="4500154"/>
+            <a:ext cx="256032" cy="256032"/>
+          </a:xfrm>
+          <a:prstGeom prst="rect">
+            <a:avLst/>
+          </a:prstGeom>
+          <a:noFill/>
+          <a:ln/>
+        </p:spPr>
+        <p:txBody>
+          <a:bodyPr wrap="square" lIns="0" tIns="0" rIns="0" bIns="0" rtlCol="0" anchor="ctr"/>
+          <a:lstStyle/>
+          <a:p>
+            <a:pPr algn="ctr" indent="0" marL="0">
+              <a:buNone/>
+            </a:pPr>
+            <a:r>
+              <a:rPr lang="en-US" sz="800" b="1" dirty="0">
+                <a:solidFill>
+                  <a:srgbClr val="111111"/>
+                </a:solidFill>
+                <a:latin typeface="Pretendard" pitchFamily="34" charset="0"/>
+                <a:ea typeface="Pretendard" pitchFamily="34" charset="-122"/>
+                <a:cs typeface="Pretendard" pitchFamily="34" charset="-120"/>
+              </a:rPr>
+              <a:t>13</a:t>
+            </a:r>
+            <a:endParaRPr lang="en-US" sz="800" dirty="0"/>
+          </a:p>
+        </p:txBody>
+      </p:sp>
+      <p:sp>
+        <p:nvSpPr>
+          <p:cNvPr id="60" name="Text 58"/>
+          <p:cNvSpPr/>
+          <p:nvPr/>
+        </p:nvSpPr>
+        <p:spPr>
+          <a:xfrm>
+            <a:off x="6955384" y="4433534"/>
+            <a:ext cx="4321912" cy="389273"/>
+          </a:xfrm>
+          <a:prstGeom prst="rect">
+            <a:avLst/>
+          </a:prstGeom>
+          <a:noFill/>
+          <a:ln/>
+        </p:spPr>
+        <p:txBody>
+          <a:bodyPr wrap="square" lIns="0" tIns="0" rIns="0" bIns="0" rtlCol="0" anchor="ctr"/>
+          <a:lstStyle/>
+          <a:p>
+            <a:pPr indent="0" marL="0">
+              <a:buNone/>
+            </a:pPr>
+            <a:r>
+              <a:rPr lang="en-US" sz="1050" dirty="0">
+                <a:solidFill>
+                  <a:srgbClr val="111111"/>
+                </a:solidFill>
+                <a:latin typeface="Pretendard" pitchFamily="34" charset="0"/>
+                <a:ea typeface="Pretendard" pitchFamily="34" charset="-122"/>
+                <a:cs typeface="Pretendard" pitchFamily="34" charset="-120"/>
+              </a:rPr>
+              <a:t>드래프트를 세션 48시간 전까지 올렸다</a:t>
+            </a:r>
+            <a:endParaRPr lang="en-US" sz="1050" dirty="0"/>
+          </a:p>
+        </p:txBody>
+      </p:sp>
+      <p:sp>
+        <p:nvSpPr>
+          <p:cNvPr id="61" name="Shape 59"/>
+          <p:cNvSpPr/>
+          <p:nvPr/>
+        </p:nvSpPr>
+        <p:spPr>
+          <a:xfrm>
+            <a:off x="640080" y="5559552"/>
+            <a:ext cx="10911535" cy="7315"/>
+          </a:xfrm>
+          <a:prstGeom prst="rect">
+            <a:avLst/>
+          </a:prstGeom>
+          <a:solidFill>
+            <a:srgbClr val="111111"/>
+          </a:solidFill>
+          <a:ln w="12700">
+            <a:solidFill>
+              <a:srgbClr val="111111"/>
+            </a:solidFill>
+            <a:prstDash val="solid"/>
+          </a:ln>
+        </p:spPr>
+      </p:sp>
+      <p:sp>
+        <p:nvSpPr>
+          <p:cNvPr id="62" name="Text 60"/>
+          <p:cNvSpPr/>
+          <p:nvPr/>
+        </p:nvSpPr>
+        <p:spPr>
+          <a:xfrm>
+            <a:off x="640080" y="5669280"/>
+            <a:ext cx="10911535" cy="402336"/>
+          </a:xfrm>
+          <a:prstGeom prst="rect">
+            <a:avLst/>
+          </a:prstGeom>
+          <a:noFill/>
+          <a:ln/>
+        </p:spPr>
+        <p:txBody>
+          <a:bodyPr wrap="square" lIns="0" tIns="0" rIns="0" bIns="0" rtlCol="0" anchor="ctr"/>
+          <a:lstStyle/>
+          <a:p>
+            <a:pPr indent="0" marL="0">
+              <a:buNone/>
+            </a:pPr>
+            <a:r>
+              <a:rPr lang="en-US" sz="1250" b="1" dirty="0">
+                <a:solidFill>
+                  <a:srgbClr val="111111"/>
+                </a:solidFill>
+                <a:latin typeface="Pretendard" pitchFamily="34" charset="0"/>
+                <a:ea typeface="Pretendard" pitchFamily="34" charset="-122"/>
+                <a:cs typeface="Pretendard" pitchFamily="34" charset="-120"/>
+              </a:rPr>
+              <a:t>3~6번이 이번 학기의 실질입니다. 선행연구를 목록으로만 붙이면 2회차에 한 일이 사라집니다.</a:t>
+            </a:r>
+            <a:endParaRPr lang="en-US" sz="1250" dirty="0"/>
+          </a:p>
+        </p:txBody>
+      </p:sp>
+      <p:sp>
+        <p:nvSpPr>
+          <p:cNvPr id="63" name="Shape 61"/>
+          <p:cNvSpPr/>
+          <p:nvPr/>
+        </p:nvSpPr>
+        <p:spPr>
+          <a:xfrm>
+            <a:off x="640080" y="6291072"/>
+            <a:ext cx="10911535" cy="7315"/>
+          </a:xfrm>
+          <a:prstGeom prst="rect">
+            <a:avLst/>
+          </a:prstGeom>
+          <a:solidFill>
+            <a:srgbClr val="DCDCDC"/>
+          </a:solidFill>
+          <a:ln w="12700">
+            <a:solidFill>
+              <a:srgbClr val="DCDCDC"/>
+            </a:solidFill>
+            <a:prstDash val="solid"/>
+          </a:ln>
+        </p:spPr>
+      </p:sp>
+      <p:sp>
+        <p:nvSpPr>
+          <p:cNvPr id="64" name="Text 62"/>
+          <p:cNvSpPr/>
+          <p:nvPr/>
+        </p:nvSpPr>
+        <p:spPr>
+          <a:xfrm>
+            <a:off x="640080" y="6382512"/>
+            <a:ext cx="7772400" cy="237744"/>
+          </a:xfrm>
+          <a:prstGeom prst="rect">
+            <a:avLst/>
+          </a:prstGeom>
+          <a:noFill/>
+          <a:ln/>
+        </p:spPr>
+        <p:txBody>
+          <a:bodyPr wrap="square" lIns="0" tIns="0" rIns="0" bIns="0" rtlCol="0" anchor="ctr"/>
+          <a:lstStyle/>
+          <a:p>
+            <a:pPr indent="0" marL="0">
+              <a:buNone/>
+            </a:pPr>
+            <a:r>
+              <a:rPr lang="en-US" sz="850" spc="40" kern="0" dirty="0">
+                <a:solidFill>
+                  <a:srgbClr val="9B9B9B"/>
+                </a:solidFill>
+                <a:latin typeface="Pretendard" pitchFamily="34" charset="0"/>
+                <a:ea typeface="Pretendard" pitchFamily="34" charset="-122"/>
+                <a:cs typeface="Pretendard" pitchFamily="34" charset="-120"/>
+              </a:rPr>
+              <a:t>컨셉트와 프로세스 · 7주차 도식의 바깥 — 비판과 확장</a:t>
+            </a:r>
+            <a:endParaRPr lang="en-US" sz="850" dirty="0"/>
+          </a:p>
+        </p:txBody>
+      </p:sp>
+      <p:sp>
+        <p:nvSpPr>
+          <p:cNvPr id="65" name="Text 63"/>
+          <p:cNvSpPr/>
+          <p:nvPr/>
+        </p:nvSpPr>
+        <p:spPr>
+          <a:xfrm>
+            <a:off x="10271455" y="6382512"/>
+            <a:ext cx="1280160" cy="237744"/>
+          </a:xfrm>
+          <a:prstGeom prst="rect">
+            <a:avLst/>
+          </a:prstGeom>
+          <a:noFill/>
+          <a:ln/>
+        </p:spPr>
+        <p:txBody>
+          <a:bodyPr wrap="square" lIns="0" tIns="0" rIns="0" bIns="0" rtlCol="0" anchor="ctr"/>
+          <a:lstStyle/>
+          <a:p>
+            <a:pPr algn="r" indent="0" marL="0">
+              <a:buNone/>
+            </a:pPr>
+            <a:r>
+              <a:rPr lang="en-US" sz="850" spc="140" kern="0" dirty="0">
+                <a:solidFill>
+                  <a:srgbClr val="9B9B9B"/>
+                </a:solidFill>
+                <a:latin typeface="Pretendard" pitchFamily="34" charset="0"/>
+                <a:ea typeface="Pretendard" pitchFamily="34" charset="-122"/>
+                <a:cs typeface="Pretendard" pitchFamily="34" charset="-120"/>
+              </a:rPr>
+              <a:t>P.10</a:t>
+            </a:r>
+            <a:endParaRPr lang="en-US" sz="850" dirty="0"/>
+          </a:p>
+        </p:txBody>
+      </p:sp>
+    </p:spTree>
+  </p:cSld>
+  <p:clrMapOvr>
+    <a:masterClrMapping/>
+  </p:clrMapOvr>
+</p:sld>
+</file>
+
+<file path=ppt/slides/slide17.xml><?xml version="1.0" encoding="utf-8"?>
+<p:sld xmlns:a="http://schemas.openxmlformats.org/drawingml/2006/main" xmlns:r="http://schemas.openxmlformats.org/officeDocument/2006/relationships" xmlns:p="http://schemas.openxmlformats.org/presentationml/2006/main">
+  <p:cSld name="Slide 17">
+    <p:bg>
+      <p:bgPr>
+        <a:solidFill>
+          <a:srgbClr val="FFFFFF"/>
+        </a:solidFill>
+      </p:bgPr>
+    </p:bg>
+    <p:spTree>
+      <p:nvGrpSpPr>
+        <p:cNvPr id="1" name=""/>
+        <p:cNvGrpSpPr/>
+        <p:nvPr/>
+      </p:nvGrpSpPr>
+      <p:grpSpPr>
+        <a:xfrm>
+          <a:off x="0" y="0"/>
+          <a:ext cx="0" cy="0"/>
+          <a:chOff x="0" y="0"/>
+          <a:chExt cx="0" cy="0"/>
+        </a:xfrm>
+      </p:grpSpPr>
+      <p:sp>
+        <p:nvSpPr>
+          <p:cNvPr id="2" name="Text 0"/>
+          <p:cNvSpPr/>
+          <p:nvPr/>
+        </p:nvSpPr>
+        <p:spPr>
+          <a:xfrm>
+            <a:off x="640080" y="274320"/>
+            <a:ext cx="3657600" cy="219456"/>
+          </a:xfrm>
+          <a:prstGeom prst="rect">
+            <a:avLst/>
+          </a:prstGeom>
+          <a:noFill/>
+          <a:ln/>
+        </p:spPr>
+        <p:txBody>
+          <a:bodyPr wrap="square" lIns="0" tIns="0" rIns="0" bIns="0" rtlCol="0" anchor="ctr"/>
+          <a:lstStyle/>
+          <a:p>
+            <a:pPr indent="0" marL="0">
+              <a:buNone/>
+            </a:pPr>
+            <a:r>
+              <a:rPr lang="en-US" sz="900" spc="120" kern="0" dirty="0">
+                <a:solidFill>
+                  <a:srgbClr val="8A8A8A"/>
+                </a:solidFill>
+                <a:latin typeface="Pretendard" pitchFamily="34" charset="0"/>
+                <a:ea typeface="Pretendard" pitchFamily="34" charset="-122"/>
+                <a:cs typeface="Pretendard" pitchFamily="34" charset="-120"/>
+              </a:rPr>
+              <a:t>컨셉트와 프로세스</a:t>
+            </a:r>
+            <a:endParaRPr lang="en-US" sz="900" dirty="0"/>
+          </a:p>
+        </p:txBody>
+      </p:sp>
+      <p:sp>
+        <p:nvSpPr>
+          <p:cNvPr id="3" name="Text 1"/>
+          <p:cNvSpPr/>
+          <p:nvPr/>
+        </p:nvSpPr>
+        <p:spPr>
+          <a:xfrm>
+            <a:off x="4480560" y="274320"/>
+            <a:ext cx="4572000" cy="219456"/>
+          </a:xfrm>
+          <a:prstGeom prst="rect">
+            <a:avLst/>
+          </a:prstGeom>
+          <a:noFill/>
+          <a:ln/>
+        </p:spPr>
+        <p:txBody>
+          <a:bodyPr wrap="square" lIns="0" tIns="0" rIns="0" bIns="0" rtlCol="0" anchor="ctr"/>
+          <a:lstStyle/>
+          <a:p>
+            <a:pPr algn="ctr" indent="0" marL="0">
+              <a:buNone/>
+            </a:pPr>
+            <a:r>
+              <a:rPr lang="en-US" sz="900" spc="120" kern="0" dirty="0">
+                <a:solidFill>
+                  <a:srgbClr val="8A8A8A"/>
+                </a:solidFill>
+                <a:latin typeface="Pretendard" pitchFamily="34" charset="0"/>
+                <a:ea typeface="Pretendard" pitchFamily="34" charset="-122"/>
+                <a:cs typeface="Pretendard" pitchFamily="34" charset="-120"/>
+              </a:rPr>
+              <a:t>PHASE 3 확장</a:t>
+            </a:r>
+            <a:endParaRPr lang="en-US" sz="900" dirty="0"/>
+          </a:p>
+        </p:txBody>
+      </p:sp>
+      <p:sp>
+        <p:nvSpPr>
+          <p:cNvPr id="4" name="Text 2"/>
+          <p:cNvSpPr/>
+          <p:nvPr/>
+        </p:nvSpPr>
+        <p:spPr>
+          <a:xfrm>
+            <a:off x="8808415" y="274320"/>
+            <a:ext cx="2743200" cy="219456"/>
+          </a:xfrm>
+          <a:prstGeom prst="rect">
+            <a:avLst/>
+          </a:prstGeom>
+          <a:noFill/>
+          <a:ln/>
+        </p:spPr>
+        <p:txBody>
+          <a:bodyPr wrap="square" lIns="0" tIns="0" rIns="0" bIns="0" rtlCol="0" anchor="ctr"/>
+          <a:lstStyle/>
+          <a:p>
+            <a:pPr algn="r" indent="0" marL="0">
+              <a:buNone/>
+            </a:pPr>
+            <a:r>
+              <a:rPr lang="en-US" sz="900" spc="200" kern="0" dirty="0">
+                <a:solidFill>
+                  <a:srgbClr val="8A8A8A"/>
+                </a:solidFill>
+                <a:latin typeface="Pretendard" pitchFamily="34" charset="0"/>
+                <a:ea typeface="Pretendard" pitchFamily="34" charset="-122"/>
+                <a:cs typeface="Pretendard" pitchFamily="34" charset="-120"/>
+              </a:rPr>
+              <a:t>WEEK 07</a:t>
+            </a:r>
+            <a:endParaRPr lang="en-US" sz="900" dirty="0"/>
+          </a:p>
+        </p:txBody>
+      </p:sp>
+      <p:sp>
+        <p:nvSpPr>
+          <p:cNvPr id="5" name="Shape 3"/>
+          <p:cNvSpPr/>
+          <p:nvPr/>
+        </p:nvSpPr>
+        <p:spPr>
+          <a:xfrm>
+            <a:off x="640080" y="548640"/>
+            <a:ext cx="10911535" cy="7315"/>
+          </a:xfrm>
+          <a:prstGeom prst="rect">
+            <a:avLst/>
+          </a:prstGeom>
+          <a:solidFill>
+            <a:srgbClr val="DCDCDC"/>
+          </a:solidFill>
+          <a:ln w="12700">
+            <a:solidFill>
+              <a:srgbClr val="DCDCDC"/>
+            </a:solidFill>
+            <a:prstDash val="solid"/>
+          </a:ln>
+        </p:spPr>
+      </p:sp>
+      <p:sp>
+        <p:nvSpPr>
+          <p:cNvPr id="6" name="Text 4"/>
+          <p:cNvSpPr/>
+          <p:nvPr/>
+        </p:nvSpPr>
+        <p:spPr>
+          <a:xfrm>
+            <a:off x="640080" y="640080"/>
+            <a:ext cx="10911535" cy="219456"/>
+          </a:xfrm>
+          <a:prstGeom prst="rect">
+            <a:avLst/>
+          </a:prstGeom>
+          <a:noFill/>
+          <a:ln/>
+        </p:spPr>
+        <p:txBody>
+          <a:bodyPr wrap="square" lIns="0" tIns="0" rIns="0" bIns="0" rtlCol="0" anchor="ctr"/>
+          <a:lstStyle/>
+          <a:p>
+            <a:pPr indent="0" marL="0">
+              <a:buNone/>
+            </a:pPr>
+            <a:r>
+              <a:rPr lang="en-US" sz="950" spc="260" kern="0" dirty="0">
+                <a:solidFill>
+                  <a:srgbClr val="8A8A8A"/>
+                </a:solidFill>
+                <a:latin typeface="Pretendard" pitchFamily="34" charset="0"/>
+                <a:ea typeface="Pretendard" pitchFamily="34" charset="-122"/>
+                <a:cs typeface="Pretendard" pitchFamily="34" charset="-120"/>
+              </a:rPr>
+              <a:t>HOMEWORK</a:t>
+            </a:r>
+            <a:endParaRPr lang="en-US" sz="950" dirty="0"/>
+          </a:p>
+        </p:txBody>
+      </p:sp>
+      <p:sp>
+        <p:nvSpPr>
+          <p:cNvPr id="7" name="Text 5"/>
+          <p:cNvSpPr/>
+          <p:nvPr/>
+        </p:nvSpPr>
+        <p:spPr>
+          <a:xfrm>
+            <a:off x="640080" y="859536"/>
+            <a:ext cx="10911535" cy="475488"/>
+          </a:xfrm>
+          <a:prstGeom prst="rect">
+            <a:avLst/>
+          </a:prstGeom>
+          <a:noFill/>
+          <a:ln/>
+        </p:spPr>
+        <p:txBody>
+          <a:bodyPr wrap="square" lIns="0" tIns="0" rIns="0" bIns="0" rtlCol="0" anchor="ctr"/>
+          <a:lstStyle/>
+          <a:p>
+            <a:pPr indent="0" marL="0">
+              <a:buNone/>
+            </a:pPr>
+            <a:r>
+              <a:rPr lang="en-US" sz="3000" dirty="0">
+                <a:solidFill>
+                  <a:srgbClr val="111111"/>
+                </a:solidFill>
+                <a:latin typeface="Pretendard SemiBold" pitchFamily="34" charset="0"/>
+                <a:ea typeface="Pretendard SemiBold" pitchFamily="34" charset="-122"/>
+                <a:cs typeface="Pretendard SemiBold" pitchFamily="34" charset="-120"/>
+              </a:rPr>
+              <a:t>과제와 다음 주</a:t>
+            </a:r>
+            <a:endParaRPr lang="en-US" sz="3000" dirty="0"/>
+          </a:p>
+        </p:txBody>
+      </p:sp>
+      <p:sp>
+        <p:nvSpPr>
+          <p:cNvPr id="8" name="Text 6"/>
+          <p:cNvSpPr/>
+          <p:nvPr/>
+        </p:nvSpPr>
+        <p:spPr>
+          <a:xfrm>
+            <a:off x="640080" y="1371600"/>
+            <a:ext cx="10911535" cy="219456"/>
+          </a:xfrm>
+          <a:prstGeom prst="rect">
+            <a:avLst/>
+          </a:prstGeom>
+          <a:noFill/>
+          <a:ln/>
+        </p:spPr>
+        <p:txBody>
+          <a:bodyPr wrap="square" lIns="0" tIns="0" rIns="0" bIns="0" rtlCol="0" anchor="ctr"/>
+          <a:lstStyle/>
+          <a:p>
+            <a:pPr indent="0" marL="0">
+              <a:buNone/>
+            </a:pPr>
+            <a:r>
+              <a:rPr lang="en-US" sz="1150" dirty="0">
+                <a:solidFill>
+                  <a:srgbClr val="6E6E6E"/>
+                </a:solidFill>
+                <a:latin typeface="Pretendard" pitchFamily="34" charset="0"/>
+                <a:ea typeface="Pretendard" pitchFamily="34" charset="-122"/>
+                <a:cs typeface="Pretendard" pitchFamily="34" charset="-120"/>
+              </a:rPr>
+              <a:t>8회차는 프로포절 발표와 상호 리뷰입니다. 마지막 회차입니다.</a:t>
+            </a:r>
+            <a:endParaRPr lang="en-US" sz="1150" dirty="0"/>
+          </a:p>
+        </p:txBody>
+      </p:sp>
+      <p:sp>
+        <p:nvSpPr>
+          <p:cNvPr id="9" name="Shape 7"/>
+          <p:cNvSpPr/>
+          <p:nvPr/>
+        </p:nvSpPr>
+        <p:spPr>
+          <a:xfrm>
+            <a:off x="640080" y="1719072"/>
             <a:ext cx="6309360" cy="896112"/>
           </a:xfrm>
           <a:prstGeom prst="rect">
@@ -8218,13 +11566,13 @@
       </p:sp>
       <p:sp>
         <p:nvSpPr>
-          <p:cNvPr id="20" name="Shape 18"/>
-          <p:cNvSpPr/>
-          <p:nvPr/>
-        </p:nvSpPr>
-        <p:spPr>
-          <a:xfrm>
-            <a:off x="969264" y="4041648"/>
+          <p:cNvPr id="10" name="Shape 8"/>
+          <p:cNvSpPr/>
+          <p:nvPr/>
+        </p:nvSpPr>
+        <p:spPr>
+          <a:xfrm>
+            <a:off x="969264" y="1993392"/>
             <a:ext cx="329184" cy="329184"/>
           </a:xfrm>
           <a:prstGeom prst="ellipse">
@@ -8243,13 +11591,13 @@
       </p:sp>
       <p:sp>
         <p:nvSpPr>
-          <p:cNvPr id="21" name="Text 19"/>
-          <p:cNvSpPr/>
-          <p:nvPr/>
-        </p:nvSpPr>
-        <p:spPr>
-          <a:xfrm>
-            <a:off x="969264" y="4041648"/>
+          <p:cNvPr id="11" name="Text 9"/>
+          <p:cNvSpPr/>
+          <p:nvPr/>
+        </p:nvSpPr>
+        <p:spPr>
+          <a:xfrm>
+            <a:off x="969264" y="1993392"/>
             <a:ext cx="329184" cy="329184"/>
           </a:xfrm>
           <a:prstGeom prst="rect">
@@ -8274,7 +11622,7 @@
                 <a:ea typeface="Pretendard" pitchFamily="34" charset="-122"/>
                 <a:cs typeface="Pretendard" pitchFamily="34" charset="-120"/>
               </a:rPr>
-              <a:t>3</a:t>
+              <a:t>1</a:t>
             </a:r>
             <a:endParaRPr lang="en-US" sz="1100" dirty="0"/>
           </a:p>
@@ -8282,13 +11630,13 @@
       </p:sp>
       <p:sp>
         <p:nvSpPr>
-          <p:cNvPr id="22" name="Text 20"/>
-          <p:cNvSpPr/>
-          <p:nvPr/>
-        </p:nvSpPr>
-        <p:spPr>
-          <a:xfrm>
-            <a:off x="1426464" y="3858768"/>
+          <p:cNvPr id="12" name="Text 10"/>
+          <p:cNvSpPr/>
+          <p:nvPr/>
+        </p:nvSpPr>
+        <p:spPr>
+          <a:xfrm>
+            <a:off x="1426464" y="1810512"/>
             <a:ext cx="5175504" cy="329184"/>
           </a:xfrm>
           <a:prstGeom prst="rect">
@@ -8313,7 +11661,7 @@
                 <a:ea typeface="Pretendard SemiBold" pitchFamily="34" charset="-122"/>
                 <a:cs typeface="Pretendard SemiBold" pitchFamily="34" charset="-120"/>
               </a:rPr>
-              <a:t>동료 프로포절 읽고 질문 두 개</a:t>
+              <a:t>프로포절 드래프트</a:t>
             </a:r>
             <a:endParaRPr lang="en-US" sz="1400" dirty="0"/>
           </a:p>
@@ -8321,13 +11669,13 @@
       </p:sp>
       <p:sp>
         <p:nvSpPr>
-          <p:cNvPr id="23" name="Text 21"/>
-          <p:cNvSpPr/>
-          <p:nvPr/>
-        </p:nvSpPr>
-        <p:spPr>
-          <a:xfrm>
-            <a:off x="1426464" y="4169664"/>
+          <p:cNvPr id="13" name="Text 11"/>
+          <p:cNvSpPr/>
+          <p:nvPr/>
+        </p:nvSpPr>
+        <p:spPr>
+          <a:xfrm>
+            <a:off x="1426464" y="2121408"/>
             <a:ext cx="5175504" cy="420624"/>
           </a:xfrm>
           <a:prstGeom prst="rect">
@@ -8355,7 +11703,7 @@
                 <a:ea typeface="Pretendard" pitchFamily="34" charset="-122"/>
                 <a:cs typeface="Pretendard" pitchFamily="34" charset="-120"/>
               </a:rPr>
-              <a:t>올라온 드래프트를 읽고 각 사람에게 질문을 두 개씩 준비해 옵니다. 8회차는 상호 리뷰가 절반입니다.</a:t>
+              <a:t>여섯 절로 씁니다. 연구 배경과 문제 · 연구 질문과 가설 · 선행연구와 내 자리 · 연구 방법과 절차 · 예상 기여 · 일정. 분량은 회차가 줄어든 만큼 조정했습니다. 8회차 48시간 전까지 올립니다.</a:t>
             </a:r>
             <a:endParaRPr lang="en-US" sz="1100" dirty="0"/>
           </a:p>
@@ -8363,16 +11711,41 @@
       </p:sp>
       <p:sp>
         <p:nvSpPr>
-          <p:cNvPr id="24" name="Shape 22"/>
-          <p:cNvSpPr/>
-          <p:nvPr/>
-        </p:nvSpPr>
-        <p:spPr>
-          <a:xfrm>
-            <a:off x="640080" y="4809744"/>
-            <a:ext cx="6309360" cy="7315"/>
-          </a:xfrm>
-          <a:prstGeom prst="rect">
+          <p:cNvPr id="14" name="Shape 12"/>
+          <p:cNvSpPr/>
+          <p:nvPr/>
+        </p:nvSpPr>
+        <p:spPr>
+          <a:xfrm>
+            <a:off x="640080" y="2743200"/>
+            <a:ext cx="6309360" cy="896112"/>
+          </a:xfrm>
+          <a:prstGeom prst="rect">
+            <a:avLst/>
+          </a:prstGeom>
+          <a:solidFill>
+            <a:srgbClr val="FFFFFF"/>
+          </a:solidFill>
+          <a:ln w="12700">
+            <a:solidFill>
+              <a:srgbClr val="DCDCDC"/>
+            </a:solidFill>
+            <a:prstDash val="solid"/>
+          </a:ln>
+        </p:spPr>
+      </p:sp>
+      <p:sp>
+        <p:nvSpPr>
+          <p:cNvPr id="15" name="Shape 13"/>
+          <p:cNvSpPr/>
+          <p:nvPr/>
+        </p:nvSpPr>
+        <p:spPr>
+          <a:xfrm>
+            <a:off x="969264" y="3017520"/>
+            <a:ext cx="329184" cy="329184"/>
+          </a:xfrm>
+          <a:prstGeom prst="ellipse">
             <a:avLst/>
           </a:prstGeom>
           <a:solidFill>
@@ -8388,55 +11761,161 @@
       </p:sp>
       <p:sp>
         <p:nvSpPr>
-          <p:cNvPr id="25" name="Text 23"/>
-          <p:cNvSpPr/>
-          <p:nvPr/>
-        </p:nvSpPr>
-        <p:spPr>
-          <a:xfrm>
-            <a:off x="640080" y="4901184"/>
-            <a:ext cx="6309360" cy="329184"/>
-          </a:xfrm>
-          <a:prstGeom prst="rect">
-            <a:avLst/>
-          </a:prstGeom>
-          <a:noFill/>
-          <a:ln/>
-        </p:spPr>
-        <p:txBody>
-          <a:bodyPr wrap="square" lIns="0" tIns="0" rIns="0" bIns="0" rtlCol="0" anchor="ctr"/>
-          <a:lstStyle/>
-          <a:p>
-            <a:pPr indent="0" marL="0">
-              <a:buNone/>
-            </a:pPr>
-            <a:r>
-              <a:rPr lang="en-US" sz="1200" b="1" dirty="0">
+          <p:cNvPr id="16" name="Text 14"/>
+          <p:cNvSpPr/>
+          <p:nvPr/>
+        </p:nvSpPr>
+        <p:spPr>
+          <a:xfrm>
+            <a:off x="969264" y="3017520"/>
+            <a:ext cx="329184" cy="329184"/>
+          </a:xfrm>
+          <a:prstGeom prst="rect">
+            <a:avLst/>
+          </a:prstGeom>
+          <a:noFill/>
+          <a:ln/>
+        </p:spPr>
+        <p:txBody>
+          <a:bodyPr wrap="square" lIns="0" tIns="0" rIns="0" bIns="0" rtlCol="0" anchor="ctr"/>
+          <a:lstStyle/>
+          <a:p>
+            <a:pPr algn="ctr" indent="0" marL="0">
+              <a:buNone/>
+            </a:pPr>
+            <a:r>
+              <a:rPr lang="en-US" sz="1100" b="1" dirty="0">
+                <a:solidFill>
+                  <a:srgbClr val="FFFFFF"/>
+                </a:solidFill>
+                <a:latin typeface="Pretendard" pitchFamily="34" charset="0"/>
+                <a:ea typeface="Pretendard" pitchFamily="34" charset="-122"/>
+                <a:cs typeface="Pretendard" pitchFamily="34" charset="-120"/>
+              </a:rPr>
+              <a:t>2</a:t>
+            </a:r>
+            <a:endParaRPr lang="en-US" sz="1100" dirty="0"/>
+          </a:p>
+        </p:txBody>
+      </p:sp>
+      <p:sp>
+        <p:nvSpPr>
+          <p:cNvPr id="17" name="Text 15"/>
+          <p:cNvSpPr/>
+          <p:nvPr/>
+        </p:nvSpPr>
+        <p:spPr>
+          <a:xfrm>
+            <a:off x="1426464" y="2834640"/>
+            <a:ext cx="5175504" cy="329184"/>
+          </a:xfrm>
+          <a:prstGeom prst="rect">
+            <a:avLst/>
+          </a:prstGeom>
+          <a:noFill/>
+          <a:ln/>
+        </p:spPr>
+        <p:txBody>
+          <a:bodyPr wrap="square" lIns="0" tIns="0" rIns="0" bIns="0" rtlCol="0" anchor="ctr"/>
+          <a:lstStyle/>
+          <a:p>
+            <a:pPr indent="0" marL="0">
+              <a:buNone/>
+            </a:pPr>
+            <a:r>
+              <a:rPr lang="en-US" sz="1400" dirty="0">
                 <a:solidFill>
                   <a:srgbClr val="111111"/>
                 </a:solidFill>
-                <a:latin typeface="Pretendard" pitchFamily="34" charset="0"/>
-                <a:ea typeface="Pretendard" pitchFamily="34" charset="-122"/>
-                <a:cs typeface="Pretendard" pitchFamily="34" charset="-120"/>
-              </a:rPr>
-              <a:t>제출 — 8회차 세션 48시간 전까지 · 공유 폴더 업로드</a:t>
-            </a:r>
-            <a:endParaRPr lang="en-US" sz="1200" dirty="0"/>
-          </a:p>
-        </p:txBody>
-      </p:sp>
-      <p:sp>
-        <p:nvSpPr>
-          <p:cNvPr id="26" name="Shape 24"/>
-          <p:cNvSpPr/>
-          <p:nvPr/>
-        </p:nvSpPr>
-        <p:spPr>
-          <a:xfrm>
-            <a:off x="7351776" y="1719072"/>
-            <a:ext cx="4199839" cy="3803904"/>
-          </a:xfrm>
-          <a:prstGeom prst="rect">
+                <a:latin typeface="Pretendard SemiBold" pitchFamily="34" charset="0"/>
+                <a:ea typeface="Pretendard SemiBold" pitchFamily="34" charset="-122"/>
+                <a:cs typeface="Pretendard SemiBold" pitchFamily="34" charset="-120"/>
+              </a:rPr>
+              <a:t>내 연구의 입장 한 문단</a:t>
+            </a:r>
+            <a:endParaRPr lang="en-US" sz="1400" dirty="0"/>
+          </a:p>
+        </p:txBody>
+      </p:sp>
+      <p:sp>
+        <p:nvSpPr>
+          <p:cNvPr id="18" name="Text 16"/>
+          <p:cNvSpPr/>
+          <p:nvPr/>
+        </p:nvSpPr>
+        <p:spPr>
+          <a:xfrm>
+            <a:off x="1426464" y="3145536"/>
+            <a:ext cx="5175504" cy="420624"/>
+          </a:xfrm>
+          <a:prstGeom prst="rect">
+            <a:avLst/>
+          </a:prstGeom>
+          <a:noFill/>
+          <a:ln/>
+        </p:spPr>
+        <p:txBody>
+          <a:bodyPr wrap="square" lIns="0" tIns="0" rIns="0" bIns="0" rtlCol="0" anchor="t"/>
+          <a:lstStyle/>
+          <a:p>
+            <a:pPr indent="0" marL="0">
+              <a:lnSpc>
+                <a:spcPct val="122000"/>
+              </a:lnSpc>
+              <a:buNone/>
+            </a:pPr>
+            <a:r>
+              <a:rPr lang="en-US" sz="1100" dirty="0">
+                <a:solidFill>
+                  <a:srgbClr val="6E6E6E"/>
+                </a:solidFill>
+                <a:latin typeface="Pretendard" pitchFamily="34" charset="0"/>
+                <a:ea typeface="Pretendard" pitchFamily="34" charset="-122"/>
+                <a:cs typeface="Pretendard" pitchFamily="34" charset="-120"/>
+              </a:rPr>
+              <a:t>오늘 본 비판과 확장 중 내 연구가 어느 자리에 서는지 한 문단으로 씁니다. 프로포절의 연구 방법 절 앞에 들어갑니다.</a:t>
+            </a:r>
+            <a:endParaRPr lang="en-US" sz="1100" dirty="0"/>
+          </a:p>
+        </p:txBody>
+      </p:sp>
+      <p:sp>
+        <p:nvSpPr>
+          <p:cNvPr id="19" name="Shape 17"/>
+          <p:cNvSpPr/>
+          <p:nvPr/>
+        </p:nvSpPr>
+        <p:spPr>
+          <a:xfrm>
+            <a:off x="640080" y="3767328"/>
+            <a:ext cx="6309360" cy="896112"/>
+          </a:xfrm>
+          <a:prstGeom prst="rect">
+            <a:avLst/>
+          </a:prstGeom>
+          <a:solidFill>
+            <a:srgbClr val="FFFFFF"/>
+          </a:solidFill>
+          <a:ln w="12700">
+            <a:solidFill>
+              <a:srgbClr val="DCDCDC"/>
+            </a:solidFill>
+            <a:prstDash val="solid"/>
+          </a:ln>
+        </p:spPr>
+      </p:sp>
+      <p:sp>
+        <p:nvSpPr>
+          <p:cNvPr id="20" name="Shape 18"/>
+          <p:cNvSpPr/>
+          <p:nvPr/>
+        </p:nvSpPr>
+        <p:spPr>
+          <a:xfrm>
+            <a:off x="969264" y="4041648"/>
+            <a:ext cx="329184" cy="329184"/>
+          </a:xfrm>
+          <a:prstGeom prst="ellipse">
             <a:avLst/>
           </a:prstGeom>
           <a:solidFill>
@@ -8452,7 +11931,386 @@
       </p:sp>
       <p:sp>
         <p:nvSpPr>
+          <p:cNvPr id="21" name="Text 19"/>
+          <p:cNvSpPr/>
+          <p:nvPr/>
+        </p:nvSpPr>
+        <p:spPr>
+          <a:xfrm>
+            <a:off x="969264" y="4041648"/>
+            <a:ext cx="329184" cy="329184"/>
+          </a:xfrm>
+          <a:prstGeom prst="rect">
+            <a:avLst/>
+          </a:prstGeom>
+          <a:noFill/>
+          <a:ln/>
+        </p:spPr>
+        <p:txBody>
+          <a:bodyPr wrap="square" lIns="0" tIns="0" rIns="0" bIns="0" rtlCol="0" anchor="ctr"/>
+          <a:lstStyle/>
+          <a:p>
+            <a:pPr algn="ctr" indent="0" marL="0">
+              <a:buNone/>
+            </a:pPr>
+            <a:r>
+              <a:rPr lang="en-US" sz="1100" b="1" dirty="0">
+                <a:solidFill>
+                  <a:srgbClr val="FFFFFF"/>
+                </a:solidFill>
+                <a:latin typeface="Pretendard" pitchFamily="34" charset="0"/>
+                <a:ea typeface="Pretendard" pitchFamily="34" charset="-122"/>
+                <a:cs typeface="Pretendard" pitchFamily="34" charset="-120"/>
+              </a:rPr>
+              <a:t>3</a:t>
+            </a:r>
+            <a:endParaRPr lang="en-US" sz="1100" dirty="0"/>
+          </a:p>
+        </p:txBody>
+      </p:sp>
+      <p:sp>
+        <p:nvSpPr>
+          <p:cNvPr id="22" name="Text 20"/>
+          <p:cNvSpPr/>
+          <p:nvPr/>
+        </p:nvSpPr>
+        <p:spPr>
+          <a:xfrm>
+            <a:off x="1426464" y="3858768"/>
+            <a:ext cx="5175504" cy="329184"/>
+          </a:xfrm>
+          <a:prstGeom prst="rect">
+            <a:avLst/>
+          </a:prstGeom>
+          <a:noFill/>
+          <a:ln/>
+        </p:spPr>
+        <p:txBody>
+          <a:bodyPr wrap="square" lIns="0" tIns="0" rIns="0" bIns="0" rtlCol="0" anchor="ctr"/>
+          <a:lstStyle/>
+          <a:p>
+            <a:pPr indent="0" marL="0">
+              <a:buNone/>
+            </a:pPr>
+            <a:r>
+              <a:rPr lang="en-US" sz="1400" dirty="0">
+                <a:solidFill>
+                  <a:srgbClr val="111111"/>
+                </a:solidFill>
+                <a:latin typeface="Pretendard SemiBold" pitchFamily="34" charset="0"/>
+                <a:ea typeface="Pretendard SemiBold" pitchFamily="34" charset="-122"/>
+                <a:cs typeface="Pretendard SemiBold" pitchFamily="34" charset="-120"/>
+              </a:rPr>
+              <a:t>내 프로포절의 목차</a:t>
+            </a:r>
+            <a:endParaRPr lang="en-US" sz="1400" dirty="0"/>
+          </a:p>
+        </p:txBody>
+      </p:sp>
+      <p:sp>
+        <p:nvSpPr>
+          <p:cNvPr id="23" name="Text 21"/>
+          <p:cNvSpPr/>
+          <p:nvPr/>
+        </p:nvSpPr>
+        <p:spPr>
+          <a:xfrm>
+            <a:off x="1426464" y="4169664"/>
+            <a:ext cx="5175504" cy="420624"/>
+          </a:xfrm>
+          <a:prstGeom prst="rect">
+            <a:avLst/>
+          </a:prstGeom>
+          <a:noFill/>
+          <a:ln/>
+        </p:spPr>
+        <p:txBody>
+          <a:bodyPr wrap="square" lIns="0" tIns="0" rIns="0" bIns="0" rtlCol="0" anchor="t"/>
+          <a:lstStyle/>
+          <a:p>
+            <a:pPr indent="0" marL="0">
+              <a:lnSpc>
+                <a:spcPct val="122000"/>
+              </a:lnSpc>
+              <a:buNone/>
+            </a:pPr>
+            <a:r>
+              <a:rPr lang="en-US" sz="1100" dirty="0">
+                <a:solidFill>
+                  <a:srgbClr val="6E6E6E"/>
+                </a:solidFill>
+                <a:latin typeface="Pretendard" pitchFamily="34" charset="0"/>
+                <a:ea typeface="Pretendard" pitchFamily="34" charset="-122"/>
+                <a:cs typeface="Pretendard" pitchFamily="34" charset="-120"/>
+              </a:rPr>
+              <a:t>2회차에 찾은 다섯 편 중 내 연구와 가장 가까운 한 편의 목차를 절 제목과 쪽수까지 옮겨 적고, 그 옆에 내 목차를 세웁니다. 뺀 절 · 더한 절 · 순서를 바꾼 자리마다 이유를 한 줄씩 답니다.</a:t>
+            </a:r>
+            <a:endParaRPr lang="en-US" sz="1100" dirty="0"/>
+          </a:p>
+        </p:txBody>
+      </p:sp>
+      <p:sp>
+        <p:nvSpPr>
+          <p:cNvPr id="24" name="Shape 22"/>
+          <p:cNvSpPr/>
+          <p:nvPr/>
+        </p:nvSpPr>
+        <p:spPr>
+          <a:xfrm>
+            <a:off x="640080" y="4791456"/>
+            <a:ext cx="6309360" cy="896112"/>
+          </a:xfrm>
+          <a:prstGeom prst="rect">
+            <a:avLst/>
+          </a:prstGeom>
+          <a:solidFill>
+            <a:srgbClr val="FFFFFF"/>
+          </a:solidFill>
+          <a:ln w="12700">
+            <a:solidFill>
+              <a:srgbClr val="DCDCDC"/>
+            </a:solidFill>
+            <a:prstDash val="solid"/>
+          </a:ln>
+        </p:spPr>
+      </p:sp>
+      <p:sp>
+        <p:nvSpPr>
+          <p:cNvPr id="25" name="Shape 23"/>
+          <p:cNvSpPr/>
+          <p:nvPr/>
+        </p:nvSpPr>
+        <p:spPr>
+          <a:xfrm>
+            <a:off x="969264" y="5065776"/>
+            <a:ext cx="329184" cy="329184"/>
+          </a:xfrm>
+          <a:prstGeom prst="ellipse">
+            <a:avLst/>
+          </a:prstGeom>
+          <a:solidFill>
+            <a:srgbClr val="111111"/>
+          </a:solidFill>
+          <a:ln w="12700">
+            <a:solidFill>
+              <a:srgbClr val="111111"/>
+            </a:solidFill>
+            <a:prstDash val="solid"/>
+          </a:ln>
+        </p:spPr>
+      </p:sp>
+      <p:sp>
+        <p:nvSpPr>
+          <p:cNvPr id="26" name="Text 24"/>
+          <p:cNvSpPr/>
+          <p:nvPr/>
+        </p:nvSpPr>
+        <p:spPr>
+          <a:xfrm>
+            <a:off x="969264" y="5065776"/>
+            <a:ext cx="329184" cy="329184"/>
+          </a:xfrm>
+          <a:prstGeom prst="rect">
+            <a:avLst/>
+          </a:prstGeom>
+          <a:noFill/>
+          <a:ln/>
+        </p:spPr>
+        <p:txBody>
+          <a:bodyPr wrap="square" lIns="0" tIns="0" rIns="0" bIns="0" rtlCol="0" anchor="ctr"/>
+          <a:lstStyle/>
+          <a:p>
+            <a:pPr algn="ctr" indent="0" marL="0">
+              <a:buNone/>
+            </a:pPr>
+            <a:r>
+              <a:rPr lang="en-US" sz="1100" b="1" dirty="0">
+                <a:solidFill>
+                  <a:srgbClr val="FFFFFF"/>
+                </a:solidFill>
+                <a:latin typeface="Pretendard" pitchFamily="34" charset="0"/>
+                <a:ea typeface="Pretendard" pitchFamily="34" charset="-122"/>
+                <a:cs typeface="Pretendard" pitchFamily="34" charset="-120"/>
+              </a:rPr>
+              <a:t>4</a:t>
+            </a:r>
+            <a:endParaRPr lang="en-US" sz="1100" dirty="0"/>
+          </a:p>
+        </p:txBody>
+      </p:sp>
+      <p:sp>
+        <p:nvSpPr>
           <p:cNvPr id="27" name="Text 25"/>
+          <p:cNvSpPr/>
+          <p:nvPr/>
+        </p:nvSpPr>
+        <p:spPr>
+          <a:xfrm>
+            <a:off x="1426464" y="4882896"/>
+            <a:ext cx="5175504" cy="329184"/>
+          </a:xfrm>
+          <a:prstGeom prst="rect">
+            <a:avLst/>
+          </a:prstGeom>
+          <a:noFill/>
+          <a:ln/>
+        </p:spPr>
+        <p:txBody>
+          <a:bodyPr wrap="square" lIns="0" tIns="0" rIns="0" bIns="0" rtlCol="0" anchor="ctr"/>
+          <a:lstStyle/>
+          <a:p>
+            <a:pPr indent="0" marL="0">
+              <a:buNone/>
+            </a:pPr>
+            <a:r>
+              <a:rPr lang="en-US" sz="1400" dirty="0">
+                <a:solidFill>
+                  <a:srgbClr val="111111"/>
+                </a:solidFill>
+                <a:latin typeface="Pretendard SemiBold" pitchFamily="34" charset="0"/>
+                <a:ea typeface="Pretendard SemiBold" pitchFamily="34" charset="-122"/>
+                <a:cs typeface="Pretendard SemiBold" pitchFamily="34" charset="-120"/>
+              </a:rPr>
+              <a:t>동료 프로포절 읽고 질문 두 개</a:t>
+            </a:r>
+            <a:endParaRPr lang="en-US" sz="1400" dirty="0"/>
+          </a:p>
+        </p:txBody>
+      </p:sp>
+      <p:sp>
+        <p:nvSpPr>
+          <p:cNvPr id="28" name="Text 26"/>
+          <p:cNvSpPr/>
+          <p:nvPr/>
+        </p:nvSpPr>
+        <p:spPr>
+          <a:xfrm>
+            <a:off x="1426464" y="5193792"/>
+            <a:ext cx="5175504" cy="420624"/>
+          </a:xfrm>
+          <a:prstGeom prst="rect">
+            <a:avLst/>
+          </a:prstGeom>
+          <a:noFill/>
+          <a:ln/>
+        </p:spPr>
+        <p:txBody>
+          <a:bodyPr wrap="square" lIns="0" tIns="0" rIns="0" bIns="0" rtlCol="0" anchor="t"/>
+          <a:lstStyle/>
+          <a:p>
+            <a:pPr indent="0" marL="0">
+              <a:lnSpc>
+                <a:spcPct val="122000"/>
+              </a:lnSpc>
+              <a:buNone/>
+            </a:pPr>
+            <a:r>
+              <a:rPr lang="en-US" sz="1100" dirty="0">
+                <a:solidFill>
+                  <a:srgbClr val="6E6E6E"/>
+                </a:solidFill>
+                <a:latin typeface="Pretendard" pitchFamily="34" charset="0"/>
+                <a:ea typeface="Pretendard" pitchFamily="34" charset="-122"/>
+                <a:cs typeface="Pretendard" pitchFamily="34" charset="-120"/>
+              </a:rPr>
+              <a:t>올라온 드래프트를 읽고 각 사람에게 질문을 두 개씩 준비해 옵니다. 8회차는 상호 리뷰가 절반입니다.</a:t>
+            </a:r>
+            <a:endParaRPr lang="en-US" sz="1100" dirty="0"/>
+          </a:p>
+        </p:txBody>
+      </p:sp>
+      <p:sp>
+        <p:nvSpPr>
+          <p:cNvPr id="29" name="Shape 27"/>
+          <p:cNvSpPr/>
+          <p:nvPr/>
+        </p:nvSpPr>
+        <p:spPr>
+          <a:xfrm>
+            <a:off x="640080" y="5833872"/>
+            <a:ext cx="6309360" cy="7315"/>
+          </a:xfrm>
+          <a:prstGeom prst="rect">
+            <a:avLst/>
+          </a:prstGeom>
+          <a:solidFill>
+            <a:srgbClr val="111111"/>
+          </a:solidFill>
+          <a:ln w="12700">
+            <a:solidFill>
+              <a:srgbClr val="111111"/>
+            </a:solidFill>
+            <a:prstDash val="solid"/>
+          </a:ln>
+        </p:spPr>
+      </p:sp>
+      <p:sp>
+        <p:nvSpPr>
+          <p:cNvPr id="30" name="Text 28"/>
+          <p:cNvSpPr/>
+          <p:nvPr/>
+        </p:nvSpPr>
+        <p:spPr>
+          <a:xfrm>
+            <a:off x="640080" y="5925312"/>
+            <a:ext cx="6309360" cy="329184"/>
+          </a:xfrm>
+          <a:prstGeom prst="rect">
+            <a:avLst/>
+          </a:prstGeom>
+          <a:noFill/>
+          <a:ln/>
+        </p:spPr>
+        <p:txBody>
+          <a:bodyPr wrap="square" lIns="0" tIns="0" rIns="0" bIns="0" rtlCol="0" anchor="ctr"/>
+          <a:lstStyle/>
+          <a:p>
+            <a:pPr indent="0" marL="0">
+              <a:buNone/>
+            </a:pPr>
+            <a:r>
+              <a:rPr lang="en-US" sz="1200" b="1" dirty="0">
+                <a:solidFill>
+                  <a:srgbClr val="111111"/>
+                </a:solidFill>
+                <a:latin typeface="Pretendard" pitchFamily="34" charset="0"/>
+                <a:ea typeface="Pretendard" pitchFamily="34" charset="-122"/>
+                <a:cs typeface="Pretendard" pitchFamily="34" charset="-120"/>
+              </a:rPr>
+              <a:t>제출 — 8회차 세션 48시간 전까지 · 공유 폴더 업로드</a:t>
+            </a:r>
+            <a:endParaRPr lang="en-US" sz="1200" dirty="0"/>
+          </a:p>
+        </p:txBody>
+      </p:sp>
+      <p:sp>
+        <p:nvSpPr>
+          <p:cNvPr id="31" name="Shape 29"/>
+          <p:cNvSpPr/>
+          <p:nvPr/>
+        </p:nvSpPr>
+        <p:spPr>
+          <a:xfrm>
+            <a:off x="7351776" y="1719072"/>
+            <a:ext cx="4199839" cy="3803904"/>
+          </a:xfrm>
+          <a:prstGeom prst="rect">
+            <a:avLst/>
+          </a:prstGeom>
+          <a:solidFill>
+            <a:srgbClr val="111111"/>
+          </a:solidFill>
+          <a:ln w="12700">
+            <a:solidFill>
+              <a:srgbClr val="111111"/>
+            </a:solidFill>
+            <a:prstDash val="solid"/>
+          </a:ln>
+        </p:spPr>
+      </p:sp>
+      <p:sp>
+        <p:nvSpPr>
+          <p:cNvPr id="32" name="Text 30"/>
           <p:cNvSpPr/>
           <p:nvPr/>
         </p:nvSpPr>
@@ -8491,7 +12349,7 @@
       </p:sp>
       <p:sp>
         <p:nvSpPr>
-          <p:cNvPr id="28" name="Text 26"/>
+          <p:cNvPr id="33" name="Text 31"/>
           <p:cNvSpPr/>
           <p:nvPr/>
         </p:nvSpPr>
@@ -8530,7 +12388,7 @@
       </p:sp>
       <p:sp>
         <p:nvSpPr>
-          <p:cNvPr id="29" name="Text 27"/>
+          <p:cNvPr id="34" name="Text 32"/>
           <p:cNvSpPr/>
           <p:nvPr/>
         </p:nvSpPr>
@@ -8572,7 +12430,7 @@
       </p:sp>
       <p:sp>
         <p:nvSpPr>
-          <p:cNvPr id="30" name="Shape 28"/>
+          <p:cNvPr id="35" name="Shape 33"/>
           <p:cNvSpPr/>
           <p:nvPr/>
         </p:nvSpPr>
@@ -8597,7 +12455,7 @@
       </p:sp>
       <p:sp>
         <p:nvSpPr>
-          <p:cNvPr id="31" name="Text 29"/>
+          <p:cNvPr id="36" name="Text 34"/>
           <p:cNvSpPr/>
           <p:nvPr/>
         </p:nvSpPr>
@@ -8715,7 +12573,7 @@
       </p:sp>
       <p:sp>
         <p:nvSpPr>
-          <p:cNvPr id="32" name="Shape 30"/>
+          <p:cNvPr id="37" name="Shape 35"/>
           <p:cNvSpPr/>
           <p:nvPr/>
         </p:nvSpPr>
@@ -8740,7 +12598,7 @@
       </p:sp>
       <p:sp>
         <p:nvSpPr>
-          <p:cNvPr id="33" name="Text 31"/>
+          <p:cNvPr id="38" name="Text 36"/>
           <p:cNvSpPr/>
           <p:nvPr/>
         </p:nvSpPr>
@@ -8779,7 +12637,7 @@
       </p:sp>
       <p:sp>
         <p:nvSpPr>
-          <p:cNvPr id="34" name="Text 32"/>
+          <p:cNvPr id="39" name="Text 37"/>
           <p:cNvSpPr/>
           <p:nvPr/>
         </p:nvSpPr>
@@ -8813,7 +12671,7 @@
                 <a:ea typeface="Pretendard" pitchFamily="34" charset="-122"/>
                 <a:cs typeface="Pretendard" pitchFamily="34" charset="-120"/>
               </a:rPr>
-              <a:t>프로포절 드래프트 48시간 전 공유 · 동료 질문 두 개씩 · 입장 한 문단</a:t>
+              <a:t>프로포절 드래프트 48시간 전 공유 · 동료 질문 두 개씩 · 입장 한 문단 · 목차 대조표</a:t>
             </a:r>
             <a:endParaRPr lang="en-US" sz="1100" dirty="0"/>
           </a:p>
@@ -8821,7 +12679,7 @@
       </p:sp>
       <p:sp>
         <p:nvSpPr>
-          <p:cNvPr id="35" name="Shape 33"/>
+          <p:cNvPr id="40" name="Shape 38"/>
           <p:cNvSpPr/>
           <p:nvPr/>
         </p:nvSpPr>
@@ -8846,7 +12704,7 @@
       </p:sp>
       <p:sp>
         <p:nvSpPr>
-          <p:cNvPr id="36" name="Text 34"/>
+          <p:cNvPr id="41" name="Text 39"/>
           <p:cNvSpPr/>
           <p:nvPr/>
         </p:nvSpPr>
@@ -8885,7 +12743,7 @@
       </p:sp>
       <p:sp>
         <p:nvSpPr>
-          <p:cNvPr id="37" name="Text 35"/>
+          <p:cNvPr id="42" name="Text 40"/>
           <p:cNvSpPr/>
           <p:nvPr/>
         </p:nvSpPr>
@@ -8916,7 +12774,7 @@
                 <a:ea typeface="Pretendard" pitchFamily="34" charset="-122"/>
                 <a:cs typeface="Pretendard" pitchFamily="34" charset="-120"/>
               </a:rPr>
-              <a:t>P.09</a:t>
+              <a:t>P.11</a:t>
             </a:r>
             <a:endParaRPr lang="en-US" sz="850" dirty="0"/>
           </a:p>
